--- a/ゲーム科1年/00_前期/ゲームプログラミングⅢ/ゲーム数学/実習/03_Sin波.pptx
+++ b/ゲーム科1年/00_前期/ゲームプログラミングⅢ/ゲーム数学/実習/03_Sin波.pptx
@@ -7,12 +7,11 @@
   <p:sldIdLst>
     <p:sldId id="256" r:id="rId2"/>
     <p:sldId id="257" r:id="rId3"/>
-    <p:sldId id="258" r:id="rId4"/>
-    <p:sldId id="260" r:id="rId5"/>
-    <p:sldId id="261" r:id="rId6"/>
-    <p:sldId id="262" r:id="rId7"/>
-    <p:sldId id="263" r:id="rId8"/>
-    <p:sldId id="259" r:id="rId9"/>
+    <p:sldId id="264" r:id="rId4"/>
+    <p:sldId id="265" r:id="rId5"/>
+    <p:sldId id="266" r:id="rId6"/>
+    <p:sldId id="267" r:id="rId7"/>
+    <p:sldId id="268" r:id="rId8"/>
   </p:sldIdLst>
   <p:sldSz cx="12192000" cy="6858000"/>
   <p:notesSz cx="6858000" cy="9144000"/>
@@ -266,7 +265,7 @@
           <a:p>
             <a:fld id="{E9CC885B-4903-4D54-9A93-00025F12DED9}" type="datetimeFigureOut">
               <a:rPr kumimoji="1" lang="ja-JP" altLang="en-US" smtClean="0"/>
-              <a:t>2024/11/5</a:t>
+              <a:t>2026/2/19</a:t>
             </a:fld>
             <a:endParaRPr kumimoji="1" lang="ja-JP" altLang="en-US"/>
           </a:p>
@@ -496,7 +495,7 @@
           <a:p>
             <a:fld id="{E9CC885B-4903-4D54-9A93-00025F12DED9}" type="datetimeFigureOut">
               <a:rPr kumimoji="1" lang="ja-JP" altLang="en-US" smtClean="0"/>
-              <a:t>2024/11/5</a:t>
+              <a:t>2026/2/19</a:t>
             </a:fld>
             <a:endParaRPr kumimoji="1" lang="ja-JP" altLang="en-US"/>
           </a:p>
@@ -736,7 +735,7 @@
           <a:p>
             <a:fld id="{E9CC885B-4903-4D54-9A93-00025F12DED9}" type="datetimeFigureOut">
               <a:rPr kumimoji="1" lang="ja-JP" altLang="en-US" smtClean="0"/>
-              <a:t>2024/11/5</a:t>
+              <a:t>2026/2/19</a:t>
             </a:fld>
             <a:endParaRPr kumimoji="1" lang="ja-JP" altLang="en-US"/>
           </a:p>
@@ -966,7 +965,7 @@
           <a:p>
             <a:fld id="{E9CC885B-4903-4D54-9A93-00025F12DED9}" type="datetimeFigureOut">
               <a:rPr kumimoji="1" lang="ja-JP" altLang="en-US" smtClean="0"/>
-              <a:t>2024/11/5</a:t>
+              <a:t>2026/2/19</a:t>
             </a:fld>
             <a:endParaRPr kumimoji="1" lang="ja-JP" altLang="en-US"/>
           </a:p>
@@ -1241,7 +1240,7 @@
           <a:p>
             <a:fld id="{E9CC885B-4903-4D54-9A93-00025F12DED9}" type="datetimeFigureOut">
               <a:rPr kumimoji="1" lang="ja-JP" altLang="en-US" smtClean="0"/>
-              <a:t>2024/11/5</a:t>
+              <a:t>2026/2/19</a:t>
             </a:fld>
             <a:endParaRPr kumimoji="1" lang="ja-JP" altLang="en-US"/>
           </a:p>
@@ -1570,7 +1569,7 @@
           <a:p>
             <a:fld id="{E9CC885B-4903-4D54-9A93-00025F12DED9}" type="datetimeFigureOut">
               <a:rPr kumimoji="1" lang="ja-JP" altLang="en-US" smtClean="0"/>
-              <a:t>2024/11/5</a:t>
+              <a:t>2026/2/19</a:t>
             </a:fld>
             <a:endParaRPr kumimoji="1" lang="ja-JP" altLang="en-US"/>
           </a:p>
@@ -2046,7 +2045,7 @@
           <a:p>
             <a:fld id="{E9CC885B-4903-4D54-9A93-00025F12DED9}" type="datetimeFigureOut">
               <a:rPr kumimoji="1" lang="ja-JP" altLang="en-US" smtClean="0"/>
-              <a:t>2024/11/5</a:t>
+              <a:t>2026/2/19</a:t>
             </a:fld>
             <a:endParaRPr kumimoji="1" lang="ja-JP" altLang="en-US"/>
           </a:p>
@@ -2187,7 +2186,7 @@
           <a:p>
             <a:fld id="{E9CC885B-4903-4D54-9A93-00025F12DED9}" type="datetimeFigureOut">
               <a:rPr kumimoji="1" lang="ja-JP" altLang="en-US" smtClean="0"/>
-              <a:t>2024/11/5</a:t>
+              <a:t>2026/2/19</a:t>
             </a:fld>
             <a:endParaRPr kumimoji="1" lang="ja-JP" altLang="en-US"/>
           </a:p>
@@ -2300,7 +2299,7 @@
           <a:p>
             <a:fld id="{E9CC885B-4903-4D54-9A93-00025F12DED9}" type="datetimeFigureOut">
               <a:rPr kumimoji="1" lang="ja-JP" altLang="en-US" smtClean="0"/>
-              <a:t>2024/11/5</a:t>
+              <a:t>2026/2/19</a:t>
             </a:fld>
             <a:endParaRPr kumimoji="1" lang="ja-JP" altLang="en-US"/>
           </a:p>
@@ -2643,7 +2642,7 @@
           <a:p>
             <a:fld id="{E9CC885B-4903-4D54-9A93-00025F12DED9}" type="datetimeFigureOut">
               <a:rPr kumimoji="1" lang="ja-JP" altLang="en-US" smtClean="0"/>
-              <a:t>2024/11/5</a:t>
+              <a:t>2026/2/19</a:t>
             </a:fld>
             <a:endParaRPr kumimoji="1" lang="ja-JP" altLang="en-US"/>
           </a:p>
@@ -2931,7 +2930,7 @@
           <a:p>
             <a:fld id="{E9CC885B-4903-4D54-9A93-00025F12DED9}" type="datetimeFigureOut">
               <a:rPr kumimoji="1" lang="ja-JP" altLang="en-US" smtClean="0"/>
-              <a:t>2024/11/5</a:t>
+              <a:t>2026/2/19</a:t>
             </a:fld>
             <a:endParaRPr kumimoji="1" lang="ja-JP" altLang="en-US"/>
           </a:p>
@@ -3204,7 +3203,7 @@
           <a:p>
             <a:fld id="{E9CC885B-4903-4D54-9A93-00025F12DED9}" type="datetimeFigureOut">
               <a:rPr kumimoji="1" lang="ja-JP" altLang="en-US" smtClean="0"/>
-              <a:t>2024/11/5</a:t>
+              <a:t>2026/2/19</a:t>
             </a:fld>
             <a:endParaRPr kumimoji="1" lang="ja-JP" altLang="en-US"/>
           </a:p>
@@ -5255,7 +5254,7 @@
         <p:spPr>
           <a:xfrm>
             <a:off x="567542" y="1216429"/>
-            <a:ext cx="9631163" cy="4154984"/>
+            <a:ext cx="8494633" cy="3416320"/>
           </a:xfrm>
           <a:prstGeom prst="rect">
             <a:avLst/>
@@ -5270,7 +5269,35 @@
           <a:p>
             <a:r>
               <a:rPr kumimoji="1" lang="ja-JP" altLang="en-US" sz="2400" dirty="0"/>
-              <a:t>今回のために用意している変数は以下の通りです。</a:t>
+              <a:t>プログラムで</a:t>
+            </a:r>
+            <a:r>
+              <a:rPr kumimoji="1" lang="en-US" altLang="ja-JP" sz="2400" dirty="0"/>
+              <a:t>Sin</a:t>
+            </a:r>
+            <a:r>
+              <a:rPr kumimoji="1" lang="ja-JP" altLang="en-US" sz="2400" dirty="0"/>
+              <a:t>関数を使う場合は、</a:t>
+            </a:r>
+            <a:r>
+              <a:rPr kumimoji="1" lang="en-US" altLang="ja-JP" sz="2400" b="1" dirty="0" err="1">
+                <a:solidFill>
+                  <a:srgbClr val="0070C0"/>
+                </a:solidFill>
+              </a:rPr>
+              <a:t>sinf</a:t>
+            </a:r>
+            <a:r>
+              <a:rPr kumimoji="1" lang="ja-JP" altLang="en-US" sz="2400" b="1" dirty="0">
+                <a:solidFill>
+                  <a:srgbClr val="0070C0"/>
+                </a:solidFill>
+              </a:rPr>
+              <a:t>関数</a:t>
+            </a:r>
+            <a:r>
+              <a:rPr kumimoji="1" lang="ja-JP" altLang="en-US" sz="2400" dirty="0"/>
+              <a:t>を使います。</a:t>
             </a:r>
             <a:endParaRPr kumimoji="1" lang="en-US" altLang="ja-JP" sz="2400" dirty="0"/>
           </a:p>
@@ -5279,133 +5306,102 @@
           </a:p>
           <a:p>
             <a:r>
-              <a:rPr lang="en-US" altLang="ja-JP" sz="2400" dirty="0" err="1"/>
-              <a:t>g_MoveBlockData.posX</a:t>
-            </a:r>
-            <a:r>
-              <a:rPr lang="en-US" altLang="ja-JP" sz="2400" dirty="0"/>
-              <a:t>		</a:t>
+              <a:rPr lang="ja-JP" altLang="en-US" sz="2400" b="1" dirty="0">
+                <a:solidFill>
+                  <a:srgbClr val="FF0000"/>
+                </a:solidFill>
+              </a:rPr>
+              <a:t>■関数仕様</a:t>
+            </a:r>
+            <a:endParaRPr lang="en-US" altLang="ja-JP" sz="2400" b="1" dirty="0">
+              <a:solidFill>
+                <a:srgbClr val="FF0000"/>
+              </a:solidFill>
+            </a:endParaRPr>
+          </a:p>
+          <a:p>
+            <a:r>
+              <a:rPr lang="en-US" altLang="ja-JP" sz="2400" dirty="0">
+                <a:solidFill>
+                  <a:srgbClr val="0070C0"/>
+                </a:solidFill>
+              </a:rPr>
+              <a:t>float</a:t>
             </a:r>
             <a:r>
               <a:rPr lang="ja-JP" altLang="en-US" sz="2400" dirty="0"/>
-              <a:t>・・・床の座標</a:t>
-            </a:r>
-            <a:r>
-              <a:rPr lang="en-US" altLang="ja-JP" sz="2400" dirty="0"/>
-              <a:t>X</a:t>
-            </a:r>
-          </a:p>
-          <a:p>
-            <a:r>
-              <a:rPr lang="en-US" altLang="ja-JP" sz="2400" dirty="0" err="1"/>
-              <a:t>g_MoveBlockData.posY</a:t>
-            </a:r>
-            <a:r>
-              <a:rPr lang="en-US" altLang="ja-JP" sz="2400" dirty="0"/>
-              <a:t>		</a:t>
-            </a:r>
-            <a:r>
-              <a:rPr lang="ja-JP" altLang="en-US" sz="2400" dirty="0"/>
-              <a:t>・・・床の座標</a:t>
-            </a:r>
-            <a:r>
-              <a:rPr lang="en-US" altLang="ja-JP" sz="2400" dirty="0"/>
-              <a:t>Y</a:t>
-            </a:r>
-          </a:p>
-          <a:p>
-            <a:r>
-              <a:rPr lang="en-US" altLang="ja-JP" sz="2400" dirty="0" err="1"/>
-              <a:t>g_MoveBlockData.startX</a:t>
-            </a:r>
-            <a:r>
-              <a:rPr lang="en-US" altLang="ja-JP" sz="2400" dirty="0"/>
-              <a:t>		</a:t>
-            </a:r>
-            <a:r>
-              <a:rPr lang="ja-JP" altLang="en-US" sz="2400" dirty="0"/>
-              <a:t>・・・床の初期位置</a:t>
-            </a:r>
-            <a:r>
-              <a:rPr lang="en-US" altLang="ja-JP" sz="2400" dirty="0"/>
-              <a:t>X</a:t>
-            </a:r>
-          </a:p>
-          <a:p>
-            <a:r>
-              <a:rPr lang="en-US" altLang="ja-JP" sz="2400" dirty="0" err="1"/>
-              <a:t>g_MoveBlockData.startY</a:t>
-            </a:r>
-            <a:r>
-              <a:rPr lang="en-US" altLang="ja-JP" sz="2400" dirty="0"/>
-              <a:t>		</a:t>
-            </a:r>
-            <a:r>
-              <a:rPr lang="ja-JP" altLang="en-US" sz="2400" dirty="0"/>
-              <a:t>・・・床の初期位置</a:t>
-            </a:r>
-            <a:r>
-              <a:rPr lang="en-US" altLang="ja-JP" sz="2400" dirty="0"/>
-              <a:t>Y</a:t>
-            </a:r>
-          </a:p>
-          <a:p>
-            <a:r>
-              <a:rPr lang="en-US" altLang="ja-JP" sz="2400" dirty="0" err="1"/>
-              <a:t>g_MoveBlockData.sinAngle</a:t>
-            </a:r>
-            <a:r>
-              <a:rPr lang="en-US" altLang="ja-JP" sz="2400" dirty="0"/>
-              <a:t>	</a:t>
-            </a:r>
-            <a:r>
-              <a:rPr lang="ja-JP" altLang="en-US" sz="2400" dirty="0"/>
-              <a:t>・・・</a:t>
+              <a:t> </a:t>
             </a:r>
             <a:r>
               <a:rPr lang="en-US" altLang="ja-JP" sz="2400" dirty="0" err="1"/>
               <a:t>sinf</a:t>
             </a:r>
             <a:r>
+              <a:rPr lang="en-US" altLang="ja-JP" sz="2400" dirty="0"/>
+              <a:t>(</a:t>
+            </a:r>
+            <a:r>
+              <a:rPr lang="en-US" altLang="ja-JP" sz="2400" dirty="0">
+                <a:solidFill>
+                  <a:srgbClr val="0070C0"/>
+                </a:solidFill>
+              </a:rPr>
+              <a:t>float</a:t>
+            </a:r>
+            <a:r>
+              <a:rPr lang="en-US" altLang="ja-JP" sz="2400" dirty="0"/>
+              <a:t> _X);</a:t>
+            </a:r>
+          </a:p>
+          <a:p>
+            <a:endParaRPr kumimoji="1" lang="en-US" altLang="ja-JP" sz="2400" dirty="0"/>
+          </a:p>
+          <a:p>
+            <a:r>
+              <a:rPr kumimoji="1" lang="ja-JP" altLang="en-US" sz="2400" dirty="0"/>
+              <a:t>引　数・・・角度（単位：ラジアン）</a:t>
+            </a:r>
+            <a:endParaRPr kumimoji="1" lang="en-US" altLang="ja-JP" sz="2400" dirty="0"/>
+          </a:p>
+          <a:p>
+            <a:r>
               <a:rPr lang="ja-JP" altLang="en-US" sz="2400" dirty="0"/>
-              <a:t>に渡す角度（ラジアン）</a:t>
+              <a:t>戻り値・・・引数の角度に対応した</a:t>
+            </a:r>
+            <a:r>
+              <a:rPr lang="en-US" altLang="ja-JP" sz="2400" dirty="0"/>
+              <a:t>Sin</a:t>
+            </a:r>
+            <a:r>
+              <a:rPr lang="ja-JP" altLang="en-US" sz="2400" dirty="0"/>
+              <a:t>値</a:t>
             </a:r>
             <a:endParaRPr lang="en-US" altLang="ja-JP" sz="2400" dirty="0"/>
           </a:p>
           <a:p>
-            <a:r>
-              <a:rPr lang="en-US" altLang="ja-JP" sz="2400" dirty="0" err="1"/>
-              <a:t>g_MoveBlockData.sinRange</a:t>
-            </a:r>
-            <a:r>
-              <a:rPr lang="en-US" altLang="ja-JP" sz="2400" dirty="0"/>
-              <a:t>	</a:t>
-            </a:r>
-            <a:r>
-              <a:rPr lang="ja-JP" altLang="en-US" sz="2400" dirty="0"/>
-              <a:t>・・・上下の移動幅</a:t>
-            </a:r>
-            <a:endParaRPr lang="en-US" altLang="ja-JP" sz="2400" dirty="0"/>
-          </a:p>
-          <a:p>
             <a:endParaRPr kumimoji="1" lang="en-US" altLang="ja-JP" sz="2400" dirty="0"/>
           </a:p>
           <a:p>
-            <a:endParaRPr lang="en-US" altLang="ja-JP" sz="2400" dirty="0"/>
-          </a:p>
-          <a:p>
-            <a:r>
-              <a:rPr kumimoji="1" lang="ja-JP" altLang="en-US" sz="2400" dirty="0"/>
-              <a:t>これらを使って完成させます。</a:t>
-            </a:r>
-            <a:endParaRPr kumimoji="1" lang="en-US" altLang="ja-JP" sz="2400" dirty="0"/>
+            <a:r>
+              <a:rPr lang="ja-JP" altLang="en-US" sz="2400" b="1" dirty="0">
+                <a:solidFill>
+                  <a:srgbClr val="FF0000"/>
+                </a:solidFill>
+              </a:rPr>
+              <a:t>引数の角度を増やしていくと、波形の値が取得できます。</a:t>
+            </a:r>
+            <a:endParaRPr kumimoji="1" lang="en-US" altLang="ja-JP" sz="2400" b="1" dirty="0">
+              <a:solidFill>
+                <a:srgbClr val="FF0000"/>
+              </a:solidFill>
+            </a:endParaRPr>
           </a:p>
         </p:txBody>
       </p:sp>
     </p:spTree>
     <p:extLst>
       <p:ext uri="{BB962C8B-B14F-4D97-AF65-F5344CB8AC3E}">
-        <p14:creationId xmlns:p14="http://schemas.microsoft.com/office/powerpoint/2010/main" val="1128967545"/>
+        <p14:creationId xmlns:p14="http://schemas.microsoft.com/office/powerpoint/2010/main" val="549528505"/>
       </p:ext>
     </p:extLst>
   </p:cSld>
@@ -5486,7 +5482,7 @@
         <p:spPr>
           <a:xfrm>
             <a:off x="567542" y="1216429"/>
-            <a:ext cx="9387506" cy="1200329"/>
+            <a:ext cx="4935967" cy="461665"/>
           </a:xfrm>
           <a:prstGeom prst="rect">
             <a:avLst/>
@@ -5500,1375 +5496,59 @@
           <a:lstStyle/>
           <a:p>
             <a:r>
-              <a:rPr lang="ja-JP" altLang="en-US" sz="2400" dirty="0"/>
-              <a:t>まずは</a:t>
-            </a:r>
-            <a:r>
-              <a:rPr lang="en-US" altLang="ja-JP" sz="2400" b="1" dirty="0" err="1">
-                <a:solidFill>
-                  <a:srgbClr val="0070C0"/>
-                </a:solidFill>
-              </a:rPr>
-              <a:t>sinf</a:t>
-            </a:r>
-            <a:r>
-              <a:rPr lang="ja-JP" altLang="en-US" sz="2400" dirty="0"/>
-              <a:t>関数を使って波の値を取得します。</a:t>
-            </a:r>
-            <a:endParaRPr lang="en-US" altLang="ja-JP" sz="2400" dirty="0"/>
-          </a:p>
-          <a:p>
-            <a:r>
-              <a:rPr kumimoji="1" lang="ja-JP" altLang="en-US" sz="2400" dirty="0"/>
-              <a:t>ただし、</a:t>
-            </a:r>
-            <a:r>
-              <a:rPr lang="en-US" altLang="ja-JP" sz="2400" b="1" dirty="0">
+              <a:rPr kumimoji="1" lang="en-US" altLang="ja-JP" sz="2400" b="1" dirty="0">
                 <a:solidFill>
                   <a:srgbClr val="FF0000"/>
                 </a:solidFill>
               </a:rPr>
-              <a:t>sin</a:t>
-            </a:r>
-            <a:r>
-              <a:rPr lang="ja-JP" altLang="en-US" sz="2400" b="1" dirty="0">
-                <a:solidFill>
-                  <a:srgbClr val="FF0000"/>
-                </a:solidFill>
-              </a:rPr>
-              <a:t>波は</a:t>
-            </a:r>
-            <a:r>
-              <a:rPr lang="en-US" altLang="ja-JP" sz="2400" b="1" dirty="0">
-                <a:solidFill>
-                  <a:srgbClr val="FF0000"/>
-                </a:solidFill>
-              </a:rPr>
-              <a:t>-1</a:t>
-            </a:r>
-            <a:r>
-              <a:rPr lang="ja-JP" altLang="en-US" sz="2400" b="1" dirty="0">
-                <a:solidFill>
-                  <a:srgbClr val="FF0000"/>
-                </a:solidFill>
-              </a:rPr>
-              <a:t>～</a:t>
-            </a:r>
-            <a:r>
-              <a:rPr lang="en-US" altLang="ja-JP" sz="2400" b="1" dirty="0">
-                <a:solidFill>
-                  <a:srgbClr val="FF0000"/>
-                </a:solidFill>
-              </a:rPr>
-              <a:t>1</a:t>
-            </a:r>
-            <a:r>
-              <a:rPr lang="ja-JP" altLang="en-US" sz="2400" b="1" dirty="0">
-                <a:solidFill>
-                  <a:srgbClr val="FF0000"/>
-                </a:solidFill>
-              </a:rPr>
-              <a:t>の数値を返却</a:t>
-            </a:r>
-            <a:r>
-              <a:rPr lang="ja-JP" altLang="en-US" sz="2400" dirty="0"/>
-              <a:t>するので、</a:t>
-            </a:r>
-            <a:r>
-              <a:rPr lang="ja-JP" altLang="en-US" sz="2400" b="1" dirty="0">
-                <a:solidFill>
-                  <a:srgbClr val="FF0000"/>
-                </a:solidFill>
-              </a:rPr>
-              <a:t>上下の移動幅だけ、</a:t>
-            </a:r>
-            <a:endParaRPr lang="en-US" altLang="ja-JP" sz="2400" b="1" dirty="0">
+              <a:t>MoveBlock.cpp</a:t>
+            </a:r>
+            <a:r>
+              <a:rPr kumimoji="1" lang="ja-JP" altLang="en-US" sz="2400" dirty="0"/>
+              <a:t>を開きましょう。</a:t>
+            </a:r>
+            <a:endParaRPr kumimoji="1" lang="en-US" altLang="ja-JP" sz="2400" b="1" dirty="0">
               <a:solidFill>
                 <a:srgbClr val="FF0000"/>
               </a:solidFill>
             </a:endParaRPr>
           </a:p>
-          <a:p>
-            <a:r>
-              <a:rPr kumimoji="1" lang="ja-JP" altLang="en-US" sz="2400" b="1" dirty="0">
-                <a:solidFill>
-                  <a:srgbClr val="FF0000"/>
-                </a:solidFill>
-              </a:rPr>
-              <a:t>数値を大きくする</a:t>
-            </a:r>
-            <a:r>
-              <a:rPr kumimoji="1" lang="ja-JP" altLang="en-US" sz="2400" dirty="0"/>
-              <a:t>必要があります。</a:t>
-            </a:r>
-            <a:endParaRPr kumimoji="1" lang="en-US" altLang="ja-JP" sz="2400" dirty="0"/>
-          </a:p>
-        </p:txBody>
-      </p:sp>
-      <p:grpSp>
-        <p:nvGrpSpPr>
-          <p:cNvPr id="5" name="グループ化 4">
-            <a:extLst>
-              <a:ext uri="{FF2B5EF4-FFF2-40B4-BE49-F238E27FC236}">
-                <a16:creationId xmlns:a16="http://schemas.microsoft.com/office/drawing/2014/main" id="{EF4D32B6-2A7A-428F-A5A3-BFFEC42D6B58}"/>
-              </a:ext>
-            </a:extLst>
-          </p:cNvPr>
-          <p:cNvGrpSpPr/>
+        </p:txBody>
+      </p:sp>
+      <p:pic>
+        <p:nvPicPr>
+          <p:cNvPr id="3" name="図 2">
+            <a:extLst>
+              <a:ext uri="{FF2B5EF4-FFF2-40B4-BE49-F238E27FC236}">
+                <a16:creationId xmlns:a16="http://schemas.microsoft.com/office/drawing/2014/main" id="{99922EB1-B2C0-4477-B0CE-56816EFC1825}"/>
+              </a:ext>
+            </a:extLst>
+          </p:cNvPr>
+          <p:cNvPicPr>
+            <a:picLocks noChangeAspect="1"/>
+          </p:cNvPicPr>
           <p:nvPr/>
-        </p:nvGrpSpPr>
-        <p:grpSpPr>
+        </p:nvPicPr>
+        <p:blipFill>
+          <a:blip r:embed="rId2"/>
+          <a:stretch>
+            <a:fillRect/>
+          </a:stretch>
+        </p:blipFill>
+        <p:spPr>
           <a:xfrm>
-            <a:off x="264283" y="2556458"/>
-            <a:ext cx="7472258" cy="3809587"/>
-            <a:chOff x="294141" y="1992700"/>
-            <a:chExt cx="6736562" cy="3451460"/>
+            <a:off x="567542" y="1817794"/>
+            <a:ext cx="8881258" cy="4773676"/>
           </a:xfrm>
-        </p:grpSpPr>
-        <p:grpSp>
-          <p:nvGrpSpPr>
-            <p:cNvPr id="7" name="グループ化 6">
-              <a:extLst>
-                <a:ext uri="{FF2B5EF4-FFF2-40B4-BE49-F238E27FC236}">
-                  <a16:creationId xmlns:a16="http://schemas.microsoft.com/office/drawing/2014/main" id="{D00D4D93-4413-452D-8829-F82C7A68F96F}"/>
-                </a:ext>
-              </a:extLst>
-            </p:cNvPr>
-            <p:cNvGrpSpPr/>
-            <p:nvPr/>
-          </p:nvGrpSpPr>
-          <p:grpSpPr>
-            <a:xfrm>
-              <a:off x="294141" y="1992700"/>
-              <a:ext cx="6736562" cy="3451460"/>
-              <a:chOff x="294141" y="1992700"/>
-              <a:chExt cx="6736562" cy="3451460"/>
-            </a:xfrm>
-          </p:grpSpPr>
-          <p:grpSp>
-            <p:nvGrpSpPr>
-              <p:cNvPr id="9" name="グループ化 8">
-                <a:extLst>
-                  <a:ext uri="{FF2B5EF4-FFF2-40B4-BE49-F238E27FC236}">
-                    <a16:creationId xmlns:a16="http://schemas.microsoft.com/office/drawing/2014/main" id="{94D86A3E-E6AE-4438-9D97-0A5D14C039AA}"/>
-                  </a:ext>
-                </a:extLst>
-              </p:cNvPr>
-              <p:cNvGrpSpPr/>
-              <p:nvPr/>
-            </p:nvGrpSpPr>
-            <p:grpSpPr>
-              <a:xfrm>
-                <a:off x="294141" y="1992700"/>
-                <a:ext cx="6736562" cy="3451460"/>
-                <a:chOff x="294141" y="1776378"/>
-                <a:chExt cx="6736562" cy="3451460"/>
-              </a:xfrm>
-            </p:grpSpPr>
-            <p:grpSp>
-              <p:nvGrpSpPr>
-                <p:cNvPr id="13" name="グループ化 12">
-                  <a:extLst>
-                    <a:ext uri="{FF2B5EF4-FFF2-40B4-BE49-F238E27FC236}">
-                      <a16:creationId xmlns:a16="http://schemas.microsoft.com/office/drawing/2014/main" id="{E5F28160-A285-4540-BB6B-BEF5B9D0F227}"/>
-                    </a:ext>
-                  </a:extLst>
-                </p:cNvPr>
-                <p:cNvGrpSpPr/>
-                <p:nvPr/>
-              </p:nvGrpSpPr>
-              <p:grpSpPr>
-                <a:xfrm>
-                  <a:off x="294141" y="1825286"/>
-                  <a:ext cx="6736562" cy="3307213"/>
-                  <a:chOff x="1546378" y="2165058"/>
-                  <a:chExt cx="6736562" cy="3307213"/>
-                </a:xfrm>
-              </p:grpSpPr>
-              <p:cxnSp>
-                <p:nvCxnSpPr>
-                  <p:cNvPr id="18" name="直線コネクタ 17">
-                    <a:extLst>
-                      <a:ext uri="{FF2B5EF4-FFF2-40B4-BE49-F238E27FC236}">
-                        <a16:creationId xmlns:a16="http://schemas.microsoft.com/office/drawing/2014/main" id="{AD3B77B3-0154-43DD-A6C9-B838F6C1F138}"/>
-                      </a:ext>
-                    </a:extLst>
-                  </p:cNvPr>
-                  <p:cNvCxnSpPr>
-                    <a:cxnSpLocks/>
-                  </p:cNvCxnSpPr>
-                  <p:nvPr/>
-                </p:nvCxnSpPr>
-                <p:spPr>
-                  <a:xfrm>
-                    <a:off x="2457302" y="2388399"/>
-                    <a:ext cx="5825638" cy="0"/>
-                  </a:xfrm>
-                  <a:prstGeom prst="line">
-                    <a:avLst/>
-                  </a:prstGeom>
-                  <a:ln>
-                    <a:prstDash val="dash"/>
-                  </a:ln>
-                </p:spPr>
-                <p:style>
-                  <a:lnRef idx="1">
-                    <a:schemeClr val="accent1"/>
-                  </a:lnRef>
-                  <a:fillRef idx="0">
-                    <a:schemeClr val="accent1"/>
-                  </a:fillRef>
-                  <a:effectRef idx="0">
-                    <a:schemeClr val="accent1"/>
-                  </a:effectRef>
-                  <a:fontRef idx="minor">
-                    <a:schemeClr val="tx1"/>
-                  </a:fontRef>
-                </p:style>
-              </p:cxnSp>
-              <p:cxnSp>
-                <p:nvCxnSpPr>
-                  <p:cNvPr id="19" name="直線コネクタ 18">
-                    <a:extLst>
-                      <a:ext uri="{FF2B5EF4-FFF2-40B4-BE49-F238E27FC236}">
-                        <a16:creationId xmlns:a16="http://schemas.microsoft.com/office/drawing/2014/main" id="{72A79699-1AA2-446A-B3ED-27E22AE34840}"/>
-                      </a:ext>
-                    </a:extLst>
-                  </p:cNvPr>
-                  <p:cNvCxnSpPr>
-                    <a:cxnSpLocks/>
-                  </p:cNvCxnSpPr>
-                  <p:nvPr/>
-                </p:nvCxnSpPr>
-                <p:spPr>
-                  <a:xfrm>
-                    <a:off x="2442062" y="3828579"/>
-                    <a:ext cx="5825638" cy="0"/>
-                  </a:xfrm>
-                  <a:prstGeom prst="line">
-                    <a:avLst/>
-                  </a:prstGeom>
-                </p:spPr>
-                <p:style>
-                  <a:lnRef idx="1">
-                    <a:schemeClr val="accent1"/>
-                  </a:lnRef>
-                  <a:fillRef idx="0">
-                    <a:schemeClr val="accent1"/>
-                  </a:fillRef>
-                  <a:effectRef idx="0">
-                    <a:schemeClr val="accent1"/>
-                  </a:effectRef>
-                  <a:fontRef idx="minor">
-                    <a:schemeClr val="tx1"/>
-                  </a:fontRef>
-                </p:style>
-              </p:cxnSp>
-              <p:cxnSp>
-                <p:nvCxnSpPr>
-                  <p:cNvPr id="20" name="直線コネクタ 19">
-                    <a:extLst>
-                      <a:ext uri="{FF2B5EF4-FFF2-40B4-BE49-F238E27FC236}">
-                        <a16:creationId xmlns:a16="http://schemas.microsoft.com/office/drawing/2014/main" id="{604EDC1E-7D5A-4EA3-BBF7-A05257AA96EC}"/>
-                      </a:ext>
-                    </a:extLst>
-                  </p:cNvPr>
-                  <p:cNvCxnSpPr>
-                    <a:cxnSpLocks/>
-                  </p:cNvCxnSpPr>
-                  <p:nvPr/>
-                </p:nvCxnSpPr>
-                <p:spPr>
-                  <a:xfrm>
-                    <a:off x="2442062" y="5261139"/>
-                    <a:ext cx="5825638" cy="0"/>
-                  </a:xfrm>
-                  <a:prstGeom prst="line">
-                    <a:avLst/>
-                  </a:prstGeom>
-                  <a:ln>
-                    <a:prstDash val="dash"/>
-                  </a:ln>
-                </p:spPr>
-                <p:style>
-                  <a:lnRef idx="1">
-                    <a:schemeClr val="accent1"/>
-                  </a:lnRef>
-                  <a:fillRef idx="0">
-                    <a:schemeClr val="accent1"/>
-                  </a:fillRef>
-                  <a:effectRef idx="0">
-                    <a:schemeClr val="accent1"/>
-                  </a:effectRef>
-                  <a:fontRef idx="minor">
-                    <a:schemeClr val="tx1"/>
-                  </a:fontRef>
-                </p:style>
-              </p:cxnSp>
-              <mc:AlternateContent xmlns:mc="http://schemas.openxmlformats.org/markup-compatibility/2006">
-                <mc:Choice xmlns:a14="http://schemas.microsoft.com/office/drawing/2010/main" Requires="a14">
-                  <p:sp>
-                    <p:nvSpPr>
-                      <p:cNvPr id="21" name="テキスト ボックス 20">
-                        <a:extLst>
-                          <a:ext uri="{FF2B5EF4-FFF2-40B4-BE49-F238E27FC236}">
-                            <a16:creationId xmlns:a16="http://schemas.microsoft.com/office/drawing/2014/main" id="{AF29BE63-8F3B-481F-854D-93ABE07ADE47}"/>
-                          </a:ext>
-                        </a:extLst>
-                      </p:cNvPr>
-                      <p:cNvSpPr txBox="1"/>
-                      <p:nvPr/>
-                    </p:nvSpPr>
-                    <p:spPr>
-                      <a:xfrm>
-                        <a:off x="1747403" y="2165058"/>
-                        <a:ext cx="705536" cy="418265"/>
-                      </a:xfrm>
-                      <a:prstGeom prst="rect">
-                        <a:avLst/>
-                      </a:prstGeom>
-                      <a:noFill/>
-                    </p:spPr>
-                    <p:txBody>
-                      <a:bodyPr wrap="none" rtlCol="0">
-                        <a:spAutoFit/>
-                      </a:bodyPr>
-                      <a:lstStyle/>
-                      <a:p>
-                        <a:pPr/>
-                        <a14:m>
-                          <m:oMathPara xmlns:m="http://schemas.openxmlformats.org/officeDocument/2006/math">
-                            <m:oMathParaPr>
-                              <m:jc m:val="centerGroup"/>
-                            </m:oMathParaPr>
-                            <m:oMath xmlns:m="http://schemas.openxmlformats.org/officeDocument/2006/math">
-                              <m:r>
-                                <a:rPr lang="en-US" altLang="ja-JP" sz="2400" b="0" i="1" smtClean="0">
-                                  <a:latin typeface="Cambria Math" panose="02040503050406030204" pitchFamily="18" charset="0"/>
-                                </a:rPr>
-                                <m:t>100</m:t>
-                              </m:r>
-                            </m:oMath>
-                          </m:oMathPara>
-                        </a14:m>
-                        <a:endParaRPr lang="en-US" altLang="ja-JP" sz="2400" dirty="0"/>
-                      </a:p>
-                    </p:txBody>
-                  </p:sp>
-                </mc:Choice>
-                <mc:Fallback>
-                  <p:sp>
-                    <p:nvSpPr>
-                      <p:cNvPr id="21" name="テキスト ボックス 20">
-                        <a:extLst>
-                          <a:ext uri="{FF2B5EF4-FFF2-40B4-BE49-F238E27FC236}">
-                            <a16:creationId xmlns:a16="http://schemas.microsoft.com/office/drawing/2014/main" id="{AF29BE63-8F3B-481F-854D-93ABE07ADE47}"/>
-                          </a:ext>
-                        </a:extLst>
-                      </p:cNvPr>
-                      <p:cNvSpPr txBox="1">
-                        <a:spLocks noRot="1" noChangeAspect="1" noMove="1" noResize="1" noEditPoints="1" noAdjustHandles="1" noChangeArrowheads="1" noChangeShapeType="1" noTextEdit="1"/>
-                      </p:cNvSpPr>
-                      <p:nvPr/>
-                    </p:nvSpPr>
-                    <p:spPr>
-                      <a:xfrm>
-                        <a:off x="1747403" y="2165058"/>
-                        <a:ext cx="705536" cy="418265"/>
-                      </a:xfrm>
-                      <a:prstGeom prst="rect">
-                        <a:avLst/>
-                      </a:prstGeom>
-                      <a:blipFill>
-                        <a:blip r:embed="rId2"/>
-                        <a:stretch>
-                          <a:fillRect/>
-                        </a:stretch>
-                      </a:blipFill>
-                    </p:spPr>
-                    <p:txBody>
-                      <a:bodyPr/>
-                      <a:lstStyle/>
-                      <a:p>
-                        <a:r>
-                          <a:rPr lang="ja-JP" altLang="en-US">
-                            <a:noFill/>
-                          </a:rPr>
-                          <a:t> </a:t>
-                        </a:r>
-                      </a:p>
-                    </p:txBody>
-                  </p:sp>
-                </mc:Fallback>
-              </mc:AlternateContent>
-              <mc:AlternateContent xmlns:mc="http://schemas.openxmlformats.org/markup-compatibility/2006" xmlns:a14="http://schemas.microsoft.com/office/drawing/2010/main">
-                <mc:Choice Requires="a14">
-                  <p:sp>
-                    <p:nvSpPr>
-                      <p:cNvPr id="22" name="テキスト ボックス 21">
-                        <a:extLst>
-                          <a:ext uri="{FF2B5EF4-FFF2-40B4-BE49-F238E27FC236}">
-                            <a16:creationId xmlns:a16="http://schemas.microsoft.com/office/drawing/2014/main" id="{127B8EB8-EC20-4A27-BD38-C5843AAB395A}"/>
-                          </a:ext>
-                        </a:extLst>
-                      </p:cNvPr>
-                      <p:cNvSpPr txBox="1"/>
-                      <p:nvPr/>
-                    </p:nvSpPr>
-                    <p:spPr>
-                      <a:xfrm>
-                        <a:off x="1949635" y="3588248"/>
-                        <a:ext cx="442749" cy="461665"/>
-                      </a:xfrm>
-                      <a:prstGeom prst="rect">
-                        <a:avLst/>
-                      </a:prstGeom>
-                      <a:noFill/>
-                    </p:spPr>
-                    <p:txBody>
-                      <a:bodyPr wrap="none" rtlCol="0">
-                        <a:spAutoFit/>
-                      </a:bodyPr>
-                      <a:lstStyle/>
-                      <a:p>
-                        <a:pPr/>
-                        <a14:m>
-                          <m:oMathPara xmlns:m="http://schemas.openxmlformats.org/officeDocument/2006/math">
-                            <m:oMathParaPr>
-                              <m:jc m:val="centerGroup"/>
-                            </m:oMathParaPr>
-                            <m:oMath xmlns:m="http://schemas.openxmlformats.org/officeDocument/2006/math">
-                              <m:r>
-                                <a:rPr lang="en-US" altLang="ja-JP" sz="2400" b="0" i="1" smtClean="0">
-                                  <a:latin typeface="Cambria Math" panose="02040503050406030204" pitchFamily="18" charset="0"/>
-                                </a:rPr>
-                                <m:t>0</m:t>
-                              </m:r>
-                            </m:oMath>
-                          </m:oMathPara>
-                        </a14:m>
-                        <a:endParaRPr lang="en-US" altLang="ja-JP" sz="2400" dirty="0"/>
-                      </a:p>
-                    </p:txBody>
-                  </p:sp>
-                </mc:Choice>
-                <mc:Fallback xmlns="">
-                  <p:sp>
-                    <p:nvSpPr>
-                      <p:cNvPr id="52" name="テキスト ボックス 51">
-                        <a:extLst>
-                          <a:ext uri="{FF2B5EF4-FFF2-40B4-BE49-F238E27FC236}">
-                            <a16:creationId xmlns:a16="http://schemas.microsoft.com/office/drawing/2014/main" id="{AD187D9B-2FA6-4991-B619-3A663D483170}"/>
-                          </a:ext>
-                        </a:extLst>
-                      </p:cNvPr>
-                      <p:cNvSpPr txBox="1">
-                        <a:spLocks noRot="1" noChangeAspect="1" noMove="1" noResize="1" noEditPoints="1" noAdjustHandles="1" noChangeArrowheads="1" noChangeShapeType="1" noTextEdit="1"/>
-                      </p:cNvSpPr>
-                      <p:nvPr/>
-                    </p:nvSpPr>
-                    <p:spPr>
-                      <a:xfrm>
-                        <a:off x="1949635" y="3588248"/>
-                        <a:ext cx="442749" cy="461665"/>
-                      </a:xfrm>
-                      <a:prstGeom prst="rect">
-                        <a:avLst/>
-                      </a:prstGeom>
-                      <a:blipFill>
-                        <a:blip r:embed="rId5"/>
-                        <a:stretch>
-                          <a:fillRect/>
-                        </a:stretch>
-                      </a:blipFill>
-                    </p:spPr>
-                    <p:txBody>
-                      <a:bodyPr/>
-                      <a:lstStyle/>
-                      <a:p>
-                        <a:r>
-                          <a:rPr lang="ja-JP" altLang="en-US">
-                            <a:noFill/>
-                          </a:rPr>
-                          <a:t> </a:t>
-                        </a:r>
-                      </a:p>
-                    </p:txBody>
-                  </p:sp>
-                </mc:Fallback>
-              </mc:AlternateContent>
-              <mc:AlternateContent xmlns:mc="http://schemas.openxmlformats.org/markup-compatibility/2006">
-                <mc:Choice xmlns:a14="http://schemas.microsoft.com/office/drawing/2010/main" Requires="a14">
-                  <p:sp>
-                    <p:nvSpPr>
-                      <p:cNvPr id="23" name="テキスト ボックス 22">
-                        <a:extLst>
-                          <a:ext uri="{FF2B5EF4-FFF2-40B4-BE49-F238E27FC236}">
-                            <a16:creationId xmlns:a16="http://schemas.microsoft.com/office/drawing/2014/main" id="{812757F5-CB73-40E5-BCAE-0E159291D44B}"/>
-                          </a:ext>
-                        </a:extLst>
-                      </p:cNvPr>
-                      <p:cNvSpPr txBox="1"/>
-                      <p:nvPr/>
-                    </p:nvSpPr>
-                    <p:spPr>
-                      <a:xfrm>
-                        <a:off x="1546378" y="5054006"/>
-                        <a:ext cx="912195" cy="418265"/>
-                      </a:xfrm>
-                      <a:prstGeom prst="rect">
-                        <a:avLst/>
-                      </a:prstGeom>
-                      <a:noFill/>
-                    </p:spPr>
-                    <p:txBody>
-                      <a:bodyPr wrap="none" rtlCol="0">
-                        <a:spAutoFit/>
-                      </a:bodyPr>
-                      <a:lstStyle/>
-                      <a:p>
-                        <a:pPr/>
-                        <a14:m>
-                          <m:oMathPara xmlns:m="http://schemas.openxmlformats.org/officeDocument/2006/math">
-                            <m:oMathParaPr>
-                              <m:jc m:val="centerGroup"/>
-                            </m:oMathParaPr>
-                            <m:oMath xmlns:m="http://schemas.openxmlformats.org/officeDocument/2006/math">
-                              <m:r>
-                                <a:rPr lang="en-US" altLang="ja-JP" sz="2400" b="0" i="1" smtClean="0">
-                                  <a:latin typeface="Cambria Math" panose="02040503050406030204" pitchFamily="18" charset="0"/>
-                                </a:rPr>
-                                <m:t>−100</m:t>
-                              </m:r>
-                            </m:oMath>
-                          </m:oMathPara>
-                        </a14:m>
-                        <a:endParaRPr lang="en-US" altLang="ja-JP" sz="2400" dirty="0"/>
-                      </a:p>
-                    </p:txBody>
-                  </p:sp>
-                </mc:Choice>
-                <mc:Fallback>
-                  <p:sp>
-                    <p:nvSpPr>
-                      <p:cNvPr id="23" name="テキスト ボックス 22">
-                        <a:extLst>
-                          <a:ext uri="{FF2B5EF4-FFF2-40B4-BE49-F238E27FC236}">
-                            <a16:creationId xmlns:a16="http://schemas.microsoft.com/office/drawing/2014/main" id="{812757F5-CB73-40E5-BCAE-0E159291D44B}"/>
-                          </a:ext>
-                        </a:extLst>
-                      </p:cNvPr>
-                      <p:cNvSpPr txBox="1">
-                        <a:spLocks noRot="1" noChangeAspect="1" noMove="1" noResize="1" noEditPoints="1" noAdjustHandles="1" noChangeArrowheads="1" noChangeShapeType="1" noTextEdit="1"/>
-                      </p:cNvSpPr>
-                      <p:nvPr/>
-                    </p:nvSpPr>
-                    <p:spPr>
-                      <a:xfrm>
-                        <a:off x="1546378" y="5054006"/>
-                        <a:ext cx="912195" cy="418265"/>
-                      </a:xfrm>
-                      <a:prstGeom prst="rect">
-                        <a:avLst/>
-                      </a:prstGeom>
-                      <a:blipFill>
-                        <a:blip r:embed="rId6"/>
-                        <a:stretch>
-                          <a:fillRect/>
-                        </a:stretch>
-                      </a:blipFill>
-                    </p:spPr>
-                    <p:txBody>
-                      <a:bodyPr/>
-                      <a:lstStyle/>
-                      <a:p>
-                        <a:r>
-                          <a:rPr lang="ja-JP" altLang="en-US">
-                            <a:noFill/>
-                          </a:rPr>
-                          <a:t> </a:t>
-                        </a:r>
-                      </a:p>
-                    </p:txBody>
-                  </p:sp>
-                </mc:Fallback>
-              </mc:AlternateContent>
-            </p:grpSp>
-            <mc:AlternateContent xmlns:mc="http://schemas.openxmlformats.org/markup-compatibility/2006" xmlns:a14="http://schemas.microsoft.com/office/drawing/2010/main">
-              <mc:Choice Requires="a14">
-                <p:sp>
-                  <p:nvSpPr>
-                    <p:cNvPr id="14" name="テキスト ボックス 13">
-                      <a:extLst>
-                        <a:ext uri="{FF2B5EF4-FFF2-40B4-BE49-F238E27FC236}">
-                          <a16:creationId xmlns:a16="http://schemas.microsoft.com/office/drawing/2014/main" id="{6C860ED5-B1B8-4591-8B25-4C9C82A9C5D5}"/>
-                        </a:ext>
-                      </a:extLst>
-                    </p:cNvPr>
-                    <p:cNvSpPr txBox="1"/>
-                    <p:nvPr/>
-                  </p:nvSpPr>
-                  <p:spPr>
-                    <a:xfrm>
-                      <a:off x="1879426" y="3474036"/>
-                      <a:ext cx="862737" cy="338554"/>
-                    </a:xfrm>
-                    <a:prstGeom prst="rect">
-                      <a:avLst/>
-                    </a:prstGeom>
-                    <a:noFill/>
-                  </p:spPr>
-                  <p:txBody>
-                    <a:bodyPr wrap="none" rtlCol="0">
-                      <a:spAutoFit/>
-                    </a:bodyPr>
-                    <a:lstStyle/>
-                    <a:p>
-                      <a:pPr/>
-                      <a14:m>
-                        <m:oMathPara xmlns:m="http://schemas.openxmlformats.org/officeDocument/2006/math">
-                          <m:oMathParaPr>
-                            <m:jc m:val="centerGroup"/>
-                          </m:oMathParaPr>
-                          <m:oMath xmlns:m="http://schemas.openxmlformats.org/officeDocument/2006/math">
-                            <m:r>
-                              <a:rPr lang="en-US" altLang="ja-JP" sz="1600" b="0" i="1" smtClean="0">
-                                <a:latin typeface="Cambria Math" panose="02040503050406030204" pitchFamily="18" charset="0"/>
-                              </a:rPr>
-                              <m:t>𝑠𝑖𝑛</m:t>
-                            </m:r>
-                            <m:r>
-                              <a:rPr lang="en-US" altLang="ja-JP" sz="1600" i="1">
-                                <a:latin typeface="Cambria Math" panose="02040503050406030204" pitchFamily="18" charset="0"/>
-                              </a:rPr>
-                              <m:t>180</m:t>
-                            </m:r>
-                          </m:oMath>
-                        </m:oMathPara>
-                      </a14:m>
-                      <a:endParaRPr lang="en-US" altLang="ja-JP" sz="1600" dirty="0"/>
-                    </a:p>
-                  </p:txBody>
-                </p:sp>
-              </mc:Choice>
-              <mc:Fallback xmlns="">
-                <p:sp>
-                  <p:nvSpPr>
-                    <p:cNvPr id="55" name="テキスト ボックス 54">
-                      <a:extLst>
-                        <a:ext uri="{FF2B5EF4-FFF2-40B4-BE49-F238E27FC236}">
-                          <a16:creationId xmlns:a16="http://schemas.microsoft.com/office/drawing/2014/main" id="{D435A0B8-73C6-48C9-AE37-C2992EFF70BB}"/>
-                        </a:ext>
-                      </a:extLst>
-                    </p:cNvPr>
-                    <p:cNvSpPr txBox="1">
-                      <a:spLocks noRot="1" noChangeAspect="1" noMove="1" noResize="1" noEditPoints="1" noAdjustHandles="1" noChangeArrowheads="1" noChangeShapeType="1" noTextEdit="1"/>
-                    </p:cNvSpPr>
-                    <p:nvPr/>
-                  </p:nvSpPr>
-                  <p:spPr>
-                    <a:xfrm>
-                      <a:off x="1879426" y="3474036"/>
-                      <a:ext cx="862737" cy="338554"/>
-                    </a:xfrm>
-                    <a:prstGeom prst="rect">
-                      <a:avLst/>
-                    </a:prstGeom>
-                    <a:blipFill>
-                      <a:blip r:embed="rId7"/>
-                      <a:stretch>
-                        <a:fillRect/>
-                      </a:stretch>
-                    </a:blipFill>
-                  </p:spPr>
-                  <p:txBody>
-                    <a:bodyPr/>
-                    <a:lstStyle/>
-                    <a:p>
-                      <a:r>
-                        <a:rPr lang="ja-JP" altLang="en-US">
-                          <a:noFill/>
-                        </a:rPr>
-                        <a:t> </a:t>
-                      </a:r>
-                    </a:p>
-                  </p:txBody>
-                </p:sp>
-              </mc:Fallback>
-            </mc:AlternateContent>
-            <mc:AlternateContent xmlns:mc="http://schemas.openxmlformats.org/markup-compatibility/2006" xmlns:a14="http://schemas.microsoft.com/office/drawing/2010/main">
-              <mc:Choice Requires="a14">
-                <p:sp>
-                  <p:nvSpPr>
-                    <p:cNvPr id="15" name="テキスト ボックス 14">
-                      <a:extLst>
-                        <a:ext uri="{FF2B5EF4-FFF2-40B4-BE49-F238E27FC236}">
-                          <a16:creationId xmlns:a16="http://schemas.microsoft.com/office/drawing/2014/main" id="{CF6D2836-3CD6-4130-8BB9-5C9503F1969F}"/>
-                        </a:ext>
-                      </a:extLst>
-                    </p:cNvPr>
-                    <p:cNvSpPr txBox="1"/>
-                    <p:nvPr/>
-                  </p:nvSpPr>
-                  <p:spPr>
-                    <a:xfrm>
-                      <a:off x="3255147" y="3474036"/>
-                      <a:ext cx="862737" cy="338554"/>
-                    </a:xfrm>
-                    <a:prstGeom prst="rect">
-                      <a:avLst/>
-                    </a:prstGeom>
-                    <a:noFill/>
-                  </p:spPr>
-                  <p:txBody>
-                    <a:bodyPr wrap="none" rtlCol="0">
-                      <a:spAutoFit/>
-                    </a:bodyPr>
-                    <a:lstStyle/>
-                    <a:p>
-                      <a:pPr/>
-                      <a14:m>
-                        <m:oMathPara xmlns:m="http://schemas.openxmlformats.org/officeDocument/2006/math">
-                          <m:oMathParaPr>
-                            <m:jc m:val="centerGroup"/>
-                          </m:oMathParaPr>
-                          <m:oMath xmlns:m="http://schemas.openxmlformats.org/officeDocument/2006/math">
-                            <m:r>
-                              <a:rPr lang="en-US" altLang="ja-JP" sz="1600" b="0" i="1" smtClean="0">
-                                <a:latin typeface="Cambria Math" panose="02040503050406030204" pitchFamily="18" charset="0"/>
-                              </a:rPr>
-                              <m:t>𝑠𝑖𝑛</m:t>
-                            </m:r>
-                            <m:r>
-                              <a:rPr lang="en-US" altLang="ja-JP" sz="1600" i="1">
-                                <a:latin typeface="Cambria Math" panose="02040503050406030204" pitchFamily="18" charset="0"/>
-                              </a:rPr>
-                              <m:t>360</m:t>
-                            </m:r>
-                          </m:oMath>
-                        </m:oMathPara>
-                      </a14:m>
-                      <a:endParaRPr lang="en-US" altLang="ja-JP" sz="1600" dirty="0"/>
-                    </a:p>
-                  </p:txBody>
-                </p:sp>
-              </mc:Choice>
-              <mc:Fallback xmlns="">
-                <p:sp>
-                  <p:nvSpPr>
-                    <p:cNvPr id="56" name="テキスト ボックス 55">
-                      <a:extLst>
-                        <a:ext uri="{FF2B5EF4-FFF2-40B4-BE49-F238E27FC236}">
-                          <a16:creationId xmlns:a16="http://schemas.microsoft.com/office/drawing/2014/main" id="{F80DF57B-C729-440A-942A-EB1763F28B84}"/>
-                        </a:ext>
-                      </a:extLst>
-                    </p:cNvPr>
-                    <p:cNvSpPr txBox="1">
-                      <a:spLocks noRot="1" noChangeAspect="1" noMove="1" noResize="1" noEditPoints="1" noAdjustHandles="1" noChangeArrowheads="1" noChangeShapeType="1" noTextEdit="1"/>
-                    </p:cNvSpPr>
-                    <p:nvPr/>
-                  </p:nvSpPr>
-                  <p:spPr>
-                    <a:xfrm>
-                      <a:off x="3255147" y="3474036"/>
-                      <a:ext cx="862737" cy="338554"/>
-                    </a:xfrm>
-                    <a:prstGeom prst="rect">
-                      <a:avLst/>
-                    </a:prstGeom>
-                    <a:blipFill>
-                      <a:blip r:embed="rId8"/>
-                      <a:stretch>
-                        <a:fillRect/>
-                      </a:stretch>
-                    </a:blipFill>
-                  </p:spPr>
-                  <p:txBody>
-                    <a:bodyPr/>
-                    <a:lstStyle/>
-                    <a:p>
-                      <a:r>
-                        <a:rPr lang="ja-JP" altLang="en-US">
-                          <a:noFill/>
-                        </a:rPr>
-                        <a:t> </a:t>
-                      </a:r>
-                    </a:p>
-                  </p:txBody>
-                </p:sp>
-              </mc:Fallback>
-            </mc:AlternateContent>
-            <mc:AlternateContent xmlns:mc="http://schemas.openxmlformats.org/markup-compatibility/2006" xmlns:a14="http://schemas.microsoft.com/office/drawing/2010/main">
-              <mc:Choice Requires="a14">
-                <p:sp>
-                  <p:nvSpPr>
-                    <p:cNvPr id="16" name="テキスト ボックス 15">
-                      <a:extLst>
-                        <a:ext uri="{FF2B5EF4-FFF2-40B4-BE49-F238E27FC236}">
-                          <a16:creationId xmlns:a16="http://schemas.microsoft.com/office/drawing/2014/main" id="{7F86B96F-457D-47A6-8313-8CEE874D925A}"/>
-                        </a:ext>
-                      </a:extLst>
-                    </p:cNvPr>
-                    <p:cNvSpPr txBox="1"/>
-                    <p:nvPr/>
-                  </p:nvSpPr>
-                  <p:spPr>
-                    <a:xfrm>
-                      <a:off x="1239521" y="1776378"/>
-                      <a:ext cx="748923" cy="338554"/>
-                    </a:xfrm>
-                    <a:prstGeom prst="rect">
-                      <a:avLst/>
-                    </a:prstGeom>
-                    <a:noFill/>
-                  </p:spPr>
-                  <p:txBody>
-                    <a:bodyPr wrap="none" rtlCol="0">
-                      <a:spAutoFit/>
-                    </a:bodyPr>
-                    <a:lstStyle/>
-                    <a:p>
-                      <a:pPr/>
-                      <a14:m>
-                        <m:oMathPara xmlns:m="http://schemas.openxmlformats.org/officeDocument/2006/math">
-                          <m:oMathParaPr>
-                            <m:jc m:val="centerGroup"/>
-                          </m:oMathParaPr>
-                          <m:oMath xmlns:m="http://schemas.openxmlformats.org/officeDocument/2006/math">
-                            <m:r>
-                              <a:rPr lang="en-US" altLang="ja-JP" sz="1600" b="0" i="1" smtClean="0">
-                                <a:latin typeface="Cambria Math" panose="02040503050406030204" pitchFamily="18" charset="0"/>
-                              </a:rPr>
-                              <m:t>𝑠𝑖𝑛</m:t>
-                            </m:r>
-                            <m:r>
-                              <a:rPr lang="en-US" altLang="ja-JP" sz="1600" i="1">
-                                <a:latin typeface="Cambria Math" panose="02040503050406030204" pitchFamily="18" charset="0"/>
-                              </a:rPr>
-                              <m:t>90</m:t>
-                            </m:r>
-                          </m:oMath>
-                        </m:oMathPara>
-                      </a14:m>
-                      <a:endParaRPr lang="en-US" altLang="ja-JP" sz="1600" dirty="0"/>
-                    </a:p>
-                  </p:txBody>
-                </p:sp>
-              </mc:Choice>
-              <mc:Fallback xmlns="">
-                <p:sp>
-                  <p:nvSpPr>
-                    <p:cNvPr id="59" name="テキスト ボックス 58">
-                      <a:extLst>
-                        <a:ext uri="{FF2B5EF4-FFF2-40B4-BE49-F238E27FC236}">
-                          <a16:creationId xmlns:a16="http://schemas.microsoft.com/office/drawing/2014/main" id="{33793090-82A7-4AEC-97F1-5ACA14395880}"/>
-                        </a:ext>
-                      </a:extLst>
-                    </p:cNvPr>
-                    <p:cNvSpPr txBox="1">
-                      <a:spLocks noRot="1" noChangeAspect="1" noMove="1" noResize="1" noEditPoints="1" noAdjustHandles="1" noChangeArrowheads="1" noChangeShapeType="1" noTextEdit="1"/>
-                    </p:cNvSpPr>
-                    <p:nvPr/>
-                  </p:nvSpPr>
-                  <p:spPr>
-                    <a:xfrm>
-                      <a:off x="1239521" y="1776378"/>
-                      <a:ext cx="748923" cy="338554"/>
-                    </a:xfrm>
-                    <a:prstGeom prst="rect">
-                      <a:avLst/>
-                    </a:prstGeom>
-                    <a:blipFill>
-                      <a:blip r:embed="rId9"/>
-                      <a:stretch>
-                        <a:fillRect/>
-                      </a:stretch>
-                    </a:blipFill>
-                  </p:spPr>
-                  <p:txBody>
-                    <a:bodyPr/>
-                    <a:lstStyle/>
-                    <a:p>
-                      <a:r>
-                        <a:rPr lang="ja-JP" altLang="en-US">
-                          <a:noFill/>
-                        </a:rPr>
-                        <a:t> </a:t>
-                      </a:r>
-                    </a:p>
-                  </p:txBody>
-                </p:sp>
-              </mc:Fallback>
-            </mc:AlternateContent>
-            <mc:AlternateContent xmlns:mc="http://schemas.openxmlformats.org/markup-compatibility/2006" xmlns:a14="http://schemas.microsoft.com/office/drawing/2010/main">
-              <mc:Choice Requires="a14">
-                <p:sp>
-                  <p:nvSpPr>
-                    <p:cNvPr id="17" name="テキスト ボックス 16">
-                      <a:extLst>
-                        <a:ext uri="{FF2B5EF4-FFF2-40B4-BE49-F238E27FC236}">
-                          <a16:creationId xmlns:a16="http://schemas.microsoft.com/office/drawing/2014/main" id="{640FCC4C-E089-43DE-BF94-AB6A6414514F}"/>
-                        </a:ext>
-                      </a:extLst>
-                    </p:cNvPr>
-                    <p:cNvSpPr txBox="1"/>
-                    <p:nvPr/>
-                  </p:nvSpPr>
-                  <p:spPr>
-                    <a:xfrm>
-                      <a:off x="2613670" y="4889284"/>
-                      <a:ext cx="862737" cy="338554"/>
-                    </a:xfrm>
-                    <a:prstGeom prst="rect">
-                      <a:avLst/>
-                    </a:prstGeom>
-                    <a:noFill/>
-                  </p:spPr>
-                  <p:txBody>
-                    <a:bodyPr wrap="none" rtlCol="0">
-                      <a:spAutoFit/>
-                    </a:bodyPr>
-                    <a:lstStyle/>
-                    <a:p>
-                      <a:pPr/>
-                      <a14:m>
-                        <m:oMathPara xmlns:m="http://schemas.openxmlformats.org/officeDocument/2006/math">
-                          <m:oMathParaPr>
-                            <m:jc m:val="centerGroup"/>
-                          </m:oMathParaPr>
-                          <m:oMath xmlns:m="http://schemas.openxmlformats.org/officeDocument/2006/math">
-                            <m:r>
-                              <a:rPr lang="en-US" altLang="ja-JP" sz="1600" b="0" i="1" smtClean="0">
-                                <a:latin typeface="Cambria Math" panose="02040503050406030204" pitchFamily="18" charset="0"/>
-                              </a:rPr>
-                              <m:t>𝑠𝑖𝑛</m:t>
-                            </m:r>
-                            <m:r>
-                              <a:rPr lang="en-US" altLang="ja-JP" sz="1600" i="1">
-                                <a:latin typeface="Cambria Math" panose="02040503050406030204" pitchFamily="18" charset="0"/>
-                              </a:rPr>
-                              <m:t>270</m:t>
-                            </m:r>
-                          </m:oMath>
-                        </m:oMathPara>
-                      </a14:m>
-                      <a:endParaRPr lang="en-US" altLang="ja-JP" sz="1600" dirty="0"/>
-                    </a:p>
-                  </p:txBody>
-                </p:sp>
-              </mc:Choice>
-              <mc:Fallback xmlns="">
-                <p:sp>
-                  <p:nvSpPr>
-                    <p:cNvPr id="60" name="テキスト ボックス 59">
-                      <a:extLst>
-                        <a:ext uri="{FF2B5EF4-FFF2-40B4-BE49-F238E27FC236}">
-                          <a16:creationId xmlns:a16="http://schemas.microsoft.com/office/drawing/2014/main" id="{25D68D67-6AF6-4589-9860-5217804110D2}"/>
-                        </a:ext>
-                      </a:extLst>
-                    </p:cNvPr>
-                    <p:cNvSpPr txBox="1">
-                      <a:spLocks noRot="1" noChangeAspect="1" noMove="1" noResize="1" noEditPoints="1" noAdjustHandles="1" noChangeArrowheads="1" noChangeShapeType="1" noTextEdit="1"/>
-                    </p:cNvSpPr>
-                    <p:nvPr/>
-                  </p:nvSpPr>
-                  <p:spPr>
-                    <a:xfrm>
-                      <a:off x="2613670" y="4889284"/>
-                      <a:ext cx="862737" cy="338554"/>
-                    </a:xfrm>
-                    <a:prstGeom prst="rect">
-                      <a:avLst/>
-                    </a:prstGeom>
-                    <a:blipFill>
-                      <a:blip r:embed="rId10"/>
-                      <a:stretch>
-                        <a:fillRect/>
-                      </a:stretch>
-                    </a:blipFill>
-                  </p:spPr>
-                  <p:txBody>
-                    <a:bodyPr/>
-                    <a:lstStyle/>
-                    <a:p>
-                      <a:r>
-                        <a:rPr lang="ja-JP" altLang="en-US">
-                          <a:noFill/>
-                        </a:rPr>
-                        <a:t> </a:t>
-                      </a:r>
-                    </a:p>
-                  </p:txBody>
-                </p:sp>
-              </mc:Fallback>
-            </mc:AlternateContent>
-          </p:grpSp>
-          <p:sp>
-            <p:nvSpPr>
-              <p:cNvPr id="10" name="フリーフォーム: 図形 9">
-                <a:extLst>
-                  <a:ext uri="{FF2B5EF4-FFF2-40B4-BE49-F238E27FC236}">
-                    <a16:creationId xmlns:a16="http://schemas.microsoft.com/office/drawing/2014/main" id="{E5AA72B8-51EA-4189-97F0-F5A221F83B22}"/>
-                  </a:ext>
-                </a:extLst>
-              </p:cNvPr>
-              <p:cNvSpPr/>
-              <p:nvPr/>
-            </p:nvSpPr>
-            <p:spPr>
-              <a:xfrm>
-                <a:off x="1196340" y="2263139"/>
-                <a:ext cx="1447800" cy="1440181"/>
-              </a:xfrm>
-              <a:custGeom>
-                <a:avLst/>
-                <a:gdLst>
-                  <a:gd name="connsiteX0" fmla="*/ 0 w 1447800"/>
-                  <a:gd name="connsiteY0" fmla="*/ 1432561 h 1440181"/>
-                  <a:gd name="connsiteX1" fmla="*/ 762000 w 1447800"/>
-                  <a:gd name="connsiteY1" fmla="*/ 1 h 1440181"/>
-                  <a:gd name="connsiteX2" fmla="*/ 1447800 w 1447800"/>
-                  <a:gd name="connsiteY2" fmla="*/ 1440181 h 1440181"/>
-                </a:gdLst>
-                <a:ahLst/>
-                <a:cxnLst>
-                  <a:cxn ang="0">
-                    <a:pos x="connsiteX0" y="connsiteY0"/>
-                  </a:cxn>
-                  <a:cxn ang="0">
-                    <a:pos x="connsiteX1" y="connsiteY1"/>
-                  </a:cxn>
-                  <a:cxn ang="0">
-                    <a:pos x="connsiteX2" y="connsiteY2"/>
-                  </a:cxn>
-                </a:cxnLst>
-                <a:rect l="l" t="t" r="r" b="b"/>
-                <a:pathLst>
-                  <a:path w="1447800" h="1440181">
-                    <a:moveTo>
-                      <a:pt x="0" y="1432561"/>
-                    </a:moveTo>
-                    <a:cubicBezTo>
-                      <a:pt x="260350" y="715646"/>
-                      <a:pt x="520700" y="-1269"/>
-                      <a:pt x="762000" y="1"/>
-                    </a:cubicBezTo>
-                    <a:cubicBezTo>
-                      <a:pt x="1003300" y="1271"/>
-                      <a:pt x="1225550" y="720726"/>
-                      <a:pt x="1447800" y="1440181"/>
-                    </a:cubicBezTo>
-                  </a:path>
-                </a:pathLst>
-              </a:custGeom>
-              <a:noFill/>
-              <a:ln>
-                <a:solidFill>
-                  <a:srgbClr val="FF0000"/>
-                </a:solidFill>
-              </a:ln>
-            </p:spPr>
-            <p:style>
-              <a:lnRef idx="2">
-                <a:schemeClr val="accent1">
-                  <a:shade val="50000"/>
-                </a:schemeClr>
-              </a:lnRef>
-              <a:fillRef idx="1">
-                <a:schemeClr val="accent1"/>
-              </a:fillRef>
-              <a:effectRef idx="0">
-                <a:schemeClr val="accent1"/>
-              </a:effectRef>
-              <a:fontRef idx="minor">
-                <a:schemeClr val="lt1"/>
-              </a:fontRef>
-            </p:style>
-            <p:txBody>
-              <a:bodyPr rtlCol="0" anchor="ctr"/>
-              <a:lstStyle/>
-              <a:p>
-                <a:pPr algn="ctr"/>
-                <a:endParaRPr kumimoji="1" lang="ja-JP" altLang="en-US"/>
-              </a:p>
-            </p:txBody>
-          </p:sp>
-          <p:sp>
-            <p:nvSpPr>
-              <p:cNvPr id="11" name="フリーフォーム: 図形 10">
-                <a:extLst>
-                  <a:ext uri="{FF2B5EF4-FFF2-40B4-BE49-F238E27FC236}">
-                    <a16:creationId xmlns:a16="http://schemas.microsoft.com/office/drawing/2014/main" id="{B28D004D-0775-4457-8D6D-D74F1FD9BEAC}"/>
-                  </a:ext>
-                </a:extLst>
-              </p:cNvPr>
-              <p:cNvSpPr/>
-              <p:nvPr/>
-            </p:nvSpPr>
-            <p:spPr>
-              <a:xfrm rot="10800000">
-                <a:off x="2641759" y="3696706"/>
-                <a:ext cx="1447800" cy="1440181"/>
-              </a:xfrm>
-              <a:custGeom>
-                <a:avLst/>
-                <a:gdLst>
-                  <a:gd name="connsiteX0" fmla="*/ 0 w 1447800"/>
-                  <a:gd name="connsiteY0" fmla="*/ 1432561 h 1440181"/>
-                  <a:gd name="connsiteX1" fmla="*/ 762000 w 1447800"/>
-                  <a:gd name="connsiteY1" fmla="*/ 1 h 1440181"/>
-                  <a:gd name="connsiteX2" fmla="*/ 1447800 w 1447800"/>
-                  <a:gd name="connsiteY2" fmla="*/ 1440181 h 1440181"/>
-                </a:gdLst>
-                <a:ahLst/>
-                <a:cxnLst>
-                  <a:cxn ang="0">
-                    <a:pos x="connsiteX0" y="connsiteY0"/>
-                  </a:cxn>
-                  <a:cxn ang="0">
-                    <a:pos x="connsiteX1" y="connsiteY1"/>
-                  </a:cxn>
-                  <a:cxn ang="0">
-                    <a:pos x="connsiteX2" y="connsiteY2"/>
-                  </a:cxn>
-                </a:cxnLst>
-                <a:rect l="l" t="t" r="r" b="b"/>
-                <a:pathLst>
-                  <a:path w="1447800" h="1440181">
-                    <a:moveTo>
-                      <a:pt x="0" y="1432561"/>
-                    </a:moveTo>
-                    <a:cubicBezTo>
-                      <a:pt x="260350" y="715646"/>
-                      <a:pt x="520700" y="-1269"/>
-                      <a:pt x="762000" y="1"/>
-                    </a:cubicBezTo>
-                    <a:cubicBezTo>
-                      <a:pt x="1003300" y="1271"/>
-                      <a:pt x="1225550" y="720726"/>
-                      <a:pt x="1447800" y="1440181"/>
-                    </a:cubicBezTo>
-                  </a:path>
-                </a:pathLst>
-              </a:custGeom>
-              <a:noFill/>
-              <a:ln>
-                <a:solidFill>
-                  <a:srgbClr val="FF0000"/>
-                </a:solidFill>
-              </a:ln>
-            </p:spPr>
-            <p:style>
-              <a:lnRef idx="2">
-                <a:schemeClr val="accent1">
-                  <a:shade val="50000"/>
-                </a:schemeClr>
-              </a:lnRef>
-              <a:fillRef idx="1">
-                <a:schemeClr val="accent1"/>
-              </a:fillRef>
-              <a:effectRef idx="0">
-                <a:schemeClr val="accent1"/>
-              </a:effectRef>
-              <a:fontRef idx="minor">
-                <a:schemeClr val="lt1"/>
-              </a:fontRef>
-            </p:style>
-            <p:txBody>
-              <a:bodyPr rtlCol="0" anchor="ctr"/>
-              <a:lstStyle/>
-              <a:p>
-                <a:pPr algn="ctr"/>
-                <a:endParaRPr kumimoji="1" lang="ja-JP" altLang="en-US"/>
-              </a:p>
-            </p:txBody>
-          </p:sp>
-          <p:sp>
-            <p:nvSpPr>
-              <p:cNvPr id="12" name="フリーフォーム: 図形 11">
-                <a:extLst>
-                  <a:ext uri="{FF2B5EF4-FFF2-40B4-BE49-F238E27FC236}">
-                    <a16:creationId xmlns:a16="http://schemas.microsoft.com/office/drawing/2014/main" id="{70A3C999-1215-413C-906C-6EA2CDD6538C}"/>
-                  </a:ext>
-                </a:extLst>
-              </p:cNvPr>
-              <p:cNvSpPr/>
-              <p:nvPr/>
-            </p:nvSpPr>
-            <p:spPr>
-              <a:xfrm>
-                <a:off x="4090036" y="2269991"/>
-                <a:ext cx="1447800" cy="1440181"/>
-              </a:xfrm>
-              <a:custGeom>
-                <a:avLst/>
-                <a:gdLst>
-                  <a:gd name="connsiteX0" fmla="*/ 0 w 1447800"/>
-                  <a:gd name="connsiteY0" fmla="*/ 1432561 h 1440181"/>
-                  <a:gd name="connsiteX1" fmla="*/ 762000 w 1447800"/>
-                  <a:gd name="connsiteY1" fmla="*/ 1 h 1440181"/>
-                  <a:gd name="connsiteX2" fmla="*/ 1447800 w 1447800"/>
-                  <a:gd name="connsiteY2" fmla="*/ 1440181 h 1440181"/>
-                </a:gdLst>
-                <a:ahLst/>
-                <a:cxnLst>
-                  <a:cxn ang="0">
-                    <a:pos x="connsiteX0" y="connsiteY0"/>
-                  </a:cxn>
-                  <a:cxn ang="0">
-                    <a:pos x="connsiteX1" y="connsiteY1"/>
-                  </a:cxn>
-                  <a:cxn ang="0">
-                    <a:pos x="connsiteX2" y="connsiteY2"/>
-                  </a:cxn>
-                </a:cxnLst>
-                <a:rect l="l" t="t" r="r" b="b"/>
-                <a:pathLst>
-                  <a:path w="1447800" h="1440181">
-                    <a:moveTo>
-                      <a:pt x="0" y="1432561"/>
-                    </a:moveTo>
-                    <a:cubicBezTo>
-                      <a:pt x="260350" y="715646"/>
-                      <a:pt x="520700" y="-1269"/>
-                      <a:pt x="762000" y="1"/>
-                    </a:cubicBezTo>
-                    <a:cubicBezTo>
-                      <a:pt x="1003300" y="1271"/>
-                      <a:pt x="1225550" y="720726"/>
-                      <a:pt x="1447800" y="1440181"/>
-                    </a:cubicBezTo>
-                  </a:path>
-                </a:pathLst>
-              </a:custGeom>
-              <a:noFill/>
-              <a:ln>
-                <a:solidFill>
-                  <a:srgbClr val="FF0000"/>
-                </a:solidFill>
-              </a:ln>
-            </p:spPr>
-            <p:style>
-              <a:lnRef idx="2">
-                <a:schemeClr val="accent1">
-                  <a:shade val="50000"/>
-                </a:schemeClr>
-              </a:lnRef>
-              <a:fillRef idx="1">
-                <a:schemeClr val="accent1"/>
-              </a:fillRef>
-              <a:effectRef idx="0">
-                <a:schemeClr val="accent1"/>
-              </a:effectRef>
-              <a:fontRef idx="minor">
-                <a:schemeClr val="lt1"/>
-              </a:fontRef>
-            </p:style>
-            <p:txBody>
-              <a:bodyPr rtlCol="0" anchor="ctr"/>
-              <a:lstStyle/>
-              <a:p>
-                <a:pPr algn="ctr"/>
-                <a:endParaRPr kumimoji="1" lang="ja-JP" altLang="en-US"/>
-              </a:p>
-            </p:txBody>
-          </p:sp>
-        </p:grpSp>
-        <p:sp>
-          <p:nvSpPr>
-            <p:cNvPr id="8" name="フリーフォーム: 図形 7">
-              <a:extLst>
-                <a:ext uri="{FF2B5EF4-FFF2-40B4-BE49-F238E27FC236}">
-                  <a16:creationId xmlns:a16="http://schemas.microsoft.com/office/drawing/2014/main" id="{FD9A8A50-67A9-4DC0-AB2F-24F65D3F4069}"/>
-                </a:ext>
-              </a:extLst>
-            </p:cNvPr>
-            <p:cNvSpPr/>
-            <p:nvPr/>
-          </p:nvSpPr>
-          <p:spPr>
-            <a:xfrm rot="10800000">
-              <a:off x="5535455" y="3702017"/>
-              <a:ext cx="1447800" cy="1440181"/>
-            </a:xfrm>
-            <a:custGeom>
-              <a:avLst/>
-              <a:gdLst>
-                <a:gd name="connsiteX0" fmla="*/ 0 w 1447800"/>
-                <a:gd name="connsiteY0" fmla="*/ 1432561 h 1440181"/>
-                <a:gd name="connsiteX1" fmla="*/ 762000 w 1447800"/>
-                <a:gd name="connsiteY1" fmla="*/ 1 h 1440181"/>
-                <a:gd name="connsiteX2" fmla="*/ 1447800 w 1447800"/>
-                <a:gd name="connsiteY2" fmla="*/ 1440181 h 1440181"/>
-              </a:gdLst>
-              <a:ahLst/>
-              <a:cxnLst>
-                <a:cxn ang="0">
-                  <a:pos x="connsiteX0" y="connsiteY0"/>
-                </a:cxn>
-                <a:cxn ang="0">
-                  <a:pos x="connsiteX1" y="connsiteY1"/>
-                </a:cxn>
-                <a:cxn ang="0">
-                  <a:pos x="connsiteX2" y="connsiteY2"/>
-                </a:cxn>
-              </a:cxnLst>
-              <a:rect l="l" t="t" r="r" b="b"/>
-              <a:pathLst>
-                <a:path w="1447800" h="1440181">
-                  <a:moveTo>
-                    <a:pt x="0" y="1432561"/>
-                  </a:moveTo>
-                  <a:cubicBezTo>
-                    <a:pt x="260350" y="715646"/>
-                    <a:pt x="520700" y="-1269"/>
-                    <a:pt x="762000" y="1"/>
-                  </a:cubicBezTo>
-                  <a:cubicBezTo>
-                    <a:pt x="1003300" y="1271"/>
-                    <a:pt x="1225550" y="720726"/>
-                    <a:pt x="1447800" y="1440181"/>
-                  </a:cubicBezTo>
-                </a:path>
-              </a:pathLst>
-            </a:custGeom>
-            <a:noFill/>
-            <a:ln>
-              <a:solidFill>
-                <a:srgbClr val="FF0000"/>
-              </a:solidFill>
-            </a:ln>
-          </p:spPr>
-          <p:style>
-            <a:lnRef idx="2">
-              <a:schemeClr val="accent1">
-                <a:shade val="50000"/>
-              </a:schemeClr>
-            </a:lnRef>
-            <a:fillRef idx="1">
-              <a:schemeClr val="accent1"/>
-            </a:fillRef>
-            <a:effectRef idx="0">
-              <a:schemeClr val="accent1"/>
-            </a:effectRef>
-            <a:fontRef idx="minor">
-              <a:schemeClr val="lt1"/>
-            </a:fontRef>
-          </p:style>
-          <p:txBody>
-            <a:bodyPr rtlCol="0" anchor="ctr"/>
-            <a:lstStyle/>
-            <a:p>
-              <a:pPr algn="ctr"/>
-              <a:endParaRPr kumimoji="1" lang="ja-JP" altLang="en-US"/>
-            </a:p>
-          </p:txBody>
-        </p:sp>
-      </p:grpSp>
+          <a:prstGeom prst="rect">
+            <a:avLst/>
+          </a:prstGeom>
+        </p:spPr>
+      </p:pic>
     </p:spTree>
     <p:extLst>
       <p:ext uri="{BB962C8B-B14F-4D97-AF65-F5344CB8AC3E}">
-        <p14:creationId xmlns:p14="http://schemas.microsoft.com/office/powerpoint/2010/main" val="1242851183"/>
+        <p14:creationId xmlns:p14="http://schemas.microsoft.com/office/powerpoint/2010/main" val="2321927752"/>
       </p:ext>
     </p:extLst>
   </p:cSld>
@@ -6949,7 +5629,7 @@
         <p:spPr>
           <a:xfrm>
             <a:off x="567542" y="1216429"/>
-            <a:ext cx="9110186" cy="830997"/>
+            <a:ext cx="6587060" cy="830997"/>
           </a:xfrm>
           <a:prstGeom prst="rect">
             <a:avLst/>
@@ -6963,1320 +5643,96 @@
           <a:lstStyle/>
           <a:p>
             <a:r>
-              <a:rPr lang="ja-JP" altLang="en-US" sz="2400" b="1" dirty="0">
+              <a:rPr kumimoji="1" lang="ja-JP" altLang="en-US" sz="2400" dirty="0"/>
+              <a:t>まずは</a:t>
+            </a:r>
+            <a:r>
+              <a:rPr kumimoji="1" lang="en-US" altLang="ja-JP" sz="2400" b="1" dirty="0" err="1">
                 <a:solidFill>
-                  <a:srgbClr val="FF0000"/>
+                  <a:srgbClr val="0070C0"/>
                 </a:solidFill>
               </a:rPr>
-              <a:t>波の値は初期位置からどれだけ移動しているかの値</a:t>
+              <a:t>sinf</a:t>
+            </a:r>
+            <a:r>
+              <a:rPr kumimoji="1" lang="ja-JP" altLang="en-US" sz="2400" b="1" dirty="0">
+                <a:solidFill>
+                  <a:srgbClr val="0070C0"/>
+                </a:solidFill>
+              </a:rPr>
+              <a:t>関数</a:t>
+            </a:r>
+            <a:r>
+              <a:rPr kumimoji="1" lang="ja-JP" altLang="en-US" sz="2400" dirty="0"/>
+              <a:t>に渡す角度を用意します</a:t>
             </a:r>
             <a:r>
               <a:rPr lang="ja-JP" altLang="en-US" sz="2400" dirty="0"/>
-              <a:t>になります。</a:t>
+              <a:t>。</a:t>
             </a:r>
             <a:endParaRPr lang="en-US" altLang="ja-JP" sz="2400" dirty="0"/>
           </a:p>
           <a:p>
             <a:r>
-              <a:rPr kumimoji="1" lang="ja-JP" altLang="en-US" sz="2400" dirty="0"/>
-              <a:t>その点に気を付けて床の</a:t>
-            </a:r>
-            <a:r>
-              <a:rPr kumimoji="1" lang="en-US" altLang="ja-JP" sz="2400" dirty="0"/>
-              <a:t>Y</a:t>
-            </a:r>
-            <a:r>
-              <a:rPr kumimoji="1" lang="ja-JP" altLang="en-US" sz="2400" dirty="0"/>
-              <a:t>座標を計算しましょう。</a:t>
-            </a:r>
-            <a:endParaRPr kumimoji="1" lang="en-US" altLang="ja-JP" sz="2400" dirty="0"/>
-          </a:p>
-        </p:txBody>
-      </p:sp>
-      <p:grpSp>
-        <p:nvGrpSpPr>
-          <p:cNvPr id="5" name="グループ化 4">
-            <a:extLst>
-              <a:ext uri="{FF2B5EF4-FFF2-40B4-BE49-F238E27FC236}">
-                <a16:creationId xmlns:a16="http://schemas.microsoft.com/office/drawing/2014/main" id="{EF4D32B6-2A7A-428F-A5A3-BFFEC42D6B58}"/>
-              </a:ext>
-            </a:extLst>
-          </p:cNvPr>
-          <p:cNvGrpSpPr/>
+              <a:rPr lang="ja-JP" altLang="en-US" sz="2400" dirty="0"/>
+              <a:t>角度は  </a:t>
+            </a:r>
+            <a:r>
+              <a:rPr lang="en-US" altLang="ja-JP" sz="2400" dirty="0"/>
+              <a:t>0</a:t>
+            </a:r>
+            <a:r>
+              <a:rPr lang="ja-JP" altLang="en-US" sz="2400" dirty="0"/>
+              <a:t>～</a:t>
+            </a:r>
+            <a:r>
+              <a:rPr lang="en-US" altLang="ja-JP" sz="2400" dirty="0"/>
+              <a:t>360°</a:t>
+            </a:r>
+            <a:r>
+              <a:rPr lang="ja-JP" altLang="en-US" sz="2400" dirty="0"/>
+              <a:t>に収まるようにしましょう。</a:t>
+            </a:r>
+            <a:endParaRPr lang="en-US" altLang="ja-JP" sz="2400" dirty="0"/>
+          </a:p>
+        </p:txBody>
+      </p:sp>
+      <p:pic>
+        <p:nvPicPr>
+          <p:cNvPr id="5" name="図 4">
+            <a:extLst>
+              <a:ext uri="{FF2B5EF4-FFF2-40B4-BE49-F238E27FC236}">
+                <a16:creationId xmlns:a16="http://schemas.microsoft.com/office/drawing/2014/main" id="{A8BF334D-3186-40CB-AFF5-C38A8FB14404}"/>
+              </a:ext>
+            </a:extLst>
+          </p:cNvPr>
+          <p:cNvPicPr>
+            <a:picLocks noChangeAspect="1"/>
+          </p:cNvPicPr>
           <p:nvPr/>
-        </p:nvGrpSpPr>
-        <p:grpSpPr>
+        </p:nvPicPr>
+        <p:blipFill>
+          <a:blip r:embed="rId2"/>
+          <a:stretch>
+            <a:fillRect/>
+          </a:stretch>
+        </p:blipFill>
+        <p:spPr>
           <a:xfrm>
-            <a:off x="2319" y="2556458"/>
-            <a:ext cx="7734222" cy="3809587"/>
-            <a:chOff x="57969" y="1992700"/>
-            <a:chExt cx="6972734" cy="3451460"/>
+            <a:off x="567542" y="2187126"/>
+            <a:ext cx="6179370" cy="3383941"/>
           </a:xfrm>
-        </p:grpSpPr>
-        <p:grpSp>
-          <p:nvGrpSpPr>
-            <p:cNvPr id="7" name="グループ化 6">
-              <a:extLst>
-                <a:ext uri="{FF2B5EF4-FFF2-40B4-BE49-F238E27FC236}">
-                  <a16:creationId xmlns:a16="http://schemas.microsoft.com/office/drawing/2014/main" id="{D00D4D93-4413-452D-8829-F82C7A68F96F}"/>
-                </a:ext>
-              </a:extLst>
-            </p:cNvPr>
-            <p:cNvGrpSpPr/>
-            <p:nvPr/>
-          </p:nvGrpSpPr>
-          <p:grpSpPr>
-            <a:xfrm>
-              <a:off x="57969" y="1992700"/>
-              <a:ext cx="6972734" cy="3451460"/>
-              <a:chOff x="57969" y="1992700"/>
-              <a:chExt cx="6972734" cy="3451460"/>
-            </a:xfrm>
-          </p:grpSpPr>
-          <p:grpSp>
-            <p:nvGrpSpPr>
-              <p:cNvPr id="9" name="グループ化 8">
-                <a:extLst>
-                  <a:ext uri="{FF2B5EF4-FFF2-40B4-BE49-F238E27FC236}">
-                    <a16:creationId xmlns:a16="http://schemas.microsoft.com/office/drawing/2014/main" id="{94D86A3E-E6AE-4438-9D97-0A5D14C039AA}"/>
-                  </a:ext>
-                </a:extLst>
-              </p:cNvPr>
-              <p:cNvGrpSpPr/>
-              <p:nvPr/>
-            </p:nvGrpSpPr>
-            <p:grpSpPr>
-              <a:xfrm>
-                <a:off x="57969" y="1992700"/>
-                <a:ext cx="6972734" cy="3451460"/>
-                <a:chOff x="57969" y="1776378"/>
-                <a:chExt cx="6972734" cy="3451460"/>
-              </a:xfrm>
-            </p:grpSpPr>
-            <p:grpSp>
-              <p:nvGrpSpPr>
-                <p:cNvPr id="13" name="グループ化 12">
-                  <a:extLst>
-                    <a:ext uri="{FF2B5EF4-FFF2-40B4-BE49-F238E27FC236}">
-                      <a16:creationId xmlns:a16="http://schemas.microsoft.com/office/drawing/2014/main" id="{E5F28160-A285-4540-BB6B-BEF5B9D0F227}"/>
-                    </a:ext>
-                  </a:extLst>
-                </p:cNvPr>
-                <p:cNvGrpSpPr/>
-                <p:nvPr/>
-              </p:nvGrpSpPr>
-              <p:grpSpPr>
-                <a:xfrm>
-                  <a:off x="57969" y="1930768"/>
-                  <a:ext cx="6972734" cy="3121888"/>
-                  <a:chOff x="1310206" y="2270540"/>
-                  <a:chExt cx="6972734" cy="3121888"/>
-                </a:xfrm>
-              </p:grpSpPr>
-              <p:cxnSp>
-                <p:nvCxnSpPr>
-                  <p:cNvPr id="18" name="直線コネクタ 17">
-                    <a:extLst>
-                      <a:ext uri="{FF2B5EF4-FFF2-40B4-BE49-F238E27FC236}">
-                        <a16:creationId xmlns:a16="http://schemas.microsoft.com/office/drawing/2014/main" id="{AD3B77B3-0154-43DD-A6C9-B838F6C1F138}"/>
-                      </a:ext>
-                    </a:extLst>
-                  </p:cNvPr>
-                  <p:cNvCxnSpPr>
-                    <a:cxnSpLocks/>
-                  </p:cNvCxnSpPr>
-                  <p:nvPr/>
-                </p:nvCxnSpPr>
-                <p:spPr>
-                  <a:xfrm>
-                    <a:off x="2457302" y="2388399"/>
-                    <a:ext cx="5825638" cy="0"/>
-                  </a:xfrm>
-                  <a:prstGeom prst="line">
-                    <a:avLst/>
-                  </a:prstGeom>
-                  <a:ln>
-                    <a:prstDash val="dash"/>
-                  </a:ln>
-                </p:spPr>
-                <p:style>
-                  <a:lnRef idx="1">
-                    <a:schemeClr val="accent1"/>
-                  </a:lnRef>
-                  <a:fillRef idx="0">
-                    <a:schemeClr val="accent1"/>
-                  </a:fillRef>
-                  <a:effectRef idx="0">
-                    <a:schemeClr val="accent1"/>
-                  </a:effectRef>
-                  <a:fontRef idx="minor">
-                    <a:schemeClr val="tx1"/>
-                  </a:fontRef>
-                </p:style>
-              </p:cxnSp>
-              <p:cxnSp>
-                <p:nvCxnSpPr>
-                  <p:cNvPr id="19" name="直線コネクタ 18">
-                    <a:extLst>
-                      <a:ext uri="{FF2B5EF4-FFF2-40B4-BE49-F238E27FC236}">
-                        <a16:creationId xmlns:a16="http://schemas.microsoft.com/office/drawing/2014/main" id="{72A79699-1AA2-446A-B3ED-27E22AE34840}"/>
-                      </a:ext>
-                    </a:extLst>
-                  </p:cNvPr>
-                  <p:cNvCxnSpPr>
-                    <a:cxnSpLocks/>
-                  </p:cNvCxnSpPr>
-                  <p:nvPr/>
-                </p:nvCxnSpPr>
-                <p:spPr>
-                  <a:xfrm>
-                    <a:off x="2442062" y="3828579"/>
-                    <a:ext cx="5825638" cy="0"/>
-                  </a:xfrm>
-                  <a:prstGeom prst="line">
-                    <a:avLst/>
-                  </a:prstGeom>
-                </p:spPr>
-                <p:style>
-                  <a:lnRef idx="1">
-                    <a:schemeClr val="accent1"/>
-                  </a:lnRef>
-                  <a:fillRef idx="0">
-                    <a:schemeClr val="accent1"/>
-                  </a:fillRef>
-                  <a:effectRef idx="0">
-                    <a:schemeClr val="accent1"/>
-                  </a:effectRef>
-                  <a:fontRef idx="minor">
-                    <a:schemeClr val="tx1"/>
-                  </a:fontRef>
-                </p:style>
-              </p:cxnSp>
-              <p:cxnSp>
-                <p:nvCxnSpPr>
-                  <p:cNvPr id="20" name="直線コネクタ 19">
-                    <a:extLst>
-                      <a:ext uri="{FF2B5EF4-FFF2-40B4-BE49-F238E27FC236}">
-                        <a16:creationId xmlns:a16="http://schemas.microsoft.com/office/drawing/2014/main" id="{604EDC1E-7D5A-4EA3-BBF7-A05257AA96EC}"/>
-                      </a:ext>
-                    </a:extLst>
-                  </p:cNvPr>
-                  <p:cNvCxnSpPr>
-                    <a:cxnSpLocks/>
-                  </p:cNvCxnSpPr>
-                  <p:nvPr/>
-                </p:nvCxnSpPr>
-                <p:spPr>
-                  <a:xfrm>
-                    <a:off x="2442062" y="5261139"/>
-                    <a:ext cx="5825638" cy="0"/>
-                  </a:xfrm>
-                  <a:prstGeom prst="line">
-                    <a:avLst/>
-                  </a:prstGeom>
-                  <a:ln>
-                    <a:prstDash val="dash"/>
-                  </a:ln>
-                </p:spPr>
-                <p:style>
-                  <a:lnRef idx="1">
-                    <a:schemeClr val="accent1"/>
-                  </a:lnRef>
-                  <a:fillRef idx="0">
-                    <a:schemeClr val="accent1"/>
-                  </a:fillRef>
-                  <a:effectRef idx="0">
-                    <a:schemeClr val="accent1"/>
-                  </a:effectRef>
-                  <a:fontRef idx="minor">
-                    <a:schemeClr val="tx1"/>
-                  </a:fontRef>
-                </p:style>
-              </p:cxnSp>
-              <mc:AlternateContent xmlns:mc="http://schemas.openxmlformats.org/markup-compatibility/2006">
-                <mc:Choice xmlns:a14="http://schemas.microsoft.com/office/drawing/2010/main" Requires="a14">
-                  <p:sp>
-                    <p:nvSpPr>
-                      <p:cNvPr id="21" name="テキスト ボックス 20">
-                        <a:extLst>
-                          <a:ext uri="{FF2B5EF4-FFF2-40B4-BE49-F238E27FC236}">
-                            <a16:creationId xmlns:a16="http://schemas.microsoft.com/office/drawing/2014/main" id="{AF29BE63-8F3B-481F-854D-93ABE07ADE47}"/>
-                          </a:ext>
-                        </a:extLst>
-                      </p:cNvPr>
-                      <p:cNvSpPr txBox="1"/>
-                      <p:nvPr/>
-                    </p:nvSpPr>
-                    <p:spPr>
-                      <a:xfrm>
-                        <a:off x="1353949" y="2270540"/>
-                        <a:ext cx="1155910" cy="250959"/>
-                      </a:xfrm>
-                      <a:prstGeom prst="rect">
-                        <a:avLst/>
-                      </a:prstGeom>
-                      <a:noFill/>
-                    </p:spPr>
-                    <p:txBody>
-                      <a:bodyPr wrap="none" rtlCol="0">
-                        <a:spAutoFit/>
-                      </a:bodyPr>
-                      <a:lstStyle/>
-                      <a:p>
-                        <a:pPr/>
-                        <a14:m>
-                          <m:oMathPara xmlns:m="http://schemas.openxmlformats.org/officeDocument/2006/math">
-                            <m:oMathParaPr>
-                              <m:jc m:val="centerGroup"/>
-                            </m:oMathParaPr>
-                            <m:oMath xmlns:m="http://schemas.openxmlformats.org/officeDocument/2006/math">
-                              <m:r>
-                                <a:rPr lang="ja-JP" altLang="en-US" sz="1200" i="1" smtClean="0">
-                                  <a:latin typeface="Cambria Math" panose="02040503050406030204" pitchFamily="18" charset="0"/>
-                                </a:rPr>
-                                <m:t>初期位置</m:t>
-                              </m:r>
-                              <m:r>
-                                <a:rPr lang="en-US" altLang="ja-JP" sz="1200" b="0" i="1" smtClean="0">
-                                  <a:latin typeface="Cambria Math" panose="02040503050406030204" pitchFamily="18" charset="0"/>
-                                </a:rPr>
-                                <m:t>+</m:t>
-                              </m:r>
-                              <m:r>
-                                <a:rPr lang="en-US" altLang="ja-JP" sz="1200" b="0" i="1" smtClean="0">
-                                  <a:latin typeface="Cambria Math" panose="02040503050406030204" pitchFamily="18" charset="0"/>
-                                </a:rPr>
-                                <m:t>100</m:t>
-                              </m:r>
-                            </m:oMath>
-                          </m:oMathPara>
-                        </a14:m>
-                        <a:endParaRPr lang="en-US" altLang="ja-JP" sz="1200" dirty="0"/>
-                      </a:p>
-                    </p:txBody>
-                  </p:sp>
-                </mc:Choice>
-                <mc:Fallback>
-                  <p:sp>
-                    <p:nvSpPr>
-                      <p:cNvPr id="21" name="テキスト ボックス 20">
-                        <a:extLst>
-                          <a:ext uri="{FF2B5EF4-FFF2-40B4-BE49-F238E27FC236}">
-                            <a16:creationId xmlns:a16="http://schemas.microsoft.com/office/drawing/2014/main" id="{AF29BE63-8F3B-481F-854D-93ABE07ADE47}"/>
-                          </a:ext>
-                        </a:extLst>
-                      </p:cNvPr>
-                      <p:cNvSpPr txBox="1">
-                        <a:spLocks noRot="1" noChangeAspect="1" noMove="1" noResize="1" noEditPoints="1" noAdjustHandles="1" noChangeArrowheads="1" noChangeShapeType="1" noTextEdit="1"/>
-                      </p:cNvSpPr>
-                      <p:nvPr/>
-                    </p:nvSpPr>
-                    <p:spPr>
-                      <a:xfrm>
-                        <a:off x="1353949" y="2270540"/>
-                        <a:ext cx="1155910" cy="250959"/>
-                      </a:xfrm>
-                      <a:prstGeom prst="rect">
-                        <a:avLst/>
-                      </a:prstGeom>
-                      <a:blipFill>
-                        <a:blip r:embed="rId2"/>
-                        <a:stretch>
-                          <a:fillRect/>
-                        </a:stretch>
-                      </a:blipFill>
-                    </p:spPr>
-                    <p:txBody>
-                      <a:bodyPr/>
-                      <a:lstStyle/>
-                      <a:p>
-                        <a:r>
-                          <a:rPr lang="ja-JP" altLang="en-US">
-                            <a:noFill/>
-                          </a:rPr>
-                          <a:t> </a:t>
-                        </a:r>
-                      </a:p>
-                    </p:txBody>
-                  </p:sp>
-                </mc:Fallback>
-              </mc:AlternateContent>
-              <mc:AlternateContent xmlns:mc="http://schemas.openxmlformats.org/markup-compatibility/2006">
-                <mc:Choice xmlns:a14="http://schemas.microsoft.com/office/drawing/2010/main" Requires="a14">
-                  <p:sp>
-                    <p:nvSpPr>
-                      <p:cNvPr id="22" name="テキスト ボックス 21">
-                        <a:extLst>
-                          <a:ext uri="{FF2B5EF4-FFF2-40B4-BE49-F238E27FC236}">
-                            <a16:creationId xmlns:a16="http://schemas.microsoft.com/office/drawing/2014/main" id="{127B8EB8-EC20-4A27-BD38-C5843AAB395A}"/>
-                          </a:ext>
-                        </a:extLst>
-                      </p:cNvPr>
-                      <p:cNvSpPr txBox="1"/>
-                      <p:nvPr/>
-                    </p:nvSpPr>
-                    <p:spPr>
-                      <a:xfrm>
-                        <a:off x="1448828" y="3673406"/>
-                        <a:ext cx="959886" cy="306728"/>
-                      </a:xfrm>
-                      <a:prstGeom prst="rect">
-                        <a:avLst/>
-                      </a:prstGeom>
-                      <a:noFill/>
-                    </p:spPr>
-                    <p:txBody>
-                      <a:bodyPr wrap="none" rtlCol="0">
-                        <a:spAutoFit/>
-                      </a:bodyPr>
-                      <a:lstStyle/>
-                      <a:p>
-                        <a:pPr/>
-                        <a14:m>
-                          <m:oMathPara xmlns:m="http://schemas.openxmlformats.org/officeDocument/2006/math">
-                            <m:oMathParaPr>
-                              <m:jc m:val="centerGroup"/>
-                            </m:oMathParaPr>
-                            <m:oMath xmlns:m="http://schemas.openxmlformats.org/officeDocument/2006/math">
-                              <m:r>
-                                <a:rPr lang="ja-JP" altLang="en-US" sz="1600" i="1">
-                                  <a:latin typeface="Cambria Math" panose="02040503050406030204" pitchFamily="18" charset="0"/>
-                                </a:rPr>
-                                <m:t>初期位置</m:t>
-                              </m:r>
-                            </m:oMath>
-                          </m:oMathPara>
-                        </a14:m>
-                        <a:endParaRPr lang="en-US" altLang="ja-JP" sz="1600" dirty="0"/>
-                      </a:p>
-                    </p:txBody>
-                  </p:sp>
-                </mc:Choice>
-                <mc:Fallback>
-                  <p:sp>
-                    <p:nvSpPr>
-                      <p:cNvPr id="22" name="テキスト ボックス 21">
-                        <a:extLst>
-                          <a:ext uri="{FF2B5EF4-FFF2-40B4-BE49-F238E27FC236}">
-                            <a16:creationId xmlns:a16="http://schemas.microsoft.com/office/drawing/2014/main" id="{127B8EB8-EC20-4A27-BD38-C5843AAB395A}"/>
-                          </a:ext>
-                        </a:extLst>
-                      </p:cNvPr>
-                      <p:cNvSpPr txBox="1">
-                        <a:spLocks noRot="1" noChangeAspect="1" noMove="1" noResize="1" noEditPoints="1" noAdjustHandles="1" noChangeArrowheads="1" noChangeShapeType="1" noTextEdit="1"/>
-                      </p:cNvSpPr>
-                      <p:nvPr/>
-                    </p:nvSpPr>
-                    <p:spPr>
-                      <a:xfrm>
-                        <a:off x="1448828" y="3673406"/>
-                        <a:ext cx="959886" cy="306728"/>
-                      </a:xfrm>
-                      <a:prstGeom prst="rect">
-                        <a:avLst/>
-                      </a:prstGeom>
-                      <a:blipFill>
-                        <a:blip r:embed="rId3"/>
-                        <a:stretch>
-                          <a:fillRect/>
-                        </a:stretch>
-                      </a:blipFill>
-                    </p:spPr>
-                    <p:txBody>
-                      <a:bodyPr/>
-                      <a:lstStyle/>
-                      <a:p>
-                        <a:r>
-                          <a:rPr lang="ja-JP" altLang="en-US">
-                            <a:noFill/>
-                          </a:rPr>
-                          <a:t> </a:t>
-                        </a:r>
-                      </a:p>
-                    </p:txBody>
-                  </p:sp>
-                </mc:Fallback>
-              </mc:AlternateContent>
-              <mc:AlternateContent xmlns:mc="http://schemas.openxmlformats.org/markup-compatibility/2006">
-                <mc:Choice xmlns:a14="http://schemas.microsoft.com/office/drawing/2010/main" Requires="a14">
-                  <p:sp>
-                    <p:nvSpPr>
-                      <p:cNvPr id="23" name="テキスト ボックス 22">
-                        <a:extLst>
-                          <a:ext uri="{FF2B5EF4-FFF2-40B4-BE49-F238E27FC236}">
-                            <a16:creationId xmlns:a16="http://schemas.microsoft.com/office/drawing/2014/main" id="{812757F5-CB73-40E5-BCAE-0E159291D44B}"/>
-                          </a:ext>
-                        </a:extLst>
-                      </p:cNvPr>
-                      <p:cNvSpPr txBox="1"/>
-                      <p:nvPr/>
-                    </p:nvSpPr>
-                    <p:spPr>
-                      <a:xfrm>
-                        <a:off x="1310206" y="5141469"/>
-                        <a:ext cx="1155910" cy="250959"/>
-                      </a:xfrm>
-                      <a:prstGeom prst="rect">
-                        <a:avLst/>
-                      </a:prstGeom>
-                      <a:noFill/>
-                    </p:spPr>
-                    <p:txBody>
-                      <a:bodyPr wrap="none" rtlCol="0">
-                        <a:spAutoFit/>
-                      </a:bodyPr>
-                      <a:lstStyle/>
-                      <a:p>
-                        <a:pPr/>
-                        <a14:m>
-                          <m:oMathPara xmlns:m="http://schemas.openxmlformats.org/officeDocument/2006/math">
-                            <m:oMathParaPr>
-                              <m:jc m:val="centerGroup"/>
-                            </m:oMathParaPr>
-                            <m:oMath xmlns:m="http://schemas.openxmlformats.org/officeDocument/2006/math">
-                              <m:r>
-                                <a:rPr lang="ja-JP" altLang="en-US" sz="1200" i="1">
-                                  <a:latin typeface="Cambria Math" panose="02040503050406030204" pitchFamily="18" charset="0"/>
-                                </a:rPr>
-                                <m:t>初期位置</m:t>
-                              </m:r>
-                              <m:r>
-                                <a:rPr lang="en-US" altLang="ja-JP" sz="1200" b="0" i="1" smtClean="0">
-                                  <a:latin typeface="Cambria Math" panose="02040503050406030204" pitchFamily="18" charset="0"/>
-                                </a:rPr>
-                                <m:t>−100</m:t>
-                              </m:r>
-                            </m:oMath>
-                          </m:oMathPara>
-                        </a14:m>
-                        <a:endParaRPr lang="en-US" altLang="ja-JP" sz="1200" dirty="0"/>
-                      </a:p>
-                    </p:txBody>
-                  </p:sp>
-                </mc:Choice>
-                <mc:Fallback>
-                  <p:sp>
-                    <p:nvSpPr>
-                      <p:cNvPr id="23" name="テキスト ボックス 22">
-                        <a:extLst>
-                          <a:ext uri="{FF2B5EF4-FFF2-40B4-BE49-F238E27FC236}">
-                            <a16:creationId xmlns:a16="http://schemas.microsoft.com/office/drawing/2014/main" id="{812757F5-CB73-40E5-BCAE-0E159291D44B}"/>
-                          </a:ext>
-                        </a:extLst>
-                      </p:cNvPr>
-                      <p:cNvSpPr txBox="1">
-                        <a:spLocks noRot="1" noChangeAspect="1" noMove="1" noResize="1" noEditPoints="1" noAdjustHandles="1" noChangeArrowheads="1" noChangeShapeType="1" noTextEdit="1"/>
-                      </p:cNvSpPr>
-                      <p:nvPr/>
-                    </p:nvSpPr>
-                    <p:spPr>
-                      <a:xfrm>
-                        <a:off x="1310206" y="5141469"/>
-                        <a:ext cx="1155910" cy="250959"/>
-                      </a:xfrm>
-                      <a:prstGeom prst="rect">
-                        <a:avLst/>
-                      </a:prstGeom>
-                      <a:blipFill>
-                        <a:blip r:embed="rId4"/>
-                        <a:stretch>
-                          <a:fillRect/>
-                        </a:stretch>
-                      </a:blipFill>
-                    </p:spPr>
-                    <p:txBody>
-                      <a:bodyPr/>
-                      <a:lstStyle/>
-                      <a:p>
-                        <a:r>
-                          <a:rPr lang="ja-JP" altLang="en-US">
-                            <a:noFill/>
-                          </a:rPr>
-                          <a:t> </a:t>
-                        </a:r>
-                      </a:p>
-                    </p:txBody>
-                  </p:sp>
-                </mc:Fallback>
-              </mc:AlternateContent>
-            </p:grpSp>
-            <mc:AlternateContent xmlns:mc="http://schemas.openxmlformats.org/markup-compatibility/2006" xmlns:a14="http://schemas.microsoft.com/office/drawing/2010/main">
-              <mc:Choice Requires="a14">
-                <p:sp>
-                  <p:nvSpPr>
-                    <p:cNvPr id="14" name="テキスト ボックス 13">
-                      <a:extLst>
-                        <a:ext uri="{FF2B5EF4-FFF2-40B4-BE49-F238E27FC236}">
-                          <a16:creationId xmlns:a16="http://schemas.microsoft.com/office/drawing/2014/main" id="{6C860ED5-B1B8-4591-8B25-4C9C82A9C5D5}"/>
-                        </a:ext>
-                      </a:extLst>
-                    </p:cNvPr>
-                    <p:cNvSpPr txBox="1"/>
-                    <p:nvPr/>
-                  </p:nvSpPr>
-                  <p:spPr>
-                    <a:xfrm>
-                      <a:off x="1879426" y="3474036"/>
-                      <a:ext cx="862737" cy="338554"/>
-                    </a:xfrm>
-                    <a:prstGeom prst="rect">
-                      <a:avLst/>
-                    </a:prstGeom>
-                    <a:noFill/>
-                  </p:spPr>
-                  <p:txBody>
-                    <a:bodyPr wrap="none" rtlCol="0">
-                      <a:spAutoFit/>
-                    </a:bodyPr>
-                    <a:lstStyle/>
-                    <a:p>
-                      <a:pPr/>
-                      <a14:m>
-                        <m:oMathPara xmlns:m="http://schemas.openxmlformats.org/officeDocument/2006/math">
-                          <m:oMathParaPr>
-                            <m:jc m:val="centerGroup"/>
-                          </m:oMathParaPr>
-                          <m:oMath xmlns:m="http://schemas.openxmlformats.org/officeDocument/2006/math">
-                            <m:r>
-                              <a:rPr lang="en-US" altLang="ja-JP" sz="1600" b="0" i="1" smtClean="0">
-                                <a:latin typeface="Cambria Math" panose="02040503050406030204" pitchFamily="18" charset="0"/>
-                              </a:rPr>
-                              <m:t>𝑠𝑖𝑛</m:t>
-                            </m:r>
-                            <m:r>
-                              <a:rPr lang="en-US" altLang="ja-JP" sz="1600" i="1">
-                                <a:latin typeface="Cambria Math" panose="02040503050406030204" pitchFamily="18" charset="0"/>
-                              </a:rPr>
-                              <m:t>180</m:t>
-                            </m:r>
-                          </m:oMath>
-                        </m:oMathPara>
-                      </a14:m>
-                      <a:endParaRPr lang="en-US" altLang="ja-JP" sz="1600" dirty="0"/>
-                    </a:p>
-                  </p:txBody>
-                </p:sp>
-              </mc:Choice>
-              <mc:Fallback xmlns="">
-                <p:sp>
-                  <p:nvSpPr>
-                    <p:cNvPr id="55" name="テキスト ボックス 54">
-                      <a:extLst>
-                        <a:ext uri="{FF2B5EF4-FFF2-40B4-BE49-F238E27FC236}">
-                          <a16:creationId xmlns:a16="http://schemas.microsoft.com/office/drawing/2014/main" id="{D435A0B8-73C6-48C9-AE37-C2992EFF70BB}"/>
-                        </a:ext>
-                      </a:extLst>
-                    </p:cNvPr>
-                    <p:cNvSpPr txBox="1">
-                      <a:spLocks noRot="1" noChangeAspect="1" noMove="1" noResize="1" noEditPoints="1" noAdjustHandles="1" noChangeArrowheads="1" noChangeShapeType="1" noTextEdit="1"/>
-                    </p:cNvSpPr>
-                    <p:nvPr/>
-                  </p:nvSpPr>
-                  <p:spPr>
-                    <a:xfrm>
-                      <a:off x="1879426" y="3474036"/>
-                      <a:ext cx="862737" cy="338554"/>
-                    </a:xfrm>
-                    <a:prstGeom prst="rect">
-                      <a:avLst/>
-                    </a:prstGeom>
-                    <a:blipFill>
-                      <a:blip r:embed="rId7"/>
-                      <a:stretch>
-                        <a:fillRect/>
-                      </a:stretch>
-                    </a:blipFill>
-                  </p:spPr>
-                  <p:txBody>
-                    <a:bodyPr/>
-                    <a:lstStyle/>
-                    <a:p>
-                      <a:r>
-                        <a:rPr lang="ja-JP" altLang="en-US">
-                          <a:noFill/>
-                        </a:rPr>
-                        <a:t> </a:t>
-                      </a:r>
-                    </a:p>
-                  </p:txBody>
-                </p:sp>
-              </mc:Fallback>
-            </mc:AlternateContent>
-            <mc:AlternateContent xmlns:mc="http://schemas.openxmlformats.org/markup-compatibility/2006" xmlns:a14="http://schemas.microsoft.com/office/drawing/2010/main">
-              <mc:Choice Requires="a14">
-                <p:sp>
-                  <p:nvSpPr>
-                    <p:cNvPr id="15" name="テキスト ボックス 14">
-                      <a:extLst>
-                        <a:ext uri="{FF2B5EF4-FFF2-40B4-BE49-F238E27FC236}">
-                          <a16:creationId xmlns:a16="http://schemas.microsoft.com/office/drawing/2014/main" id="{CF6D2836-3CD6-4130-8BB9-5C9503F1969F}"/>
-                        </a:ext>
-                      </a:extLst>
-                    </p:cNvPr>
-                    <p:cNvSpPr txBox="1"/>
-                    <p:nvPr/>
-                  </p:nvSpPr>
-                  <p:spPr>
-                    <a:xfrm>
-                      <a:off x="3255147" y="3474036"/>
-                      <a:ext cx="862737" cy="338554"/>
-                    </a:xfrm>
-                    <a:prstGeom prst="rect">
-                      <a:avLst/>
-                    </a:prstGeom>
-                    <a:noFill/>
-                  </p:spPr>
-                  <p:txBody>
-                    <a:bodyPr wrap="none" rtlCol="0">
-                      <a:spAutoFit/>
-                    </a:bodyPr>
-                    <a:lstStyle/>
-                    <a:p>
-                      <a:pPr/>
-                      <a14:m>
-                        <m:oMathPara xmlns:m="http://schemas.openxmlformats.org/officeDocument/2006/math">
-                          <m:oMathParaPr>
-                            <m:jc m:val="centerGroup"/>
-                          </m:oMathParaPr>
-                          <m:oMath xmlns:m="http://schemas.openxmlformats.org/officeDocument/2006/math">
-                            <m:r>
-                              <a:rPr lang="en-US" altLang="ja-JP" sz="1600" b="0" i="1" smtClean="0">
-                                <a:latin typeface="Cambria Math" panose="02040503050406030204" pitchFamily="18" charset="0"/>
-                              </a:rPr>
-                              <m:t>𝑠𝑖𝑛</m:t>
-                            </m:r>
-                            <m:r>
-                              <a:rPr lang="en-US" altLang="ja-JP" sz="1600" i="1">
-                                <a:latin typeface="Cambria Math" panose="02040503050406030204" pitchFamily="18" charset="0"/>
-                              </a:rPr>
-                              <m:t>360</m:t>
-                            </m:r>
-                          </m:oMath>
-                        </m:oMathPara>
-                      </a14:m>
-                      <a:endParaRPr lang="en-US" altLang="ja-JP" sz="1600" dirty="0"/>
-                    </a:p>
-                  </p:txBody>
-                </p:sp>
-              </mc:Choice>
-              <mc:Fallback xmlns="">
-                <p:sp>
-                  <p:nvSpPr>
-                    <p:cNvPr id="56" name="テキスト ボックス 55">
-                      <a:extLst>
-                        <a:ext uri="{FF2B5EF4-FFF2-40B4-BE49-F238E27FC236}">
-                          <a16:creationId xmlns:a16="http://schemas.microsoft.com/office/drawing/2014/main" id="{F80DF57B-C729-440A-942A-EB1763F28B84}"/>
-                        </a:ext>
-                      </a:extLst>
-                    </p:cNvPr>
-                    <p:cNvSpPr txBox="1">
-                      <a:spLocks noRot="1" noChangeAspect="1" noMove="1" noResize="1" noEditPoints="1" noAdjustHandles="1" noChangeArrowheads="1" noChangeShapeType="1" noTextEdit="1"/>
-                    </p:cNvSpPr>
-                    <p:nvPr/>
-                  </p:nvSpPr>
-                  <p:spPr>
-                    <a:xfrm>
-                      <a:off x="3255147" y="3474036"/>
-                      <a:ext cx="862737" cy="338554"/>
-                    </a:xfrm>
-                    <a:prstGeom prst="rect">
-                      <a:avLst/>
-                    </a:prstGeom>
-                    <a:blipFill>
-                      <a:blip r:embed="rId8"/>
-                      <a:stretch>
-                        <a:fillRect/>
-                      </a:stretch>
-                    </a:blipFill>
-                  </p:spPr>
-                  <p:txBody>
-                    <a:bodyPr/>
-                    <a:lstStyle/>
-                    <a:p>
-                      <a:r>
-                        <a:rPr lang="ja-JP" altLang="en-US">
-                          <a:noFill/>
-                        </a:rPr>
-                        <a:t> </a:t>
-                      </a:r>
-                    </a:p>
-                  </p:txBody>
-                </p:sp>
-              </mc:Fallback>
-            </mc:AlternateContent>
-            <mc:AlternateContent xmlns:mc="http://schemas.openxmlformats.org/markup-compatibility/2006" xmlns:a14="http://schemas.microsoft.com/office/drawing/2010/main">
-              <mc:Choice Requires="a14">
-                <p:sp>
-                  <p:nvSpPr>
-                    <p:cNvPr id="16" name="テキスト ボックス 15">
-                      <a:extLst>
-                        <a:ext uri="{FF2B5EF4-FFF2-40B4-BE49-F238E27FC236}">
-                          <a16:creationId xmlns:a16="http://schemas.microsoft.com/office/drawing/2014/main" id="{7F86B96F-457D-47A6-8313-8CEE874D925A}"/>
-                        </a:ext>
-                      </a:extLst>
-                    </p:cNvPr>
-                    <p:cNvSpPr txBox="1"/>
-                    <p:nvPr/>
-                  </p:nvSpPr>
-                  <p:spPr>
-                    <a:xfrm>
-                      <a:off x="1239521" y="1776378"/>
-                      <a:ext cx="748923" cy="338554"/>
-                    </a:xfrm>
-                    <a:prstGeom prst="rect">
-                      <a:avLst/>
-                    </a:prstGeom>
-                    <a:noFill/>
-                  </p:spPr>
-                  <p:txBody>
-                    <a:bodyPr wrap="none" rtlCol="0">
-                      <a:spAutoFit/>
-                    </a:bodyPr>
-                    <a:lstStyle/>
-                    <a:p>
-                      <a:pPr/>
-                      <a14:m>
-                        <m:oMathPara xmlns:m="http://schemas.openxmlformats.org/officeDocument/2006/math">
-                          <m:oMathParaPr>
-                            <m:jc m:val="centerGroup"/>
-                          </m:oMathParaPr>
-                          <m:oMath xmlns:m="http://schemas.openxmlformats.org/officeDocument/2006/math">
-                            <m:r>
-                              <a:rPr lang="en-US" altLang="ja-JP" sz="1600" b="0" i="1" smtClean="0">
-                                <a:latin typeface="Cambria Math" panose="02040503050406030204" pitchFamily="18" charset="0"/>
-                              </a:rPr>
-                              <m:t>𝑠𝑖𝑛</m:t>
-                            </m:r>
-                            <m:r>
-                              <a:rPr lang="en-US" altLang="ja-JP" sz="1600" i="1">
-                                <a:latin typeface="Cambria Math" panose="02040503050406030204" pitchFamily="18" charset="0"/>
-                              </a:rPr>
-                              <m:t>90</m:t>
-                            </m:r>
-                          </m:oMath>
-                        </m:oMathPara>
-                      </a14:m>
-                      <a:endParaRPr lang="en-US" altLang="ja-JP" sz="1600" dirty="0"/>
-                    </a:p>
-                  </p:txBody>
-                </p:sp>
-              </mc:Choice>
-              <mc:Fallback xmlns="">
-                <p:sp>
-                  <p:nvSpPr>
-                    <p:cNvPr id="59" name="テキスト ボックス 58">
-                      <a:extLst>
-                        <a:ext uri="{FF2B5EF4-FFF2-40B4-BE49-F238E27FC236}">
-                          <a16:creationId xmlns:a16="http://schemas.microsoft.com/office/drawing/2014/main" id="{33793090-82A7-4AEC-97F1-5ACA14395880}"/>
-                        </a:ext>
-                      </a:extLst>
-                    </p:cNvPr>
-                    <p:cNvSpPr txBox="1">
-                      <a:spLocks noRot="1" noChangeAspect="1" noMove="1" noResize="1" noEditPoints="1" noAdjustHandles="1" noChangeArrowheads="1" noChangeShapeType="1" noTextEdit="1"/>
-                    </p:cNvSpPr>
-                    <p:nvPr/>
-                  </p:nvSpPr>
-                  <p:spPr>
-                    <a:xfrm>
-                      <a:off x="1239521" y="1776378"/>
-                      <a:ext cx="748923" cy="338554"/>
-                    </a:xfrm>
-                    <a:prstGeom prst="rect">
-                      <a:avLst/>
-                    </a:prstGeom>
-                    <a:blipFill>
-                      <a:blip r:embed="rId9"/>
-                      <a:stretch>
-                        <a:fillRect/>
-                      </a:stretch>
-                    </a:blipFill>
-                  </p:spPr>
-                  <p:txBody>
-                    <a:bodyPr/>
-                    <a:lstStyle/>
-                    <a:p>
-                      <a:r>
-                        <a:rPr lang="ja-JP" altLang="en-US">
-                          <a:noFill/>
-                        </a:rPr>
-                        <a:t> </a:t>
-                      </a:r>
-                    </a:p>
-                  </p:txBody>
-                </p:sp>
-              </mc:Fallback>
-            </mc:AlternateContent>
-            <mc:AlternateContent xmlns:mc="http://schemas.openxmlformats.org/markup-compatibility/2006" xmlns:a14="http://schemas.microsoft.com/office/drawing/2010/main">
-              <mc:Choice Requires="a14">
-                <p:sp>
-                  <p:nvSpPr>
-                    <p:cNvPr id="17" name="テキスト ボックス 16">
-                      <a:extLst>
-                        <a:ext uri="{FF2B5EF4-FFF2-40B4-BE49-F238E27FC236}">
-                          <a16:creationId xmlns:a16="http://schemas.microsoft.com/office/drawing/2014/main" id="{640FCC4C-E089-43DE-BF94-AB6A6414514F}"/>
-                        </a:ext>
-                      </a:extLst>
-                    </p:cNvPr>
-                    <p:cNvSpPr txBox="1"/>
-                    <p:nvPr/>
-                  </p:nvSpPr>
-                  <p:spPr>
-                    <a:xfrm>
-                      <a:off x="2613670" y="4889284"/>
-                      <a:ext cx="862737" cy="338554"/>
-                    </a:xfrm>
-                    <a:prstGeom prst="rect">
-                      <a:avLst/>
-                    </a:prstGeom>
-                    <a:noFill/>
-                  </p:spPr>
-                  <p:txBody>
-                    <a:bodyPr wrap="none" rtlCol="0">
-                      <a:spAutoFit/>
-                    </a:bodyPr>
-                    <a:lstStyle/>
-                    <a:p>
-                      <a:pPr/>
-                      <a14:m>
-                        <m:oMathPara xmlns:m="http://schemas.openxmlformats.org/officeDocument/2006/math">
-                          <m:oMathParaPr>
-                            <m:jc m:val="centerGroup"/>
-                          </m:oMathParaPr>
-                          <m:oMath xmlns:m="http://schemas.openxmlformats.org/officeDocument/2006/math">
-                            <m:r>
-                              <a:rPr lang="en-US" altLang="ja-JP" sz="1600" b="0" i="1" smtClean="0">
-                                <a:latin typeface="Cambria Math" panose="02040503050406030204" pitchFamily="18" charset="0"/>
-                              </a:rPr>
-                              <m:t>𝑠𝑖𝑛</m:t>
-                            </m:r>
-                            <m:r>
-                              <a:rPr lang="en-US" altLang="ja-JP" sz="1600" i="1">
-                                <a:latin typeface="Cambria Math" panose="02040503050406030204" pitchFamily="18" charset="0"/>
-                              </a:rPr>
-                              <m:t>270</m:t>
-                            </m:r>
-                          </m:oMath>
-                        </m:oMathPara>
-                      </a14:m>
-                      <a:endParaRPr lang="en-US" altLang="ja-JP" sz="1600" dirty="0"/>
-                    </a:p>
-                  </p:txBody>
-                </p:sp>
-              </mc:Choice>
-              <mc:Fallback xmlns="">
-                <p:sp>
-                  <p:nvSpPr>
-                    <p:cNvPr id="60" name="テキスト ボックス 59">
-                      <a:extLst>
-                        <a:ext uri="{FF2B5EF4-FFF2-40B4-BE49-F238E27FC236}">
-                          <a16:creationId xmlns:a16="http://schemas.microsoft.com/office/drawing/2014/main" id="{25D68D67-6AF6-4589-9860-5217804110D2}"/>
-                        </a:ext>
-                      </a:extLst>
-                    </p:cNvPr>
-                    <p:cNvSpPr txBox="1">
-                      <a:spLocks noRot="1" noChangeAspect="1" noMove="1" noResize="1" noEditPoints="1" noAdjustHandles="1" noChangeArrowheads="1" noChangeShapeType="1" noTextEdit="1"/>
-                    </p:cNvSpPr>
-                    <p:nvPr/>
-                  </p:nvSpPr>
-                  <p:spPr>
-                    <a:xfrm>
-                      <a:off x="2613670" y="4889284"/>
-                      <a:ext cx="862737" cy="338554"/>
-                    </a:xfrm>
-                    <a:prstGeom prst="rect">
-                      <a:avLst/>
-                    </a:prstGeom>
-                    <a:blipFill>
-                      <a:blip r:embed="rId10"/>
-                      <a:stretch>
-                        <a:fillRect/>
-                      </a:stretch>
-                    </a:blipFill>
-                  </p:spPr>
-                  <p:txBody>
-                    <a:bodyPr/>
-                    <a:lstStyle/>
-                    <a:p>
-                      <a:r>
-                        <a:rPr lang="ja-JP" altLang="en-US">
-                          <a:noFill/>
-                        </a:rPr>
-                        <a:t> </a:t>
-                      </a:r>
-                    </a:p>
-                  </p:txBody>
-                </p:sp>
-              </mc:Fallback>
-            </mc:AlternateContent>
-          </p:grpSp>
-          <p:sp>
-            <p:nvSpPr>
-              <p:cNvPr id="10" name="フリーフォーム: 図形 9">
-                <a:extLst>
-                  <a:ext uri="{FF2B5EF4-FFF2-40B4-BE49-F238E27FC236}">
-                    <a16:creationId xmlns:a16="http://schemas.microsoft.com/office/drawing/2014/main" id="{E5AA72B8-51EA-4189-97F0-F5A221F83B22}"/>
-                  </a:ext>
-                </a:extLst>
-              </p:cNvPr>
-              <p:cNvSpPr/>
-              <p:nvPr/>
-            </p:nvSpPr>
-            <p:spPr>
-              <a:xfrm>
-                <a:off x="1196340" y="2263139"/>
-                <a:ext cx="1447800" cy="1440181"/>
-              </a:xfrm>
-              <a:custGeom>
-                <a:avLst/>
-                <a:gdLst>
-                  <a:gd name="connsiteX0" fmla="*/ 0 w 1447800"/>
-                  <a:gd name="connsiteY0" fmla="*/ 1432561 h 1440181"/>
-                  <a:gd name="connsiteX1" fmla="*/ 762000 w 1447800"/>
-                  <a:gd name="connsiteY1" fmla="*/ 1 h 1440181"/>
-                  <a:gd name="connsiteX2" fmla="*/ 1447800 w 1447800"/>
-                  <a:gd name="connsiteY2" fmla="*/ 1440181 h 1440181"/>
-                </a:gdLst>
-                <a:ahLst/>
-                <a:cxnLst>
-                  <a:cxn ang="0">
-                    <a:pos x="connsiteX0" y="connsiteY0"/>
-                  </a:cxn>
-                  <a:cxn ang="0">
-                    <a:pos x="connsiteX1" y="connsiteY1"/>
-                  </a:cxn>
-                  <a:cxn ang="0">
-                    <a:pos x="connsiteX2" y="connsiteY2"/>
-                  </a:cxn>
-                </a:cxnLst>
-                <a:rect l="l" t="t" r="r" b="b"/>
-                <a:pathLst>
-                  <a:path w="1447800" h="1440181">
-                    <a:moveTo>
-                      <a:pt x="0" y="1432561"/>
-                    </a:moveTo>
-                    <a:cubicBezTo>
-                      <a:pt x="260350" y="715646"/>
-                      <a:pt x="520700" y="-1269"/>
-                      <a:pt x="762000" y="1"/>
-                    </a:cubicBezTo>
-                    <a:cubicBezTo>
-                      <a:pt x="1003300" y="1271"/>
-                      <a:pt x="1225550" y="720726"/>
-                      <a:pt x="1447800" y="1440181"/>
-                    </a:cubicBezTo>
-                  </a:path>
-                </a:pathLst>
-              </a:custGeom>
-              <a:noFill/>
-              <a:ln>
-                <a:solidFill>
-                  <a:srgbClr val="FF0000"/>
-                </a:solidFill>
-              </a:ln>
-            </p:spPr>
-            <p:style>
-              <a:lnRef idx="2">
-                <a:schemeClr val="accent1">
-                  <a:shade val="50000"/>
-                </a:schemeClr>
-              </a:lnRef>
-              <a:fillRef idx="1">
-                <a:schemeClr val="accent1"/>
-              </a:fillRef>
-              <a:effectRef idx="0">
-                <a:schemeClr val="accent1"/>
-              </a:effectRef>
-              <a:fontRef idx="minor">
-                <a:schemeClr val="lt1"/>
-              </a:fontRef>
-            </p:style>
-            <p:txBody>
-              <a:bodyPr rtlCol="0" anchor="ctr"/>
-              <a:lstStyle/>
-              <a:p>
-                <a:pPr algn="ctr"/>
-                <a:endParaRPr kumimoji="1" lang="ja-JP" altLang="en-US"/>
-              </a:p>
-            </p:txBody>
-          </p:sp>
-          <p:sp>
-            <p:nvSpPr>
-              <p:cNvPr id="11" name="フリーフォーム: 図形 10">
-                <a:extLst>
-                  <a:ext uri="{FF2B5EF4-FFF2-40B4-BE49-F238E27FC236}">
-                    <a16:creationId xmlns:a16="http://schemas.microsoft.com/office/drawing/2014/main" id="{B28D004D-0775-4457-8D6D-D74F1FD9BEAC}"/>
-                  </a:ext>
-                </a:extLst>
-              </p:cNvPr>
-              <p:cNvSpPr/>
-              <p:nvPr/>
-            </p:nvSpPr>
-            <p:spPr>
-              <a:xfrm rot="10800000">
-                <a:off x="2641759" y="3696706"/>
-                <a:ext cx="1447800" cy="1440181"/>
-              </a:xfrm>
-              <a:custGeom>
-                <a:avLst/>
-                <a:gdLst>
-                  <a:gd name="connsiteX0" fmla="*/ 0 w 1447800"/>
-                  <a:gd name="connsiteY0" fmla="*/ 1432561 h 1440181"/>
-                  <a:gd name="connsiteX1" fmla="*/ 762000 w 1447800"/>
-                  <a:gd name="connsiteY1" fmla="*/ 1 h 1440181"/>
-                  <a:gd name="connsiteX2" fmla="*/ 1447800 w 1447800"/>
-                  <a:gd name="connsiteY2" fmla="*/ 1440181 h 1440181"/>
-                </a:gdLst>
-                <a:ahLst/>
-                <a:cxnLst>
-                  <a:cxn ang="0">
-                    <a:pos x="connsiteX0" y="connsiteY0"/>
-                  </a:cxn>
-                  <a:cxn ang="0">
-                    <a:pos x="connsiteX1" y="connsiteY1"/>
-                  </a:cxn>
-                  <a:cxn ang="0">
-                    <a:pos x="connsiteX2" y="connsiteY2"/>
-                  </a:cxn>
-                </a:cxnLst>
-                <a:rect l="l" t="t" r="r" b="b"/>
-                <a:pathLst>
-                  <a:path w="1447800" h="1440181">
-                    <a:moveTo>
-                      <a:pt x="0" y="1432561"/>
-                    </a:moveTo>
-                    <a:cubicBezTo>
-                      <a:pt x="260350" y="715646"/>
-                      <a:pt x="520700" y="-1269"/>
-                      <a:pt x="762000" y="1"/>
-                    </a:cubicBezTo>
-                    <a:cubicBezTo>
-                      <a:pt x="1003300" y="1271"/>
-                      <a:pt x="1225550" y="720726"/>
-                      <a:pt x="1447800" y="1440181"/>
-                    </a:cubicBezTo>
-                  </a:path>
-                </a:pathLst>
-              </a:custGeom>
-              <a:noFill/>
-              <a:ln>
-                <a:solidFill>
-                  <a:srgbClr val="FF0000"/>
-                </a:solidFill>
-              </a:ln>
-            </p:spPr>
-            <p:style>
-              <a:lnRef idx="2">
-                <a:schemeClr val="accent1">
-                  <a:shade val="50000"/>
-                </a:schemeClr>
-              </a:lnRef>
-              <a:fillRef idx="1">
-                <a:schemeClr val="accent1"/>
-              </a:fillRef>
-              <a:effectRef idx="0">
-                <a:schemeClr val="accent1"/>
-              </a:effectRef>
-              <a:fontRef idx="minor">
-                <a:schemeClr val="lt1"/>
-              </a:fontRef>
-            </p:style>
-            <p:txBody>
-              <a:bodyPr rtlCol="0" anchor="ctr"/>
-              <a:lstStyle/>
-              <a:p>
-                <a:pPr algn="ctr"/>
-                <a:endParaRPr kumimoji="1" lang="ja-JP" altLang="en-US"/>
-              </a:p>
-            </p:txBody>
-          </p:sp>
-          <p:sp>
-            <p:nvSpPr>
-              <p:cNvPr id="12" name="フリーフォーム: 図形 11">
-                <a:extLst>
-                  <a:ext uri="{FF2B5EF4-FFF2-40B4-BE49-F238E27FC236}">
-                    <a16:creationId xmlns:a16="http://schemas.microsoft.com/office/drawing/2014/main" id="{70A3C999-1215-413C-906C-6EA2CDD6538C}"/>
-                  </a:ext>
-                </a:extLst>
-              </p:cNvPr>
-              <p:cNvSpPr/>
-              <p:nvPr/>
-            </p:nvSpPr>
-            <p:spPr>
-              <a:xfrm>
-                <a:off x="4090036" y="2269991"/>
-                <a:ext cx="1447800" cy="1440181"/>
-              </a:xfrm>
-              <a:custGeom>
-                <a:avLst/>
-                <a:gdLst>
-                  <a:gd name="connsiteX0" fmla="*/ 0 w 1447800"/>
-                  <a:gd name="connsiteY0" fmla="*/ 1432561 h 1440181"/>
-                  <a:gd name="connsiteX1" fmla="*/ 762000 w 1447800"/>
-                  <a:gd name="connsiteY1" fmla="*/ 1 h 1440181"/>
-                  <a:gd name="connsiteX2" fmla="*/ 1447800 w 1447800"/>
-                  <a:gd name="connsiteY2" fmla="*/ 1440181 h 1440181"/>
-                </a:gdLst>
-                <a:ahLst/>
-                <a:cxnLst>
-                  <a:cxn ang="0">
-                    <a:pos x="connsiteX0" y="connsiteY0"/>
-                  </a:cxn>
-                  <a:cxn ang="0">
-                    <a:pos x="connsiteX1" y="connsiteY1"/>
-                  </a:cxn>
-                  <a:cxn ang="0">
-                    <a:pos x="connsiteX2" y="connsiteY2"/>
-                  </a:cxn>
-                </a:cxnLst>
-                <a:rect l="l" t="t" r="r" b="b"/>
-                <a:pathLst>
-                  <a:path w="1447800" h="1440181">
-                    <a:moveTo>
-                      <a:pt x="0" y="1432561"/>
-                    </a:moveTo>
-                    <a:cubicBezTo>
-                      <a:pt x="260350" y="715646"/>
-                      <a:pt x="520700" y="-1269"/>
-                      <a:pt x="762000" y="1"/>
-                    </a:cubicBezTo>
-                    <a:cubicBezTo>
-                      <a:pt x="1003300" y="1271"/>
-                      <a:pt x="1225550" y="720726"/>
-                      <a:pt x="1447800" y="1440181"/>
-                    </a:cubicBezTo>
-                  </a:path>
-                </a:pathLst>
-              </a:custGeom>
-              <a:noFill/>
-              <a:ln>
-                <a:solidFill>
-                  <a:srgbClr val="FF0000"/>
-                </a:solidFill>
-              </a:ln>
-            </p:spPr>
-            <p:style>
-              <a:lnRef idx="2">
-                <a:schemeClr val="accent1">
-                  <a:shade val="50000"/>
-                </a:schemeClr>
-              </a:lnRef>
-              <a:fillRef idx="1">
-                <a:schemeClr val="accent1"/>
-              </a:fillRef>
-              <a:effectRef idx="0">
-                <a:schemeClr val="accent1"/>
-              </a:effectRef>
-              <a:fontRef idx="minor">
-                <a:schemeClr val="lt1"/>
-              </a:fontRef>
-            </p:style>
-            <p:txBody>
-              <a:bodyPr rtlCol="0" anchor="ctr"/>
-              <a:lstStyle/>
-              <a:p>
-                <a:pPr algn="ctr"/>
-                <a:endParaRPr kumimoji="1" lang="ja-JP" altLang="en-US"/>
-              </a:p>
-            </p:txBody>
-          </p:sp>
-        </p:grpSp>
-        <p:sp>
-          <p:nvSpPr>
-            <p:cNvPr id="8" name="フリーフォーム: 図形 7">
-              <a:extLst>
-                <a:ext uri="{FF2B5EF4-FFF2-40B4-BE49-F238E27FC236}">
-                  <a16:creationId xmlns:a16="http://schemas.microsoft.com/office/drawing/2014/main" id="{FD9A8A50-67A9-4DC0-AB2F-24F65D3F4069}"/>
-                </a:ext>
-              </a:extLst>
-            </p:cNvPr>
-            <p:cNvSpPr/>
-            <p:nvPr/>
-          </p:nvSpPr>
-          <p:spPr>
-            <a:xfrm rot="10800000">
-              <a:off x="5535455" y="3702017"/>
-              <a:ext cx="1447800" cy="1440181"/>
-            </a:xfrm>
-            <a:custGeom>
-              <a:avLst/>
-              <a:gdLst>
-                <a:gd name="connsiteX0" fmla="*/ 0 w 1447800"/>
-                <a:gd name="connsiteY0" fmla="*/ 1432561 h 1440181"/>
-                <a:gd name="connsiteX1" fmla="*/ 762000 w 1447800"/>
-                <a:gd name="connsiteY1" fmla="*/ 1 h 1440181"/>
-                <a:gd name="connsiteX2" fmla="*/ 1447800 w 1447800"/>
-                <a:gd name="connsiteY2" fmla="*/ 1440181 h 1440181"/>
-              </a:gdLst>
-              <a:ahLst/>
-              <a:cxnLst>
-                <a:cxn ang="0">
-                  <a:pos x="connsiteX0" y="connsiteY0"/>
-                </a:cxn>
-                <a:cxn ang="0">
-                  <a:pos x="connsiteX1" y="connsiteY1"/>
-                </a:cxn>
-                <a:cxn ang="0">
-                  <a:pos x="connsiteX2" y="connsiteY2"/>
-                </a:cxn>
-              </a:cxnLst>
-              <a:rect l="l" t="t" r="r" b="b"/>
-              <a:pathLst>
-                <a:path w="1447800" h="1440181">
-                  <a:moveTo>
-                    <a:pt x="0" y="1432561"/>
-                  </a:moveTo>
-                  <a:cubicBezTo>
-                    <a:pt x="260350" y="715646"/>
-                    <a:pt x="520700" y="-1269"/>
-                    <a:pt x="762000" y="1"/>
-                  </a:cubicBezTo>
-                  <a:cubicBezTo>
-                    <a:pt x="1003300" y="1271"/>
-                    <a:pt x="1225550" y="720726"/>
-                    <a:pt x="1447800" y="1440181"/>
-                  </a:cubicBezTo>
-                </a:path>
-              </a:pathLst>
-            </a:custGeom>
-            <a:noFill/>
-            <a:ln>
-              <a:solidFill>
-                <a:srgbClr val="FF0000"/>
-              </a:solidFill>
-            </a:ln>
-          </p:spPr>
-          <p:style>
-            <a:lnRef idx="2">
-              <a:schemeClr val="accent1">
-                <a:shade val="50000"/>
-              </a:schemeClr>
-            </a:lnRef>
-            <a:fillRef idx="1">
-              <a:schemeClr val="accent1"/>
-            </a:fillRef>
-            <a:effectRef idx="0">
-              <a:schemeClr val="accent1"/>
-            </a:effectRef>
-            <a:fontRef idx="minor">
-              <a:schemeClr val="lt1"/>
-            </a:fontRef>
-          </p:style>
-          <p:txBody>
-            <a:bodyPr rtlCol="0" anchor="ctr"/>
-            <a:lstStyle/>
-            <a:p>
-              <a:pPr algn="ctr"/>
-              <a:endParaRPr kumimoji="1" lang="ja-JP" altLang="en-US"/>
-            </a:p>
-          </p:txBody>
-        </p:sp>
-      </p:grpSp>
-      <p:sp>
-        <p:nvSpPr>
-          <p:cNvPr id="24" name="テキスト ボックス 23">
-            <a:extLst>
-              <a:ext uri="{FF2B5EF4-FFF2-40B4-BE49-F238E27FC236}">
-                <a16:creationId xmlns:a16="http://schemas.microsoft.com/office/drawing/2014/main" id="{1EFAFB10-5F91-461F-AF85-6CDA67881A13}"/>
+          <a:prstGeom prst="rect">
+            <a:avLst/>
+          </a:prstGeom>
+        </p:spPr>
+      </p:pic>
+      <p:sp>
+        <p:nvSpPr>
+          <p:cNvPr id="7" name="テキスト ボックス 6">
+            <a:extLst>
+              <a:ext uri="{FF2B5EF4-FFF2-40B4-BE49-F238E27FC236}">
+                <a16:creationId xmlns:a16="http://schemas.microsoft.com/office/drawing/2014/main" id="{B115CB8B-64CE-46A3-B718-E8F05BC5C0EE}"/>
               </a:ext>
             </a:extLst>
           </p:cNvPr>
@@ -8285,8 +5741,8 @@
         </p:nvSpPr>
         <p:spPr>
           <a:xfrm>
-            <a:off x="9354873" y="5761529"/>
-            <a:ext cx="1723549" cy="461665"/>
+            <a:off x="567542" y="5710767"/>
+            <a:ext cx="6742551" cy="830997"/>
           </a:xfrm>
           <a:prstGeom prst="rect">
             <a:avLst/>
@@ -8300,21 +5756,52 @@
           <a:lstStyle/>
           <a:p>
             <a:r>
-              <a:rPr lang="ja-JP" altLang="en-US" sz="2400" b="1" dirty="0">
+              <a:rPr kumimoji="1" lang="en-US" altLang="ja-JP" sz="2400" dirty="0"/>
+              <a:t>※</a:t>
+            </a:r>
+            <a:r>
+              <a:rPr kumimoji="1" lang="ja-JP" altLang="en-US" sz="2400" b="1" dirty="0">
                 <a:solidFill>
                   <a:srgbClr val="FF0000"/>
                 </a:solidFill>
               </a:rPr>
-              <a:t>ここまで①</a:t>
+              <a:t>単位はラジアン</a:t>
+            </a:r>
+            <a:r>
+              <a:rPr kumimoji="1" lang="ja-JP" altLang="en-US" sz="2400" dirty="0"/>
+              <a:t>なので気を付けましょう</a:t>
             </a:r>
             <a:endParaRPr kumimoji="1" lang="en-US" altLang="ja-JP" sz="2400" dirty="0"/>
+          </a:p>
+          <a:p>
+            <a:r>
+              <a:rPr lang="en-US" altLang="ja-JP" sz="2400" dirty="0"/>
+              <a:t>※2π</a:t>
+            </a:r>
+            <a:r>
+              <a:rPr lang="ja-JP" altLang="en-US" sz="2400" dirty="0"/>
+              <a:t>は</a:t>
+            </a:r>
+            <a:r>
+              <a:rPr lang="en-US" altLang="ja-JP" sz="2400" b="1" dirty="0">
+                <a:solidFill>
+                  <a:srgbClr val="7030A0"/>
+                </a:solidFill>
+              </a:rPr>
+              <a:t>DX_TWO_PI_F</a:t>
+            </a:r>
+            <a:r>
+              <a:rPr lang="ja-JP" altLang="en-US" sz="2400" dirty="0"/>
+              <a:t>を使えば問題ありません</a:t>
+            </a:r>
+            <a:endParaRPr lang="en-US" altLang="ja-JP" sz="2400" dirty="0"/>
           </a:p>
         </p:txBody>
       </p:sp>
     </p:spTree>
     <p:extLst>
       <p:ext uri="{BB962C8B-B14F-4D97-AF65-F5344CB8AC3E}">
-        <p14:creationId xmlns:p14="http://schemas.microsoft.com/office/powerpoint/2010/main" val="829571349"/>
+        <p14:creationId xmlns:p14="http://schemas.microsoft.com/office/powerpoint/2010/main" val="1920751720"/>
       </p:ext>
     </p:extLst>
   </p:cSld>
@@ -8395,7 +5882,7 @@
         <p:spPr>
           <a:xfrm>
             <a:off x="567542" y="1216429"/>
-            <a:ext cx="8977138" cy="830997"/>
+            <a:ext cx="10376559" cy="830997"/>
           </a:xfrm>
           <a:prstGeom prst="rect">
             <a:avLst/>
@@ -8409,50 +5896,58 @@
           <a:lstStyle/>
           <a:p>
             <a:r>
-              <a:rPr kumimoji="1" lang="en-US" altLang="ja-JP" sz="2400" dirty="0"/>
-              <a:t>Sin</a:t>
-            </a:r>
-            <a:r>
-              <a:rPr kumimoji="1" lang="ja-JP" altLang="en-US" sz="2400" dirty="0"/>
-              <a:t>波は与える角度を増やしていくにつれて波の形になります。</a:t>
-            </a:r>
-            <a:endParaRPr kumimoji="1" lang="en-US" altLang="ja-JP" sz="2400" dirty="0"/>
-          </a:p>
-          <a:p>
-            <a:r>
-              <a:rPr lang="ja-JP" altLang="en-US" sz="2400" dirty="0"/>
-              <a:t>つまり</a:t>
-            </a:r>
-            <a:r>
-              <a:rPr lang="en-US" altLang="ja-JP" sz="2400" b="1" dirty="0" err="1">
+              <a:rPr kumimoji="1" lang="en-US" altLang="ja-JP" sz="2400" b="1" dirty="0" err="1">
                 <a:solidFill>
-                  <a:srgbClr val="FF0000"/>
+                  <a:srgbClr val="0070C0"/>
                 </a:solidFill>
               </a:rPr>
               <a:t>sinf</a:t>
             </a:r>
             <a:r>
-              <a:rPr lang="ja-JP" altLang="en-US" sz="2400" b="1" dirty="0">
+              <a:rPr kumimoji="1" lang="ja-JP" altLang="en-US" sz="2400" b="1" dirty="0">
                 <a:solidFill>
-                  <a:srgbClr val="FF0000"/>
+                  <a:srgbClr val="0070C0"/>
                 </a:solidFill>
               </a:rPr>
-              <a:t>関数に渡す角度は、常に加算する必要があります。</a:t>
-            </a:r>
-            <a:endParaRPr kumimoji="1" lang="en-US" altLang="ja-JP" sz="2400" b="1" dirty="0">
-              <a:solidFill>
-                <a:srgbClr val="FF0000"/>
-              </a:solidFill>
-            </a:endParaRPr>
-          </a:p>
-        </p:txBody>
-      </p:sp>
-      <p:sp>
-        <p:nvSpPr>
-          <p:cNvPr id="24" name="テキスト ボックス 23">
-            <a:extLst>
-              <a:ext uri="{FF2B5EF4-FFF2-40B4-BE49-F238E27FC236}">
-                <a16:creationId xmlns:a16="http://schemas.microsoft.com/office/drawing/2014/main" id="{1EFAFB10-5F91-461F-AF85-6CDA67881A13}"/>
+              <a:t>関数</a:t>
+            </a:r>
+            <a:r>
+              <a:rPr kumimoji="1" lang="ja-JP" altLang="en-US" sz="2400" dirty="0"/>
+              <a:t>で波の値を取得します。</a:t>
+            </a:r>
+            <a:endParaRPr kumimoji="1" lang="en-US" altLang="ja-JP" sz="2400" dirty="0"/>
+          </a:p>
+          <a:p>
+            <a:r>
+              <a:rPr lang="ja-JP" altLang="en-US" sz="2400" dirty="0"/>
+              <a:t>波の値はー</a:t>
+            </a:r>
+            <a:r>
+              <a:rPr lang="en-US" altLang="ja-JP" sz="2400" dirty="0"/>
+              <a:t>1</a:t>
+            </a:r>
+            <a:r>
+              <a:rPr lang="ja-JP" altLang="en-US" sz="2400" dirty="0"/>
+              <a:t>～</a:t>
+            </a:r>
+            <a:r>
+              <a:rPr lang="en-US" altLang="ja-JP" sz="2400" dirty="0"/>
+              <a:t>1</a:t>
+            </a:r>
+            <a:r>
+              <a:rPr lang="ja-JP" altLang="en-US" sz="2400" dirty="0"/>
+              <a:t>なので、掛け算をして範囲を大きくする必要があります。</a:t>
+            </a:r>
+            <a:endParaRPr lang="en-US" altLang="ja-JP" sz="2400" dirty="0"/>
+          </a:p>
+        </p:txBody>
+      </p:sp>
+      <p:sp>
+        <p:nvSpPr>
+          <p:cNvPr id="7" name="テキスト ボックス 6">
+            <a:extLst>
+              <a:ext uri="{FF2B5EF4-FFF2-40B4-BE49-F238E27FC236}">
+                <a16:creationId xmlns:a16="http://schemas.microsoft.com/office/drawing/2014/main" id="{B115CB8B-64CE-46A3-B718-E8F05BC5C0EE}"/>
               </a:ext>
             </a:extLst>
           </p:cNvPr>
@@ -8461,8 +5956,8 @@
         </p:nvSpPr>
         <p:spPr>
           <a:xfrm>
-            <a:off x="9354873" y="5761529"/>
-            <a:ext cx="1723549" cy="461665"/>
+            <a:off x="567542" y="4762500"/>
+            <a:ext cx="3877985" cy="461665"/>
           </a:xfrm>
           <a:prstGeom prst="rect">
             <a:avLst/>
@@ -8476,1281 +5971,47 @@
           <a:lstStyle/>
           <a:p>
             <a:r>
-              <a:rPr lang="ja-JP" altLang="en-US" sz="2400" b="1" dirty="0">
-                <a:solidFill>
-                  <a:srgbClr val="FF0000"/>
-                </a:solidFill>
-              </a:rPr>
-              <a:t>ここまで②</a:t>
-            </a:r>
-            <a:endParaRPr kumimoji="1" lang="en-US" altLang="ja-JP" sz="2400" dirty="0"/>
-          </a:p>
-        </p:txBody>
-      </p:sp>
-      <p:grpSp>
-        <p:nvGrpSpPr>
-          <p:cNvPr id="25" name="グループ化 24">
-            <a:extLst>
-              <a:ext uri="{FF2B5EF4-FFF2-40B4-BE49-F238E27FC236}">
-                <a16:creationId xmlns:a16="http://schemas.microsoft.com/office/drawing/2014/main" id="{D0770C3B-8D1F-454F-91BC-892B97A37F7A}"/>
-              </a:ext>
-            </a:extLst>
-          </p:cNvPr>
-          <p:cNvGrpSpPr/>
+              <a:rPr kumimoji="1" lang="ja-JP" altLang="en-US" sz="2400" dirty="0"/>
+              <a:t>動作確認してみましょう。</a:t>
+            </a:r>
+            <a:endParaRPr lang="en-US" altLang="ja-JP" sz="2400" dirty="0"/>
+          </a:p>
+        </p:txBody>
+      </p:sp>
+      <p:pic>
+        <p:nvPicPr>
+          <p:cNvPr id="3" name="図 2">
+            <a:extLst>
+              <a:ext uri="{FF2B5EF4-FFF2-40B4-BE49-F238E27FC236}">
+                <a16:creationId xmlns:a16="http://schemas.microsoft.com/office/drawing/2014/main" id="{2BC9260C-13CF-42D5-860E-0D1F5BE10B29}"/>
+              </a:ext>
+            </a:extLst>
+          </p:cNvPr>
+          <p:cNvPicPr>
+            <a:picLocks noChangeAspect="1"/>
+          </p:cNvPicPr>
           <p:nvPr/>
-        </p:nvGrpSpPr>
-        <p:grpSpPr>
+        </p:nvPicPr>
+        <p:blipFill>
+          <a:blip r:embed="rId2"/>
+          <a:stretch>
+            <a:fillRect/>
+          </a:stretch>
+        </p:blipFill>
+        <p:spPr>
           <a:xfrm>
-            <a:off x="567542" y="2190110"/>
-            <a:ext cx="7393117" cy="4175935"/>
-            <a:chOff x="567542" y="1992700"/>
-            <a:chExt cx="6463161" cy="3451460"/>
+            <a:off x="567542" y="2187126"/>
+            <a:ext cx="9625031" cy="2435674"/>
           </a:xfrm>
-        </p:grpSpPr>
-        <p:grpSp>
-          <p:nvGrpSpPr>
-            <p:cNvPr id="26" name="グループ化 25">
-              <a:extLst>
-                <a:ext uri="{FF2B5EF4-FFF2-40B4-BE49-F238E27FC236}">
-                  <a16:creationId xmlns:a16="http://schemas.microsoft.com/office/drawing/2014/main" id="{C2BB5121-74A1-45DF-AE8B-232B4B386304}"/>
-                </a:ext>
-              </a:extLst>
-            </p:cNvPr>
-            <p:cNvGrpSpPr/>
-            <p:nvPr/>
-          </p:nvGrpSpPr>
-          <p:grpSpPr>
-            <a:xfrm>
-              <a:off x="567542" y="1992700"/>
-              <a:ext cx="6463161" cy="3451460"/>
-              <a:chOff x="567542" y="1992700"/>
-              <a:chExt cx="6463161" cy="3451460"/>
-            </a:xfrm>
-          </p:grpSpPr>
-          <p:grpSp>
-            <p:nvGrpSpPr>
-              <p:cNvPr id="28" name="グループ化 27">
-                <a:extLst>
-                  <a:ext uri="{FF2B5EF4-FFF2-40B4-BE49-F238E27FC236}">
-                    <a16:creationId xmlns:a16="http://schemas.microsoft.com/office/drawing/2014/main" id="{F9763802-46F3-4253-B14E-184D6BF516D1}"/>
-                  </a:ext>
-                </a:extLst>
-              </p:cNvPr>
-              <p:cNvGrpSpPr/>
-              <p:nvPr/>
-            </p:nvGrpSpPr>
-            <p:grpSpPr>
-              <a:xfrm>
-                <a:off x="567542" y="1992700"/>
-                <a:ext cx="6463161" cy="3451460"/>
-                <a:chOff x="567542" y="1776378"/>
-                <a:chExt cx="6463161" cy="3451460"/>
-              </a:xfrm>
-            </p:grpSpPr>
-            <p:grpSp>
-              <p:nvGrpSpPr>
-                <p:cNvPr id="32" name="グループ化 31">
-                  <a:extLst>
-                    <a:ext uri="{FF2B5EF4-FFF2-40B4-BE49-F238E27FC236}">
-                      <a16:creationId xmlns:a16="http://schemas.microsoft.com/office/drawing/2014/main" id="{7D719DDF-54AF-415B-8AEF-C74B6529AC83}"/>
-                    </a:ext>
-                  </a:extLst>
-                </p:cNvPr>
-                <p:cNvGrpSpPr/>
-                <p:nvPr/>
-              </p:nvGrpSpPr>
-              <p:grpSpPr>
-                <a:xfrm>
-                  <a:off x="567542" y="1817794"/>
-                  <a:ext cx="6463161" cy="3332526"/>
-                  <a:chOff x="1819779" y="2157566"/>
-                  <a:chExt cx="6463161" cy="3332526"/>
-                </a:xfrm>
-              </p:grpSpPr>
-              <p:cxnSp>
-                <p:nvCxnSpPr>
-                  <p:cNvPr id="37" name="直線コネクタ 36">
-                    <a:extLst>
-                      <a:ext uri="{FF2B5EF4-FFF2-40B4-BE49-F238E27FC236}">
-                        <a16:creationId xmlns:a16="http://schemas.microsoft.com/office/drawing/2014/main" id="{2423855F-CB57-460F-9424-2733335C5062}"/>
-                      </a:ext>
-                    </a:extLst>
-                  </p:cNvPr>
-                  <p:cNvCxnSpPr>
-                    <a:cxnSpLocks/>
-                  </p:cNvCxnSpPr>
-                  <p:nvPr/>
-                </p:nvCxnSpPr>
-                <p:spPr>
-                  <a:xfrm>
-                    <a:off x="2457302" y="2388399"/>
-                    <a:ext cx="5825638" cy="0"/>
-                  </a:xfrm>
-                  <a:prstGeom prst="line">
-                    <a:avLst/>
-                  </a:prstGeom>
-                  <a:ln>
-                    <a:prstDash val="dash"/>
-                  </a:ln>
-                </p:spPr>
-                <p:style>
-                  <a:lnRef idx="1">
-                    <a:schemeClr val="accent1"/>
-                  </a:lnRef>
-                  <a:fillRef idx="0">
-                    <a:schemeClr val="accent1"/>
-                  </a:fillRef>
-                  <a:effectRef idx="0">
-                    <a:schemeClr val="accent1"/>
-                  </a:effectRef>
-                  <a:fontRef idx="minor">
-                    <a:schemeClr val="tx1"/>
-                  </a:fontRef>
-                </p:style>
-              </p:cxnSp>
-              <p:cxnSp>
-                <p:nvCxnSpPr>
-                  <p:cNvPr id="38" name="直線コネクタ 37">
-                    <a:extLst>
-                      <a:ext uri="{FF2B5EF4-FFF2-40B4-BE49-F238E27FC236}">
-                        <a16:creationId xmlns:a16="http://schemas.microsoft.com/office/drawing/2014/main" id="{A608C717-F3DC-458F-94EC-B549270D16A4}"/>
-                      </a:ext>
-                    </a:extLst>
-                  </p:cNvPr>
-                  <p:cNvCxnSpPr>
-                    <a:cxnSpLocks/>
-                  </p:cNvCxnSpPr>
-                  <p:nvPr/>
-                </p:nvCxnSpPr>
-                <p:spPr>
-                  <a:xfrm>
-                    <a:off x="2442062" y="3828579"/>
-                    <a:ext cx="5825638" cy="0"/>
-                  </a:xfrm>
-                  <a:prstGeom prst="line">
-                    <a:avLst/>
-                  </a:prstGeom>
-                </p:spPr>
-                <p:style>
-                  <a:lnRef idx="1">
-                    <a:schemeClr val="accent1"/>
-                  </a:lnRef>
-                  <a:fillRef idx="0">
-                    <a:schemeClr val="accent1"/>
-                  </a:fillRef>
-                  <a:effectRef idx="0">
-                    <a:schemeClr val="accent1"/>
-                  </a:effectRef>
-                  <a:fontRef idx="minor">
-                    <a:schemeClr val="tx1"/>
-                  </a:fontRef>
-                </p:style>
-              </p:cxnSp>
-              <p:cxnSp>
-                <p:nvCxnSpPr>
-                  <p:cNvPr id="39" name="直線コネクタ 38">
-                    <a:extLst>
-                      <a:ext uri="{FF2B5EF4-FFF2-40B4-BE49-F238E27FC236}">
-                        <a16:creationId xmlns:a16="http://schemas.microsoft.com/office/drawing/2014/main" id="{EC15BEF4-87D5-4D12-BAF8-E5D8FFB689F1}"/>
-                      </a:ext>
-                    </a:extLst>
-                  </p:cNvPr>
-                  <p:cNvCxnSpPr>
-                    <a:cxnSpLocks/>
-                  </p:cNvCxnSpPr>
-                  <p:nvPr/>
-                </p:nvCxnSpPr>
-                <p:spPr>
-                  <a:xfrm>
-                    <a:off x="2442062" y="5261139"/>
-                    <a:ext cx="5825638" cy="0"/>
-                  </a:xfrm>
-                  <a:prstGeom prst="line">
-                    <a:avLst/>
-                  </a:prstGeom>
-                  <a:ln>
-                    <a:prstDash val="dash"/>
-                  </a:ln>
-                </p:spPr>
-                <p:style>
-                  <a:lnRef idx="1">
-                    <a:schemeClr val="accent1"/>
-                  </a:lnRef>
-                  <a:fillRef idx="0">
-                    <a:schemeClr val="accent1"/>
-                  </a:fillRef>
-                  <a:effectRef idx="0">
-                    <a:schemeClr val="accent1"/>
-                  </a:effectRef>
-                  <a:fontRef idx="minor">
-                    <a:schemeClr val="tx1"/>
-                  </a:fontRef>
-                </p:style>
-              </p:cxnSp>
-              <mc:AlternateContent xmlns:mc="http://schemas.openxmlformats.org/markup-compatibility/2006" xmlns:a14="http://schemas.microsoft.com/office/drawing/2010/main">
-                <mc:Choice Requires="a14">
-                  <p:sp>
-                    <p:nvSpPr>
-                      <p:cNvPr id="40" name="テキスト ボックス 39">
-                        <a:extLst>
-                          <a:ext uri="{FF2B5EF4-FFF2-40B4-BE49-F238E27FC236}">
-                            <a16:creationId xmlns:a16="http://schemas.microsoft.com/office/drawing/2014/main" id="{A81FCB23-93F7-4526-ABE1-8A811785B61E}"/>
-                          </a:ext>
-                        </a:extLst>
-                      </p:cNvPr>
-                      <p:cNvSpPr txBox="1"/>
-                      <p:nvPr/>
-                    </p:nvSpPr>
-                    <p:spPr>
-                      <a:xfrm>
-                        <a:off x="1934395" y="2157566"/>
-                        <a:ext cx="442749" cy="461665"/>
-                      </a:xfrm>
-                      <a:prstGeom prst="rect">
-                        <a:avLst/>
-                      </a:prstGeom>
-                      <a:noFill/>
-                    </p:spPr>
-                    <p:txBody>
-                      <a:bodyPr wrap="none" rtlCol="0">
-                        <a:spAutoFit/>
-                      </a:bodyPr>
-                      <a:lstStyle/>
-                      <a:p>
-                        <a:pPr/>
-                        <a14:m>
-                          <m:oMathPara xmlns:m="http://schemas.openxmlformats.org/officeDocument/2006/math">
-                            <m:oMathParaPr>
-                              <m:jc m:val="centerGroup"/>
-                            </m:oMathParaPr>
-                            <m:oMath xmlns:m="http://schemas.openxmlformats.org/officeDocument/2006/math">
-                              <m:r>
-                                <a:rPr lang="en-US" altLang="ja-JP" sz="2400" b="0" i="1" smtClean="0">
-                                  <a:latin typeface="Cambria Math" panose="02040503050406030204" pitchFamily="18" charset="0"/>
-                                </a:rPr>
-                                <m:t>1</m:t>
-                              </m:r>
-                            </m:oMath>
-                          </m:oMathPara>
-                        </a14:m>
-                        <a:endParaRPr lang="en-US" altLang="ja-JP" sz="2400" dirty="0"/>
-                      </a:p>
-                    </p:txBody>
-                  </p:sp>
-                </mc:Choice>
-                <mc:Fallback xmlns="">
-                  <p:sp>
-                    <p:nvSpPr>
-                      <p:cNvPr id="51" name="テキスト ボックス 50">
-                        <a:extLst>
-                          <a:ext uri="{FF2B5EF4-FFF2-40B4-BE49-F238E27FC236}">
-                            <a16:creationId xmlns:a16="http://schemas.microsoft.com/office/drawing/2014/main" id="{DC10EF26-F36F-4723-BA61-6DD06E4130FA}"/>
-                          </a:ext>
-                        </a:extLst>
-                      </p:cNvPr>
-                      <p:cNvSpPr txBox="1">
-                        <a:spLocks noRot="1" noChangeAspect="1" noMove="1" noResize="1" noEditPoints="1" noAdjustHandles="1" noChangeArrowheads="1" noChangeShapeType="1" noTextEdit="1"/>
-                      </p:cNvSpPr>
-                      <p:nvPr/>
-                    </p:nvSpPr>
-                    <p:spPr>
-                      <a:xfrm>
-                        <a:off x="1934395" y="2157566"/>
-                        <a:ext cx="442749" cy="461665"/>
-                      </a:xfrm>
-                      <a:prstGeom prst="rect">
-                        <a:avLst/>
-                      </a:prstGeom>
-                      <a:blipFill>
-                        <a:blip r:embed="rId4"/>
-                        <a:stretch>
-                          <a:fillRect/>
-                        </a:stretch>
-                      </a:blipFill>
-                    </p:spPr>
-                    <p:txBody>
-                      <a:bodyPr/>
-                      <a:lstStyle/>
-                      <a:p>
-                        <a:r>
-                          <a:rPr lang="ja-JP" altLang="en-US">
-                            <a:noFill/>
-                          </a:rPr>
-                          <a:t> </a:t>
-                        </a:r>
-                      </a:p>
-                    </p:txBody>
-                  </p:sp>
-                </mc:Fallback>
-              </mc:AlternateContent>
-              <mc:AlternateContent xmlns:mc="http://schemas.openxmlformats.org/markup-compatibility/2006" xmlns:a14="http://schemas.microsoft.com/office/drawing/2010/main">
-                <mc:Choice Requires="a14">
-                  <p:sp>
-                    <p:nvSpPr>
-                      <p:cNvPr id="41" name="テキスト ボックス 40">
-                        <a:extLst>
-                          <a:ext uri="{FF2B5EF4-FFF2-40B4-BE49-F238E27FC236}">
-                            <a16:creationId xmlns:a16="http://schemas.microsoft.com/office/drawing/2014/main" id="{73453E15-C17B-4606-934D-BD59C52F4873}"/>
-                          </a:ext>
-                        </a:extLst>
-                      </p:cNvPr>
-                      <p:cNvSpPr txBox="1"/>
-                      <p:nvPr/>
-                    </p:nvSpPr>
-                    <p:spPr>
-                      <a:xfrm>
-                        <a:off x="1949635" y="3588248"/>
-                        <a:ext cx="442749" cy="461665"/>
-                      </a:xfrm>
-                      <a:prstGeom prst="rect">
-                        <a:avLst/>
-                      </a:prstGeom>
-                      <a:noFill/>
-                    </p:spPr>
-                    <p:txBody>
-                      <a:bodyPr wrap="none" rtlCol="0">
-                        <a:spAutoFit/>
-                      </a:bodyPr>
-                      <a:lstStyle/>
-                      <a:p>
-                        <a:pPr/>
-                        <a14:m>
-                          <m:oMathPara xmlns:m="http://schemas.openxmlformats.org/officeDocument/2006/math">
-                            <m:oMathParaPr>
-                              <m:jc m:val="centerGroup"/>
-                            </m:oMathParaPr>
-                            <m:oMath xmlns:m="http://schemas.openxmlformats.org/officeDocument/2006/math">
-                              <m:r>
-                                <a:rPr lang="en-US" altLang="ja-JP" sz="2400" b="0" i="1" smtClean="0">
-                                  <a:latin typeface="Cambria Math" panose="02040503050406030204" pitchFamily="18" charset="0"/>
-                                </a:rPr>
-                                <m:t>0</m:t>
-                              </m:r>
-                            </m:oMath>
-                          </m:oMathPara>
-                        </a14:m>
-                        <a:endParaRPr lang="en-US" altLang="ja-JP" sz="2400" dirty="0"/>
-                      </a:p>
-                    </p:txBody>
-                  </p:sp>
-                </mc:Choice>
-                <mc:Fallback xmlns="">
-                  <p:sp>
-                    <p:nvSpPr>
-                      <p:cNvPr id="52" name="テキスト ボックス 51">
-                        <a:extLst>
-                          <a:ext uri="{FF2B5EF4-FFF2-40B4-BE49-F238E27FC236}">
-                            <a16:creationId xmlns:a16="http://schemas.microsoft.com/office/drawing/2014/main" id="{AD187D9B-2FA6-4991-B619-3A663D483170}"/>
-                          </a:ext>
-                        </a:extLst>
-                      </p:cNvPr>
-                      <p:cNvSpPr txBox="1">
-                        <a:spLocks noRot="1" noChangeAspect="1" noMove="1" noResize="1" noEditPoints="1" noAdjustHandles="1" noChangeArrowheads="1" noChangeShapeType="1" noTextEdit="1"/>
-                      </p:cNvSpPr>
-                      <p:nvPr/>
-                    </p:nvSpPr>
-                    <p:spPr>
-                      <a:xfrm>
-                        <a:off x="1949635" y="3588248"/>
-                        <a:ext cx="442749" cy="461665"/>
-                      </a:xfrm>
-                      <a:prstGeom prst="rect">
-                        <a:avLst/>
-                      </a:prstGeom>
-                      <a:blipFill>
-                        <a:blip r:embed="rId5"/>
-                        <a:stretch>
-                          <a:fillRect/>
-                        </a:stretch>
-                      </a:blipFill>
-                    </p:spPr>
-                    <p:txBody>
-                      <a:bodyPr/>
-                      <a:lstStyle/>
-                      <a:p>
-                        <a:r>
-                          <a:rPr lang="ja-JP" altLang="en-US">
-                            <a:noFill/>
-                          </a:rPr>
-                          <a:t> </a:t>
-                        </a:r>
-                      </a:p>
-                    </p:txBody>
-                  </p:sp>
-                </mc:Fallback>
-              </mc:AlternateContent>
-              <mc:AlternateContent xmlns:mc="http://schemas.openxmlformats.org/markup-compatibility/2006" xmlns:a14="http://schemas.microsoft.com/office/drawing/2010/main">
-                <mc:Choice Requires="a14">
-                  <p:sp>
-                    <p:nvSpPr>
-                      <p:cNvPr id="42" name="テキスト ボックス 41">
-                        <a:extLst>
-                          <a:ext uri="{FF2B5EF4-FFF2-40B4-BE49-F238E27FC236}">
-                            <a16:creationId xmlns:a16="http://schemas.microsoft.com/office/drawing/2014/main" id="{F46756D2-42C8-4287-9541-7B80439D2268}"/>
-                          </a:ext>
-                        </a:extLst>
-                      </p:cNvPr>
-                      <p:cNvSpPr txBox="1"/>
-                      <p:nvPr/>
-                    </p:nvSpPr>
-                    <p:spPr>
-                      <a:xfrm>
-                        <a:off x="1819779" y="5028427"/>
-                        <a:ext cx="671979" cy="461665"/>
-                      </a:xfrm>
-                      <a:prstGeom prst="rect">
-                        <a:avLst/>
-                      </a:prstGeom>
-                      <a:noFill/>
-                    </p:spPr>
-                    <p:txBody>
-                      <a:bodyPr wrap="none" rtlCol="0">
-                        <a:spAutoFit/>
-                      </a:bodyPr>
-                      <a:lstStyle/>
-                      <a:p>
-                        <a:pPr/>
-                        <a14:m>
-                          <m:oMathPara xmlns:m="http://schemas.openxmlformats.org/officeDocument/2006/math">
-                            <m:oMathParaPr>
-                              <m:jc m:val="centerGroup"/>
-                            </m:oMathParaPr>
-                            <m:oMath xmlns:m="http://schemas.openxmlformats.org/officeDocument/2006/math">
-                              <m:r>
-                                <a:rPr lang="en-US" altLang="ja-JP" sz="2400" b="0" i="1" smtClean="0">
-                                  <a:latin typeface="Cambria Math" panose="02040503050406030204" pitchFamily="18" charset="0"/>
-                                </a:rPr>
-                                <m:t>−1</m:t>
-                              </m:r>
-                            </m:oMath>
-                          </m:oMathPara>
-                        </a14:m>
-                        <a:endParaRPr lang="en-US" altLang="ja-JP" sz="2400" dirty="0"/>
-                      </a:p>
-                    </p:txBody>
-                  </p:sp>
-                </mc:Choice>
-                <mc:Fallback xmlns="">
-                  <p:sp>
-                    <p:nvSpPr>
-                      <p:cNvPr id="53" name="テキスト ボックス 52">
-                        <a:extLst>
-                          <a:ext uri="{FF2B5EF4-FFF2-40B4-BE49-F238E27FC236}">
-                            <a16:creationId xmlns:a16="http://schemas.microsoft.com/office/drawing/2014/main" id="{6C282D98-FF53-4FEE-9454-88E2AE67A2F5}"/>
-                          </a:ext>
-                        </a:extLst>
-                      </p:cNvPr>
-                      <p:cNvSpPr txBox="1">
-                        <a:spLocks noRot="1" noChangeAspect="1" noMove="1" noResize="1" noEditPoints="1" noAdjustHandles="1" noChangeArrowheads="1" noChangeShapeType="1" noTextEdit="1"/>
-                      </p:cNvSpPr>
-                      <p:nvPr/>
-                    </p:nvSpPr>
-                    <p:spPr>
-                      <a:xfrm>
-                        <a:off x="1819779" y="5028427"/>
-                        <a:ext cx="671979" cy="461665"/>
-                      </a:xfrm>
-                      <a:prstGeom prst="rect">
-                        <a:avLst/>
-                      </a:prstGeom>
-                      <a:blipFill>
-                        <a:blip r:embed="rId6"/>
-                        <a:stretch>
-                          <a:fillRect/>
-                        </a:stretch>
-                      </a:blipFill>
-                    </p:spPr>
-                    <p:txBody>
-                      <a:bodyPr/>
-                      <a:lstStyle/>
-                      <a:p>
-                        <a:r>
-                          <a:rPr lang="ja-JP" altLang="en-US">
-                            <a:noFill/>
-                          </a:rPr>
-                          <a:t> </a:t>
-                        </a:r>
-                      </a:p>
-                    </p:txBody>
-                  </p:sp>
-                </mc:Fallback>
-              </mc:AlternateContent>
-            </p:grpSp>
-            <mc:AlternateContent xmlns:mc="http://schemas.openxmlformats.org/markup-compatibility/2006" xmlns:a14="http://schemas.microsoft.com/office/drawing/2010/main">
-              <mc:Choice Requires="a14">
-                <p:sp>
-                  <p:nvSpPr>
-                    <p:cNvPr id="33" name="テキスト ボックス 32">
-                      <a:extLst>
-                        <a:ext uri="{FF2B5EF4-FFF2-40B4-BE49-F238E27FC236}">
-                          <a16:creationId xmlns:a16="http://schemas.microsoft.com/office/drawing/2014/main" id="{6B826E13-0A51-4323-9595-9235518AE2ED}"/>
-                        </a:ext>
-                      </a:extLst>
-                    </p:cNvPr>
-                    <p:cNvSpPr txBox="1"/>
-                    <p:nvPr/>
-                  </p:nvSpPr>
-                  <p:spPr>
-                    <a:xfrm>
-                      <a:off x="1879426" y="3474036"/>
-                      <a:ext cx="862737" cy="338554"/>
-                    </a:xfrm>
-                    <a:prstGeom prst="rect">
-                      <a:avLst/>
-                    </a:prstGeom>
-                    <a:noFill/>
-                  </p:spPr>
-                  <p:txBody>
-                    <a:bodyPr wrap="none" rtlCol="0">
-                      <a:spAutoFit/>
-                    </a:bodyPr>
-                    <a:lstStyle/>
-                    <a:p>
-                      <a:pPr/>
-                      <a14:m>
-                        <m:oMathPara xmlns:m="http://schemas.openxmlformats.org/officeDocument/2006/math">
-                          <m:oMathParaPr>
-                            <m:jc m:val="centerGroup"/>
-                          </m:oMathParaPr>
-                          <m:oMath xmlns:m="http://schemas.openxmlformats.org/officeDocument/2006/math">
-                            <m:r>
-                              <a:rPr lang="en-US" altLang="ja-JP" sz="1600" b="0" i="1" smtClean="0">
-                                <a:latin typeface="Cambria Math" panose="02040503050406030204" pitchFamily="18" charset="0"/>
-                              </a:rPr>
-                              <m:t>𝑠𝑖𝑛</m:t>
-                            </m:r>
-                            <m:r>
-                              <a:rPr lang="en-US" altLang="ja-JP" sz="1600" i="1">
-                                <a:latin typeface="Cambria Math" panose="02040503050406030204" pitchFamily="18" charset="0"/>
-                              </a:rPr>
-                              <m:t>180</m:t>
-                            </m:r>
-                          </m:oMath>
-                        </m:oMathPara>
-                      </a14:m>
-                      <a:endParaRPr lang="en-US" altLang="ja-JP" sz="1600" dirty="0"/>
-                    </a:p>
-                  </p:txBody>
-                </p:sp>
-              </mc:Choice>
-              <mc:Fallback xmlns="">
-                <p:sp>
-                  <p:nvSpPr>
-                    <p:cNvPr id="55" name="テキスト ボックス 54">
-                      <a:extLst>
-                        <a:ext uri="{FF2B5EF4-FFF2-40B4-BE49-F238E27FC236}">
-                          <a16:creationId xmlns:a16="http://schemas.microsoft.com/office/drawing/2014/main" id="{D435A0B8-73C6-48C9-AE37-C2992EFF70BB}"/>
-                        </a:ext>
-                      </a:extLst>
-                    </p:cNvPr>
-                    <p:cNvSpPr txBox="1">
-                      <a:spLocks noRot="1" noChangeAspect="1" noMove="1" noResize="1" noEditPoints="1" noAdjustHandles="1" noChangeArrowheads="1" noChangeShapeType="1" noTextEdit="1"/>
-                    </p:cNvSpPr>
-                    <p:nvPr/>
-                  </p:nvSpPr>
-                  <p:spPr>
-                    <a:xfrm>
-                      <a:off x="1879426" y="3474036"/>
-                      <a:ext cx="862737" cy="338554"/>
-                    </a:xfrm>
-                    <a:prstGeom prst="rect">
-                      <a:avLst/>
-                    </a:prstGeom>
-                    <a:blipFill>
-                      <a:blip r:embed="rId7"/>
-                      <a:stretch>
-                        <a:fillRect/>
-                      </a:stretch>
-                    </a:blipFill>
-                  </p:spPr>
-                  <p:txBody>
-                    <a:bodyPr/>
-                    <a:lstStyle/>
-                    <a:p>
-                      <a:r>
-                        <a:rPr lang="ja-JP" altLang="en-US">
-                          <a:noFill/>
-                        </a:rPr>
-                        <a:t> </a:t>
-                      </a:r>
-                    </a:p>
-                  </p:txBody>
-                </p:sp>
-              </mc:Fallback>
-            </mc:AlternateContent>
-            <mc:AlternateContent xmlns:mc="http://schemas.openxmlformats.org/markup-compatibility/2006" xmlns:a14="http://schemas.microsoft.com/office/drawing/2010/main">
-              <mc:Choice Requires="a14">
-                <p:sp>
-                  <p:nvSpPr>
-                    <p:cNvPr id="34" name="テキスト ボックス 33">
-                      <a:extLst>
-                        <a:ext uri="{FF2B5EF4-FFF2-40B4-BE49-F238E27FC236}">
-                          <a16:creationId xmlns:a16="http://schemas.microsoft.com/office/drawing/2014/main" id="{D4347C55-6EBA-4D96-954D-21FF5D8ED612}"/>
-                        </a:ext>
-                      </a:extLst>
-                    </p:cNvPr>
-                    <p:cNvSpPr txBox="1"/>
-                    <p:nvPr/>
-                  </p:nvSpPr>
-                  <p:spPr>
-                    <a:xfrm>
-                      <a:off x="3255147" y="3474036"/>
-                      <a:ext cx="862737" cy="338554"/>
-                    </a:xfrm>
-                    <a:prstGeom prst="rect">
-                      <a:avLst/>
-                    </a:prstGeom>
-                    <a:noFill/>
-                  </p:spPr>
-                  <p:txBody>
-                    <a:bodyPr wrap="none" rtlCol="0">
-                      <a:spAutoFit/>
-                    </a:bodyPr>
-                    <a:lstStyle/>
-                    <a:p>
-                      <a:pPr/>
-                      <a14:m>
-                        <m:oMathPara xmlns:m="http://schemas.openxmlformats.org/officeDocument/2006/math">
-                          <m:oMathParaPr>
-                            <m:jc m:val="centerGroup"/>
-                          </m:oMathParaPr>
-                          <m:oMath xmlns:m="http://schemas.openxmlformats.org/officeDocument/2006/math">
-                            <m:r>
-                              <a:rPr lang="en-US" altLang="ja-JP" sz="1600" b="0" i="1" smtClean="0">
-                                <a:latin typeface="Cambria Math" panose="02040503050406030204" pitchFamily="18" charset="0"/>
-                              </a:rPr>
-                              <m:t>𝑠𝑖𝑛</m:t>
-                            </m:r>
-                            <m:r>
-                              <a:rPr lang="en-US" altLang="ja-JP" sz="1600" i="1">
-                                <a:latin typeface="Cambria Math" panose="02040503050406030204" pitchFamily="18" charset="0"/>
-                              </a:rPr>
-                              <m:t>360</m:t>
-                            </m:r>
-                          </m:oMath>
-                        </m:oMathPara>
-                      </a14:m>
-                      <a:endParaRPr lang="en-US" altLang="ja-JP" sz="1600" dirty="0"/>
-                    </a:p>
-                  </p:txBody>
-                </p:sp>
-              </mc:Choice>
-              <mc:Fallback xmlns="">
-                <p:sp>
-                  <p:nvSpPr>
-                    <p:cNvPr id="56" name="テキスト ボックス 55">
-                      <a:extLst>
-                        <a:ext uri="{FF2B5EF4-FFF2-40B4-BE49-F238E27FC236}">
-                          <a16:creationId xmlns:a16="http://schemas.microsoft.com/office/drawing/2014/main" id="{F80DF57B-C729-440A-942A-EB1763F28B84}"/>
-                        </a:ext>
-                      </a:extLst>
-                    </p:cNvPr>
-                    <p:cNvSpPr txBox="1">
-                      <a:spLocks noRot="1" noChangeAspect="1" noMove="1" noResize="1" noEditPoints="1" noAdjustHandles="1" noChangeArrowheads="1" noChangeShapeType="1" noTextEdit="1"/>
-                    </p:cNvSpPr>
-                    <p:nvPr/>
-                  </p:nvSpPr>
-                  <p:spPr>
-                    <a:xfrm>
-                      <a:off x="3255147" y="3474036"/>
-                      <a:ext cx="862737" cy="338554"/>
-                    </a:xfrm>
-                    <a:prstGeom prst="rect">
-                      <a:avLst/>
-                    </a:prstGeom>
-                    <a:blipFill>
-                      <a:blip r:embed="rId8"/>
-                      <a:stretch>
-                        <a:fillRect/>
-                      </a:stretch>
-                    </a:blipFill>
-                  </p:spPr>
-                  <p:txBody>
-                    <a:bodyPr/>
-                    <a:lstStyle/>
-                    <a:p>
-                      <a:r>
-                        <a:rPr lang="ja-JP" altLang="en-US">
-                          <a:noFill/>
-                        </a:rPr>
-                        <a:t> </a:t>
-                      </a:r>
-                    </a:p>
-                  </p:txBody>
-                </p:sp>
-              </mc:Fallback>
-            </mc:AlternateContent>
-            <mc:AlternateContent xmlns:mc="http://schemas.openxmlformats.org/markup-compatibility/2006" xmlns:a14="http://schemas.microsoft.com/office/drawing/2010/main">
-              <mc:Choice Requires="a14">
-                <p:sp>
-                  <p:nvSpPr>
-                    <p:cNvPr id="35" name="テキスト ボックス 34">
-                      <a:extLst>
-                        <a:ext uri="{FF2B5EF4-FFF2-40B4-BE49-F238E27FC236}">
-                          <a16:creationId xmlns:a16="http://schemas.microsoft.com/office/drawing/2014/main" id="{B6E8AF16-3FF0-4330-B0B7-7C477DE507D9}"/>
-                        </a:ext>
-                      </a:extLst>
-                    </p:cNvPr>
-                    <p:cNvSpPr txBox="1"/>
-                    <p:nvPr/>
-                  </p:nvSpPr>
-                  <p:spPr>
-                    <a:xfrm>
-                      <a:off x="1239521" y="1776378"/>
-                      <a:ext cx="748923" cy="338554"/>
-                    </a:xfrm>
-                    <a:prstGeom prst="rect">
-                      <a:avLst/>
-                    </a:prstGeom>
-                    <a:noFill/>
-                  </p:spPr>
-                  <p:txBody>
-                    <a:bodyPr wrap="none" rtlCol="0">
-                      <a:spAutoFit/>
-                    </a:bodyPr>
-                    <a:lstStyle/>
-                    <a:p>
-                      <a:pPr/>
-                      <a14:m>
-                        <m:oMathPara xmlns:m="http://schemas.openxmlformats.org/officeDocument/2006/math">
-                          <m:oMathParaPr>
-                            <m:jc m:val="centerGroup"/>
-                          </m:oMathParaPr>
-                          <m:oMath xmlns:m="http://schemas.openxmlformats.org/officeDocument/2006/math">
-                            <m:r>
-                              <a:rPr lang="en-US" altLang="ja-JP" sz="1600" b="0" i="1" smtClean="0">
-                                <a:latin typeface="Cambria Math" panose="02040503050406030204" pitchFamily="18" charset="0"/>
-                              </a:rPr>
-                              <m:t>𝑠𝑖𝑛</m:t>
-                            </m:r>
-                            <m:r>
-                              <a:rPr lang="en-US" altLang="ja-JP" sz="1600" i="1">
-                                <a:latin typeface="Cambria Math" panose="02040503050406030204" pitchFamily="18" charset="0"/>
-                              </a:rPr>
-                              <m:t>90</m:t>
-                            </m:r>
-                          </m:oMath>
-                        </m:oMathPara>
-                      </a14:m>
-                      <a:endParaRPr lang="en-US" altLang="ja-JP" sz="1600" dirty="0"/>
-                    </a:p>
-                  </p:txBody>
-                </p:sp>
-              </mc:Choice>
-              <mc:Fallback xmlns="">
-                <p:sp>
-                  <p:nvSpPr>
-                    <p:cNvPr id="59" name="テキスト ボックス 58">
-                      <a:extLst>
-                        <a:ext uri="{FF2B5EF4-FFF2-40B4-BE49-F238E27FC236}">
-                          <a16:creationId xmlns:a16="http://schemas.microsoft.com/office/drawing/2014/main" id="{33793090-82A7-4AEC-97F1-5ACA14395880}"/>
-                        </a:ext>
-                      </a:extLst>
-                    </p:cNvPr>
-                    <p:cNvSpPr txBox="1">
-                      <a:spLocks noRot="1" noChangeAspect="1" noMove="1" noResize="1" noEditPoints="1" noAdjustHandles="1" noChangeArrowheads="1" noChangeShapeType="1" noTextEdit="1"/>
-                    </p:cNvSpPr>
-                    <p:nvPr/>
-                  </p:nvSpPr>
-                  <p:spPr>
-                    <a:xfrm>
-                      <a:off x="1239521" y="1776378"/>
-                      <a:ext cx="748923" cy="338554"/>
-                    </a:xfrm>
-                    <a:prstGeom prst="rect">
-                      <a:avLst/>
-                    </a:prstGeom>
-                    <a:blipFill>
-                      <a:blip r:embed="rId9"/>
-                      <a:stretch>
-                        <a:fillRect/>
-                      </a:stretch>
-                    </a:blipFill>
-                  </p:spPr>
-                  <p:txBody>
-                    <a:bodyPr/>
-                    <a:lstStyle/>
-                    <a:p>
-                      <a:r>
-                        <a:rPr lang="ja-JP" altLang="en-US">
-                          <a:noFill/>
-                        </a:rPr>
-                        <a:t> </a:t>
-                      </a:r>
-                    </a:p>
-                  </p:txBody>
-                </p:sp>
-              </mc:Fallback>
-            </mc:AlternateContent>
-            <mc:AlternateContent xmlns:mc="http://schemas.openxmlformats.org/markup-compatibility/2006" xmlns:a14="http://schemas.microsoft.com/office/drawing/2010/main">
-              <mc:Choice Requires="a14">
-                <p:sp>
-                  <p:nvSpPr>
-                    <p:cNvPr id="36" name="テキスト ボックス 35">
-                      <a:extLst>
-                        <a:ext uri="{FF2B5EF4-FFF2-40B4-BE49-F238E27FC236}">
-                          <a16:creationId xmlns:a16="http://schemas.microsoft.com/office/drawing/2014/main" id="{EDA3B77D-2614-43EE-9B6D-62E4AFA1D92A}"/>
-                        </a:ext>
-                      </a:extLst>
-                    </p:cNvPr>
-                    <p:cNvSpPr txBox="1"/>
-                    <p:nvPr/>
-                  </p:nvSpPr>
-                  <p:spPr>
-                    <a:xfrm>
-                      <a:off x="2613670" y="4889284"/>
-                      <a:ext cx="862737" cy="338554"/>
-                    </a:xfrm>
-                    <a:prstGeom prst="rect">
-                      <a:avLst/>
-                    </a:prstGeom>
-                    <a:noFill/>
-                  </p:spPr>
-                  <p:txBody>
-                    <a:bodyPr wrap="none" rtlCol="0">
-                      <a:spAutoFit/>
-                    </a:bodyPr>
-                    <a:lstStyle/>
-                    <a:p>
-                      <a:pPr/>
-                      <a14:m>
-                        <m:oMathPara xmlns:m="http://schemas.openxmlformats.org/officeDocument/2006/math">
-                          <m:oMathParaPr>
-                            <m:jc m:val="centerGroup"/>
-                          </m:oMathParaPr>
-                          <m:oMath xmlns:m="http://schemas.openxmlformats.org/officeDocument/2006/math">
-                            <m:r>
-                              <a:rPr lang="en-US" altLang="ja-JP" sz="1600" b="0" i="1" smtClean="0">
-                                <a:latin typeface="Cambria Math" panose="02040503050406030204" pitchFamily="18" charset="0"/>
-                              </a:rPr>
-                              <m:t>𝑠𝑖𝑛</m:t>
-                            </m:r>
-                            <m:r>
-                              <a:rPr lang="en-US" altLang="ja-JP" sz="1600" i="1">
-                                <a:latin typeface="Cambria Math" panose="02040503050406030204" pitchFamily="18" charset="0"/>
-                              </a:rPr>
-                              <m:t>270</m:t>
-                            </m:r>
-                          </m:oMath>
-                        </m:oMathPara>
-                      </a14:m>
-                      <a:endParaRPr lang="en-US" altLang="ja-JP" sz="1600" dirty="0"/>
-                    </a:p>
-                  </p:txBody>
-                </p:sp>
-              </mc:Choice>
-              <mc:Fallback xmlns="">
-                <p:sp>
-                  <p:nvSpPr>
-                    <p:cNvPr id="60" name="テキスト ボックス 59">
-                      <a:extLst>
-                        <a:ext uri="{FF2B5EF4-FFF2-40B4-BE49-F238E27FC236}">
-                          <a16:creationId xmlns:a16="http://schemas.microsoft.com/office/drawing/2014/main" id="{25D68D67-6AF6-4589-9860-5217804110D2}"/>
-                        </a:ext>
-                      </a:extLst>
-                    </p:cNvPr>
-                    <p:cNvSpPr txBox="1">
-                      <a:spLocks noRot="1" noChangeAspect="1" noMove="1" noResize="1" noEditPoints="1" noAdjustHandles="1" noChangeArrowheads="1" noChangeShapeType="1" noTextEdit="1"/>
-                    </p:cNvSpPr>
-                    <p:nvPr/>
-                  </p:nvSpPr>
-                  <p:spPr>
-                    <a:xfrm>
-                      <a:off x="2613670" y="4889284"/>
-                      <a:ext cx="862737" cy="338554"/>
-                    </a:xfrm>
-                    <a:prstGeom prst="rect">
-                      <a:avLst/>
-                    </a:prstGeom>
-                    <a:blipFill>
-                      <a:blip r:embed="rId10"/>
-                      <a:stretch>
-                        <a:fillRect/>
-                      </a:stretch>
-                    </a:blipFill>
-                  </p:spPr>
-                  <p:txBody>
-                    <a:bodyPr/>
-                    <a:lstStyle/>
-                    <a:p>
-                      <a:r>
-                        <a:rPr lang="ja-JP" altLang="en-US">
-                          <a:noFill/>
-                        </a:rPr>
-                        <a:t> </a:t>
-                      </a:r>
-                    </a:p>
-                  </p:txBody>
-                </p:sp>
-              </mc:Fallback>
-            </mc:AlternateContent>
-          </p:grpSp>
-          <p:sp>
-            <p:nvSpPr>
-              <p:cNvPr id="29" name="フリーフォーム: 図形 28">
-                <a:extLst>
-                  <a:ext uri="{FF2B5EF4-FFF2-40B4-BE49-F238E27FC236}">
-                    <a16:creationId xmlns:a16="http://schemas.microsoft.com/office/drawing/2014/main" id="{47E852FC-0FD2-435B-BF07-AD3DEE80DCCD}"/>
-                  </a:ext>
-                </a:extLst>
-              </p:cNvPr>
-              <p:cNvSpPr/>
-              <p:nvPr/>
-            </p:nvSpPr>
-            <p:spPr>
-              <a:xfrm>
-                <a:off x="1196340" y="2263139"/>
-                <a:ext cx="1447800" cy="1440181"/>
-              </a:xfrm>
-              <a:custGeom>
-                <a:avLst/>
-                <a:gdLst>
-                  <a:gd name="connsiteX0" fmla="*/ 0 w 1447800"/>
-                  <a:gd name="connsiteY0" fmla="*/ 1432561 h 1440181"/>
-                  <a:gd name="connsiteX1" fmla="*/ 762000 w 1447800"/>
-                  <a:gd name="connsiteY1" fmla="*/ 1 h 1440181"/>
-                  <a:gd name="connsiteX2" fmla="*/ 1447800 w 1447800"/>
-                  <a:gd name="connsiteY2" fmla="*/ 1440181 h 1440181"/>
-                </a:gdLst>
-                <a:ahLst/>
-                <a:cxnLst>
-                  <a:cxn ang="0">
-                    <a:pos x="connsiteX0" y="connsiteY0"/>
-                  </a:cxn>
-                  <a:cxn ang="0">
-                    <a:pos x="connsiteX1" y="connsiteY1"/>
-                  </a:cxn>
-                  <a:cxn ang="0">
-                    <a:pos x="connsiteX2" y="connsiteY2"/>
-                  </a:cxn>
-                </a:cxnLst>
-                <a:rect l="l" t="t" r="r" b="b"/>
-                <a:pathLst>
-                  <a:path w="1447800" h="1440181">
-                    <a:moveTo>
-                      <a:pt x="0" y="1432561"/>
-                    </a:moveTo>
-                    <a:cubicBezTo>
-                      <a:pt x="260350" y="715646"/>
-                      <a:pt x="520700" y="-1269"/>
-                      <a:pt x="762000" y="1"/>
-                    </a:cubicBezTo>
-                    <a:cubicBezTo>
-                      <a:pt x="1003300" y="1271"/>
-                      <a:pt x="1225550" y="720726"/>
-                      <a:pt x="1447800" y="1440181"/>
-                    </a:cubicBezTo>
-                  </a:path>
-                </a:pathLst>
-              </a:custGeom>
-              <a:noFill/>
-              <a:ln>
-                <a:solidFill>
-                  <a:srgbClr val="FF0000"/>
-                </a:solidFill>
-              </a:ln>
-            </p:spPr>
-            <p:style>
-              <a:lnRef idx="2">
-                <a:schemeClr val="accent1">
-                  <a:shade val="50000"/>
-                </a:schemeClr>
-              </a:lnRef>
-              <a:fillRef idx="1">
-                <a:schemeClr val="accent1"/>
-              </a:fillRef>
-              <a:effectRef idx="0">
-                <a:schemeClr val="accent1"/>
-              </a:effectRef>
-              <a:fontRef idx="minor">
-                <a:schemeClr val="lt1"/>
-              </a:fontRef>
-            </p:style>
-            <p:txBody>
-              <a:bodyPr rtlCol="0" anchor="ctr"/>
-              <a:lstStyle/>
-              <a:p>
-                <a:pPr algn="ctr"/>
-                <a:endParaRPr kumimoji="1" lang="ja-JP" altLang="en-US"/>
-              </a:p>
-            </p:txBody>
-          </p:sp>
-          <p:sp>
-            <p:nvSpPr>
-              <p:cNvPr id="30" name="フリーフォーム: 図形 29">
-                <a:extLst>
-                  <a:ext uri="{FF2B5EF4-FFF2-40B4-BE49-F238E27FC236}">
-                    <a16:creationId xmlns:a16="http://schemas.microsoft.com/office/drawing/2014/main" id="{0005DFA8-B5EA-4965-9C39-8CB888183710}"/>
-                  </a:ext>
-                </a:extLst>
-              </p:cNvPr>
-              <p:cNvSpPr/>
-              <p:nvPr/>
-            </p:nvSpPr>
-            <p:spPr>
-              <a:xfrm rot="10800000">
-                <a:off x="2641759" y="3696706"/>
-                <a:ext cx="1447800" cy="1440181"/>
-              </a:xfrm>
-              <a:custGeom>
-                <a:avLst/>
-                <a:gdLst>
-                  <a:gd name="connsiteX0" fmla="*/ 0 w 1447800"/>
-                  <a:gd name="connsiteY0" fmla="*/ 1432561 h 1440181"/>
-                  <a:gd name="connsiteX1" fmla="*/ 762000 w 1447800"/>
-                  <a:gd name="connsiteY1" fmla="*/ 1 h 1440181"/>
-                  <a:gd name="connsiteX2" fmla="*/ 1447800 w 1447800"/>
-                  <a:gd name="connsiteY2" fmla="*/ 1440181 h 1440181"/>
-                </a:gdLst>
-                <a:ahLst/>
-                <a:cxnLst>
-                  <a:cxn ang="0">
-                    <a:pos x="connsiteX0" y="connsiteY0"/>
-                  </a:cxn>
-                  <a:cxn ang="0">
-                    <a:pos x="connsiteX1" y="connsiteY1"/>
-                  </a:cxn>
-                  <a:cxn ang="0">
-                    <a:pos x="connsiteX2" y="connsiteY2"/>
-                  </a:cxn>
-                </a:cxnLst>
-                <a:rect l="l" t="t" r="r" b="b"/>
-                <a:pathLst>
-                  <a:path w="1447800" h="1440181">
-                    <a:moveTo>
-                      <a:pt x="0" y="1432561"/>
-                    </a:moveTo>
-                    <a:cubicBezTo>
-                      <a:pt x="260350" y="715646"/>
-                      <a:pt x="520700" y="-1269"/>
-                      <a:pt x="762000" y="1"/>
-                    </a:cubicBezTo>
-                    <a:cubicBezTo>
-                      <a:pt x="1003300" y="1271"/>
-                      <a:pt x="1225550" y="720726"/>
-                      <a:pt x="1447800" y="1440181"/>
-                    </a:cubicBezTo>
-                  </a:path>
-                </a:pathLst>
-              </a:custGeom>
-              <a:noFill/>
-              <a:ln>
-                <a:solidFill>
-                  <a:srgbClr val="FF0000"/>
-                </a:solidFill>
-              </a:ln>
-            </p:spPr>
-            <p:style>
-              <a:lnRef idx="2">
-                <a:schemeClr val="accent1">
-                  <a:shade val="50000"/>
-                </a:schemeClr>
-              </a:lnRef>
-              <a:fillRef idx="1">
-                <a:schemeClr val="accent1"/>
-              </a:fillRef>
-              <a:effectRef idx="0">
-                <a:schemeClr val="accent1"/>
-              </a:effectRef>
-              <a:fontRef idx="minor">
-                <a:schemeClr val="lt1"/>
-              </a:fontRef>
-            </p:style>
-            <p:txBody>
-              <a:bodyPr rtlCol="0" anchor="ctr"/>
-              <a:lstStyle/>
-              <a:p>
-                <a:pPr algn="ctr"/>
-                <a:endParaRPr kumimoji="1" lang="ja-JP" altLang="en-US"/>
-              </a:p>
-            </p:txBody>
-          </p:sp>
-          <p:sp>
-            <p:nvSpPr>
-              <p:cNvPr id="31" name="フリーフォーム: 図形 30">
-                <a:extLst>
-                  <a:ext uri="{FF2B5EF4-FFF2-40B4-BE49-F238E27FC236}">
-                    <a16:creationId xmlns:a16="http://schemas.microsoft.com/office/drawing/2014/main" id="{A42321A1-2BE6-4CF5-B70F-0283B51DB399}"/>
-                  </a:ext>
-                </a:extLst>
-              </p:cNvPr>
-              <p:cNvSpPr/>
-              <p:nvPr/>
-            </p:nvSpPr>
-            <p:spPr>
-              <a:xfrm>
-                <a:off x="4090036" y="2269991"/>
-                <a:ext cx="1447800" cy="1440181"/>
-              </a:xfrm>
-              <a:custGeom>
-                <a:avLst/>
-                <a:gdLst>
-                  <a:gd name="connsiteX0" fmla="*/ 0 w 1447800"/>
-                  <a:gd name="connsiteY0" fmla="*/ 1432561 h 1440181"/>
-                  <a:gd name="connsiteX1" fmla="*/ 762000 w 1447800"/>
-                  <a:gd name="connsiteY1" fmla="*/ 1 h 1440181"/>
-                  <a:gd name="connsiteX2" fmla="*/ 1447800 w 1447800"/>
-                  <a:gd name="connsiteY2" fmla="*/ 1440181 h 1440181"/>
-                </a:gdLst>
-                <a:ahLst/>
-                <a:cxnLst>
-                  <a:cxn ang="0">
-                    <a:pos x="connsiteX0" y="connsiteY0"/>
-                  </a:cxn>
-                  <a:cxn ang="0">
-                    <a:pos x="connsiteX1" y="connsiteY1"/>
-                  </a:cxn>
-                  <a:cxn ang="0">
-                    <a:pos x="connsiteX2" y="connsiteY2"/>
-                  </a:cxn>
-                </a:cxnLst>
-                <a:rect l="l" t="t" r="r" b="b"/>
-                <a:pathLst>
-                  <a:path w="1447800" h="1440181">
-                    <a:moveTo>
-                      <a:pt x="0" y="1432561"/>
-                    </a:moveTo>
-                    <a:cubicBezTo>
-                      <a:pt x="260350" y="715646"/>
-                      <a:pt x="520700" y="-1269"/>
-                      <a:pt x="762000" y="1"/>
-                    </a:cubicBezTo>
-                    <a:cubicBezTo>
-                      <a:pt x="1003300" y="1271"/>
-                      <a:pt x="1225550" y="720726"/>
-                      <a:pt x="1447800" y="1440181"/>
-                    </a:cubicBezTo>
-                  </a:path>
-                </a:pathLst>
-              </a:custGeom>
-              <a:noFill/>
-              <a:ln>
-                <a:solidFill>
-                  <a:srgbClr val="FF0000"/>
-                </a:solidFill>
-              </a:ln>
-            </p:spPr>
-            <p:style>
-              <a:lnRef idx="2">
-                <a:schemeClr val="accent1">
-                  <a:shade val="50000"/>
-                </a:schemeClr>
-              </a:lnRef>
-              <a:fillRef idx="1">
-                <a:schemeClr val="accent1"/>
-              </a:fillRef>
-              <a:effectRef idx="0">
-                <a:schemeClr val="accent1"/>
-              </a:effectRef>
-              <a:fontRef idx="minor">
-                <a:schemeClr val="lt1"/>
-              </a:fontRef>
-            </p:style>
-            <p:txBody>
-              <a:bodyPr rtlCol="0" anchor="ctr"/>
-              <a:lstStyle/>
-              <a:p>
-                <a:pPr algn="ctr"/>
-                <a:endParaRPr kumimoji="1" lang="ja-JP" altLang="en-US"/>
-              </a:p>
-            </p:txBody>
-          </p:sp>
-        </p:grpSp>
-        <p:sp>
-          <p:nvSpPr>
-            <p:cNvPr id="27" name="フリーフォーム: 図形 26">
-              <a:extLst>
-                <a:ext uri="{FF2B5EF4-FFF2-40B4-BE49-F238E27FC236}">
-                  <a16:creationId xmlns:a16="http://schemas.microsoft.com/office/drawing/2014/main" id="{92B872FA-D2EC-487B-A73E-7833E794748B}"/>
-                </a:ext>
-              </a:extLst>
-            </p:cNvPr>
-            <p:cNvSpPr/>
-            <p:nvPr/>
-          </p:nvSpPr>
-          <p:spPr>
-            <a:xfrm rot="10800000">
-              <a:off x="5535455" y="3702017"/>
-              <a:ext cx="1447800" cy="1440181"/>
-            </a:xfrm>
-            <a:custGeom>
-              <a:avLst/>
-              <a:gdLst>
-                <a:gd name="connsiteX0" fmla="*/ 0 w 1447800"/>
-                <a:gd name="connsiteY0" fmla="*/ 1432561 h 1440181"/>
-                <a:gd name="connsiteX1" fmla="*/ 762000 w 1447800"/>
-                <a:gd name="connsiteY1" fmla="*/ 1 h 1440181"/>
-                <a:gd name="connsiteX2" fmla="*/ 1447800 w 1447800"/>
-                <a:gd name="connsiteY2" fmla="*/ 1440181 h 1440181"/>
-              </a:gdLst>
-              <a:ahLst/>
-              <a:cxnLst>
-                <a:cxn ang="0">
-                  <a:pos x="connsiteX0" y="connsiteY0"/>
-                </a:cxn>
-                <a:cxn ang="0">
-                  <a:pos x="connsiteX1" y="connsiteY1"/>
-                </a:cxn>
-                <a:cxn ang="0">
-                  <a:pos x="connsiteX2" y="connsiteY2"/>
-                </a:cxn>
-              </a:cxnLst>
-              <a:rect l="l" t="t" r="r" b="b"/>
-              <a:pathLst>
-                <a:path w="1447800" h="1440181">
-                  <a:moveTo>
-                    <a:pt x="0" y="1432561"/>
-                  </a:moveTo>
-                  <a:cubicBezTo>
-                    <a:pt x="260350" y="715646"/>
-                    <a:pt x="520700" y="-1269"/>
-                    <a:pt x="762000" y="1"/>
-                  </a:cubicBezTo>
-                  <a:cubicBezTo>
-                    <a:pt x="1003300" y="1271"/>
-                    <a:pt x="1225550" y="720726"/>
-                    <a:pt x="1447800" y="1440181"/>
-                  </a:cubicBezTo>
-                </a:path>
-              </a:pathLst>
-            </a:custGeom>
-            <a:noFill/>
-            <a:ln>
-              <a:solidFill>
-                <a:srgbClr val="FF0000"/>
-              </a:solidFill>
-            </a:ln>
-          </p:spPr>
-          <p:style>
-            <a:lnRef idx="2">
-              <a:schemeClr val="accent1">
-                <a:shade val="50000"/>
-              </a:schemeClr>
-            </a:lnRef>
-            <a:fillRef idx="1">
-              <a:schemeClr val="accent1"/>
-            </a:fillRef>
-            <a:effectRef idx="0">
-              <a:schemeClr val="accent1"/>
-            </a:effectRef>
-            <a:fontRef idx="minor">
-              <a:schemeClr val="lt1"/>
-            </a:fontRef>
-          </p:style>
-          <p:txBody>
-            <a:bodyPr rtlCol="0" anchor="ctr"/>
-            <a:lstStyle/>
-            <a:p>
-              <a:pPr algn="ctr"/>
-              <a:endParaRPr kumimoji="1" lang="ja-JP" altLang="en-US"/>
-            </a:p>
-          </p:txBody>
-        </p:sp>
-      </p:grpSp>
+          <a:prstGeom prst="rect">
+            <a:avLst/>
+          </a:prstGeom>
+        </p:spPr>
+      </p:pic>
     </p:spTree>
     <p:extLst>
       <p:ext uri="{BB962C8B-B14F-4D97-AF65-F5344CB8AC3E}">
-        <p14:creationId xmlns:p14="http://schemas.microsoft.com/office/powerpoint/2010/main" val="1898395956"/>
+        <p14:creationId xmlns:p14="http://schemas.microsoft.com/office/powerpoint/2010/main" val="2483012867"/>
       </p:ext>
     </p:extLst>
   </p:cSld>
@@ -9792,7 +6053,7 @@
         <p:spPr>
           <a:xfrm>
             <a:off x="567542" y="491954"/>
-            <a:ext cx="1236236" cy="584775"/>
+            <a:ext cx="2173993" cy="584775"/>
           </a:xfrm>
           <a:prstGeom prst="rect">
             <a:avLst/>
@@ -9811,312 +6072,17 @@
             </a:r>
             <a:r>
               <a:rPr kumimoji="1" lang="ja-JP" altLang="en-US" sz="3200" b="1" u="sng" dirty="0"/>
-              <a:t>波</a:t>
-            </a:r>
-          </a:p>
-        </p:txBody>
-      </p:sp>
-      <mc:AlternateContent xmlns:mc="http://schemas.openxmlformats.org/markup-compatibility/2006">
-        <mc:Choice xmlns:a14="http://schemas.microsoft.com/office/drawing/2010/main" Requires="a14">
-          <p:sp>
-            <p:nvSpPr>
-              <p:cNvPr id="6" name="テキスト ボックス 5">
-                <a:extLst>
-                  <a:ext uri="{FF2B5EF4-FFF2-40B4-BE49-F238E27FC236}">
-                    <a16:creationId xmlns:a16="http://schemas.microsoft.com/office/drawing/2014/main" id="{55830AD6-028B-4C4E-80BF-B70DFC1C3A46}"/>
-                  </a:ext>
-                </a:extLst>
-              </p:cNvPr>
-              <p:cNvSpPr txBox="1"/>
-              <p:nvPr/>
-            </p:nvSpPr>
-            <p:spPr>
-              <a:xfrm>
-                <a:off x="567542" y="1216429"/>
-                <a:ext cx="10956846" cy="1938992"/>
-              </a:xfrm>
-              <a:prstGeom prst="rect">
-                <a:avLst/>
-              </a:prstGeom>
-              <a:noFill/>
-            </p:spPr>
-            <p:txBody>
-              <a:bodyPr wrap="none" rtlCol="0">
-                <a:spAutoFit/>
-              </a:bodyPr>
-              <a:lstStyle/>
-              <a:p>
-                <a:pPr/>
-                <a:r>
-                  <a:rPr kumimoji="1" lang="ja-JP" altLang="en-US" sz="2400" dirty="0"/>
-                  <a:t>角度は</a:t>
-                </a:r>
-                <a14:m>
-                  <m:oMath xmlns:m="http://schemas.openxmlformats.org/officeDocument/2006/math">
-                    <m:r>
-                      <a:rPr kumimoji="1" lang="en-US" altLang="ja-JP" sz="2400" b="1" i="1" dirty="0" smtClean="0">
-                        <a:solidFill>
-                          <a:srgbClr val="FF0000"/>
-                        </a:solidFill>
-                        <a:latin typeface="Cambria Math" panose="02040503050406030204" pitchFamily="18" charset="0"/>
-                      </a:rPr>
-                      <m:t>𝟎</m:t>
-                    </m:r>
-                    <m:r>
-                      <a:rPr kumimoji="1" lang="ja-JP" altLang="en-US" sz="2400" b="1" i="1" dirty="0" smtClean="0">
-                        <a:solidFill>
-                          <a:srgbClr val="FF0000"/>
-                        </a:solidFill>
-                        <a:latin typeface="Cambria Math" panose="02040503050406030204" pitchFamily="18" charset="0"/>
-                      </a:rPr>
-                      <m:t>～</m:t>
-                    </m:r>
-                    <m:r>
-                      <a:rPr kumimoji="1" lang="en-US" altLang="ja-JP" sz="2400" b="1" i="1" dirty="0" smtClean="0">
-                        <a:solidFill>
-                          <a:srgbClr val="FF0000"/>
-                        </a:solidFill>
-                        <a:latin typeface="Cambria Math" panose="02040503050406030204" pitchFamily="18" charset="0"/>
-                      </a:rPr>
-                      <m:t>𝟑𝟔𝟎</m:t>
-                    </m:r>
-                    <m:r>
-                      <a:rPr kumimoji="1" lang="en-US" altLang="ja-JP" sz="2400" b="1" i="1" dirty="0" smtClean="0">
-                        <a:solidFill>
-                          <a:srgbClr val="FF0000"/>
-                        </a:solidFill>
-                        <a:latin typeface="Cambria Math" panose="02040503050406030204" pitchFamily="18" charset="0"/>
-                      </a:rPr>
-                      <m:t>°</m:t>
-                    </m:r>
-                  </m:oMath>
-                </a14:m>
-                <a:r>
-                  <a:rPr kumimoji="1" lang="ja-JP" altLang="en-US" sz="2400" b="1" dirty="0">
-                    <a:solidFill>
-                      <a:srgbClr val="FF0000"/>
-                    </a:solidFill>
-                  </a:rPr>
-                  <a:t>で</a:t>
-                </a:r>
-                <a:r>
-                  <a:rPr kumimoji="1" lang="en-US" altLang="ja-JP" sz="2400" b="1" dirty="0">
-                    <a:solidFill>
-                      <a:srgbClr val="FF0000"/>
-                    </a:solidFill>
-                  </a:rPr>
-                  <a:t>1</a:t>
-                </a:r>
-                <a:r>
-                  <a:rPr kumimoji="1" lang="ja-JP" altLang="en-US" sz="2400" b="1" dirty="0">
-                    <a:solidFill>
-                      <a:srgbClr val="FF0000"/>
-                    </a:solidFill>
-                  </a:rPr>
-                  <a:t>周してループします。</a:t>
-                </a:r>
-                <a:endParaRPr kumimoji="1" lang="en-US" altLang="ja-JP" sz="2400" b="1" dirty="0">
-                  <a:solidFill>
-                    <a:srgbClr val="FF0000"/>
-                  </a:solidFill>
-                </a:endParaRPr>
-              </a:p>
-              <a:p>
-                <a:pPr/>
-                <a:r>
-                  <a:rPr kumimoji="1" lang="ja-JP" altLang="en-US" sz="2400" dirty="0"/>
-                  <a:t>よって</a:t>
-                </a:r>
-                <a:r>
-                  <a:rPr kumimoji="1" lang="ja-JP" altLang="en-US" sz="2400" b="1" dirty="0">
-                    <a:solidFill>
-                      <a:srgbClr val="FF0000"/>
-                    </a:solidFill>
-                  </a:rPr>
-                  <a:t>角度を加算したときに</a:t>
-                </a:r>
-                <a14:m>
-                  <m:oMath xmlns:m="http://schemas.openxmlformats.org/officeDocument/2006/math">
-                    <m:r>
-                      <a:rPr kumimoji="1" lang="en-US" altLang="ja-JP" sz="2400" b="1" i="1" dirty="0" smtClean="0">
-                        <a:solidFill>
-                          <a:srgbClr val="FF0000"/>
-                        </a:solidFill>
-                        <a:latin typeface="Cambria Math" panose="02040503050406030204" pitchFamily="18" charset="0"/>
-                      </a:rPr>
-                      <m:t>𝟑𝟔𝟎</m:t>
-                    </m:r>
-                    <m:r>
-                      <a:rPr kumimoji="1" lang="en-US" altLang="ja-JP" sz="2400" b="1" i="1" dirty="0" smtClean="0">
-                        <a:solidFill>
-                          <a:srgbClr val="FF0000"/>
-                        </a:solidFill>
-                        <a:latin typeface="Cambria Math" panose="02040503050406030204" pitchFamily="18" charset="0"/>
-                      </a:rPr>
-                      <m:t>°</m:t>
-                    </m:r>
-                  </m:oMath>
-                </a14:m>
-                <a:r>
-                  <a:rPr lang="ja-JP" altLang="en-US" sz="2400" b="1" dirty="0">
-                    <a:solidFill>
-                      <a:srgbClr val="FF0000"/>
-                    </a:solidFill>
-                  </a:rPr>
-                  <a:t>を超えた場合</a:t>
-                </a:r>
-                <a:r>
-                  <a:rPr lang="ja-JP" altLang="en-US" sz="2400" dirty="0"/>
-                  <a:t>は、</a:t>
-                </a:r>
-                <a:endParaRPr lang="en-US" altLang="ja-JP" sz="2400" dirty="0"/>
-              </a:p>
-              <a:p>
-                <a:pPr/>
-                <a14:m>
-                  <m:oMath xmlns:m="http://schemas.openxmlformats.org/officeDocument/2006/math">
-                    <m:r>
-                      <a:rPr kumimoji="1" lang="en-US" altLang="ja-JP" sz="2400" b="1" i="1" dirty="0" smtClean="0">
-                        <a:solidFill>
-                          <a:srgbClr val="FF0000"/>
-                        </a:solidFill>
-                        <a:latin typeface="Cambria Math" panose="02040503050406030204" pitchFamily="18" charset="0"/>
-                      </a:rPr>
-                      <m:t>𝟎</m:t>
-                    </m:r>
-                    <m:r>
-                      <a:rPr kumimoji="1" lang="ja-JP" altLang="en-US" sz="2400" b="1" i="1" dirty="0" smtClean="0">
-                        <a:solidFill>
-                          <a:srgbClr val="FF0000"/>
-                        </a:solidFill>
-                        <a:latin typeface="Cambria Math" panose="02040503050406030204" pitchFamily="18" charset="0"/>
-                      </a:rPr>
-                      <m:t>～</m:t>
-                    </m:r>
-                    <m:r>
-                      <a:rPr kumimoji="1" lang="en-US" altLang="ja-JP" sz="2400" b="1" i="1" dirty="0" smtClean="0">
-                        <a:solidFill>
-                          <a:srgbClr val="FF0000"/>
-                        </a:solidFill>
-                        <a:latin typeface="Cambria Math" panose="02040503050406030204" pitchFamily="18" charset="0"/>
-                      </a:rPr>
-                      <m:t>𝟑𝟔𝟎</m:t>
-                    </m:r>
-                    <m:r>
-                      <a:rPr kumimoji="1" lang="en-US" altLang="ja-JP" sz="2400" b="1" i="1" dirty="0" smtClean="0">
-                        <a:solidFill>
-                          <a:srgbClr val="FF0000"/>
-                        </a:solidFill>
-                        <a:latin typeface="Cambria Math" panose="02040503050406030204" pitchFamily="18" charset="0"/>
-                      </a:rPr>
-                      <m:t>°</m:t>
-                    </m:r>
-                  </m:oMath>
-                </a14:m>
-                <a:r>
-                  <a:rPr kumimoji="1" lang="ja-JP" altLang="en-US" sz="2400" b="1" dirty="0">
-                    <a:solidFill>
-                      <a:srgbClr val="FF0000"/>
-                    </a:solidFill>
-                  </a:rPr>
-                  <a:t>の値に変換</a:t>
-                </a:r>
-                <a:r>
-                  <a:rPr kumimoji="1" lang="ja-JP" altLang="en-US" sz="2400" dirty="0"/>
-                  <a:t>する必要があります。</a:t>
-                </a:r>
-                <a:endParaRPr kumimoji="1" lang="en-US" altLang="ja-JP" sz="2400" dirty="0"/>
-              </a:p>
-              <a:p>
-                <a:pPr/>
-                <a:r>
-                  <a:rPr lang="ja-JP" altLang="en-US" sz="2400" dirty="0"/>
-                  <a:t>最後にその処理を作りましょう。ただし、</a:t>
-                </a:r>
-                <a:r>
-                  <a:rPr lang="ja-JP" altLang="en-US" sz="2400" b="1" dirty="0">
-                    <a:solidFill>
-                      <a:srgbClr val="FF0000"/>
-                    </a:solidFill>
-                  </a:rPr>
-                  <a:t>プログラムの単位はラジアンなので</a:t>
-                </a:r>
-                <a:endParaRPr lang="en-US" altLang="ja-JP" sz="2400" b="1" dirty="0">
-                  <a:solidFill>
-                    <a:srgbClr val="FF0000"/>
-                  </a:solidFill>
-                </a:endParaRPr>
-              </a:p>
-              <a:p>
-                <a:pPr/>
-                <a:r>
-                  <a:rPr kumimoji="1" lang="ja-JP" altLang="en-US" sz="2400" b="1" dirty="0">
-                    <a:solidFill>
-                      <a:srgbClr val="FF0000"/>
-                    </a:solidFill>
-                  </a:rPr>
-                  <a:t>気を付けましょう。</a:t>
-                </a:r>
-                <a:endParaRPr kumimoji="1" lang="en-US" altLang="ja-JP" sz="2400" b="1" dirty="0">
-                  <a:solidFill>
-                    <a:srgbClr val="FF0000"/>
-                  </a:solidFill>
-                </a:endParaRPr>
-              </a:p>
-            </p:txBody>
-          </p:sp>
-        </mc:Choice>
-        <mc:Fallback>
-          <p:sp>
-            <p:nvSpPr>
-              <p:cNvPr id="6" name="テキスト ボックス 5">
-                <a:extLst>
-                  <a:ext uri="{FF2B5EF4-FFF2-40B4-BE49-F238E27FC236}">
-                    <a16:creationId xmlns:a16="http://schemas.microsoft.com/office/drawing/2014/main" id="{55830AD6-028B-4C4E-80BF-B70DFC1C3A46}"/>
-                  </a:ext>
-                </a:extLst>
-              </p:cNvPr>
-              <p:cNvSpPr txBox="1">
-                <a:spLocks noRot="1" noChangeAspect="1" noMove="1" noResize="1" noEditPoints="1" noAdjustHandles="1" noChangeArrowheads="1" noChangeShapeType="1" noTextEdit="1"/>
-              </p:cNvSpPr>
-              <p:nvPr/>
-            </p:nvSpPr>
-            <p:spPr>
-              <a:xfrm>
-                <a:off x="567542" y="1216429"/>
-                <a:ext cx="10956846" cy="1938992"/>
-              </a:xfrm>
-              <a:prstGeom prst="rect">
-                <a:avLst/>
-              </a:prstGeom>
-              <a:blipFill>
-                <a:blip r:embed="rId2"/>
-                <a:stretch>
-                  <a:fillRect l="-835" t="-2516" b="-6289"/>
-                </a:stretch>
-              </a:blipFill>
-            </p:spPr>
-            <p:txBody>
-              <a:bodyPr/>
-              <a:lstStyle/>
-              <a:p>
-                <a:r>
-                  <a:rPr lang="ja-JP" altLang="en-US">
-                    <a:noFill/>
-                  </a:rPr>
-                  <a:t> </a:t>
-                </a:r>
-              </a:p>
-            </p:txBody>
-          </p:sp>
-        </mc:Fallback>
-      </mc:AlternateContent>
-      <p:sp>
-        <p:nvSpPr>
-          <p:cNvPr id="24" name="テキスト ボックス 23">
-            <a:extLst>
-              <a:ext uri="{FF2B5EF4-FFF2-40B4-BE49-F238E27FC236}">
-                <a16:creationId xmlns:a16="http://schemas.microsoft.com/office/drawing/2014/main" id="{1EFAFB10-5F91-461F-AF85-6CDA67881A13}"/>
+              <a:t>波 練習</a:t>
+            </a:r>
+          </a:p>
+        </p:txBody>
+      </p:sp>
+      <p:sp>
+        <p:nvSpPr>
+          <p:cNvPr id="6" name="テキスト ボックス 5">
+            <a:extLst>
+              <a:ext uri="{FF2B5EF4-FFF2-40B4-BE49-F238E27FC236}">
+                <a16:creationId xmlns:a16="http://schemas.microsoft.com/office/drawing/2014/main" id="{55830AD6-028B-4C4E-80BF-B70DFC1C3A46}"/>
               </a:ext>
             </a:extLst>
           </p:cNvPr>
@@ -10125,8 +6091,8 @@
         </p:nvSpPr>
         <p:spPr>
           <a:xfrm>
-            <a:off x="9354873" y="5761529"/>
-            <a:ext cx="1723549" cy="461665"/>
+            <a:off x="567542" y="1216429"/>
+            <a:ext cx="11171648" cy="461665"/>
           </a:xfrm>
           <a:prstGeom prst="rect">
             <a:avLst/>
@@ -10140,121 +6106,24 @@
           <a:lstStyle/>
           <a:p>
             <a:r>
-              <a:rPr lang="ja-JP" altLang="en-US" sz="2400" b="1" dirty="0">
+              <a:rPr kumimoji="1" lang="ja-JP" altLang="en-US" sz="2400" dirty="0"/>
+              <a:t>ブロックが４秒で１ループするように、</a:t>
+            </a:r>
+            <a:r>
+              <a:rPr lang="ja-JP" altLang="en-US" sz="2400" dirty="0"/>
+              <a:t>定数</a:t>
+            </a:r>
+            <a:r>
+              <a:rPr lang="en-US" altLang="ja-JP" sz="2400" b="1" dirty="0">
                 <a:solidFill>
-                  <a:srgbClr val="FF0000"/>
+                  <a:srgbClr val="7030A0"/>
                 </a:solidFill>
               </a:rPr>
-              <a:t>ここまで③</a:t>
-            </a:r>
-            <a:endParaRPr kumimoji="1" lang="en-US" altLang="ja-JP" sz="2400" dirty="0"/>
-          </a:p>
-        </p:txBody>
-      </p:sp>
-    </p:spTree>
-    <p:extLst>
-      <p:ext uri="{BB962C8B-B14F-4D97-AF65-F5344CB8AC3E}">
-        <p14:creationId xmlns:p14="http://schemas.microsoft.com/office/powerpoint/2010/main" val="1152248655"/>
-      </p:ext>
-    </p:extLst>
-  </p:cSld>
-  <p:clrMapOvr>
-    <a:masterClrMapping/>
-  </p:clrMapOvr>
-</p:sld>
-</file>
-
-<file path=ppt/slides/slide8.xml><?xml version="1.0" encoding="utf-8"?>
-<p:sld xmlns:a="http://schemas.openxmlformats.org/drawingml/2006/main" xmlns:r="http://schemas.openxmlformats.org/officeDocument/2006/relationships" xmlns:p="http://schemas.openxmlformats.org/presentationml/2006/main">
-  <p:cSld>
-    <p:spTree>
-      <p:nvGrpSpPr>
-        <p:cNvPr id="1" name=""/>
-        <p:cNvGrpSpPr/>
-        <p:nvPr/>
-      </p:nvGrpSpPr>
-      <p:grpSpPr>
-        <a:xfrm>
-          <a:off x="0" y="0"/>
-          <a:ext cx="0" cy="0"/>
-          <a:chOff x="0" y="0"/>
-          <a:chExt cx="0" cy="0"/>
-        </a:xfrm>
-      </p:grpSpPr>
-      <p:sp>
-        <p:nvSpPr>
-          <p:cNvPr id="4" name="テキスト ボックス 3">
-            <a:extLst>
-              <a:ext uri="{FF2B5EF4-FFF2-40B4-BE49-F238E27FC236}">
-                <a16:creationId xmlns:a16="http://schemas.microsoft.com/office/drawing/2014/main" id="{5A13BF46-B8C5-48AA-8308-C9ECFF431A18}"/>
-              </a:ext>
-            </a:extLst>
-          </p:cNvPr>
-          <p:cNvSpPr txBox="1"/>
-          <p:nvPr/>
-        </p:nvSpPr>
-        <p:spPr>
-          <a:xfrm>
-            <a:off x="567542" y="491954"/>
-            <a:ext cx="1236236" cy="584775"/>
-          </a:xfrm>
-          <a:prstGeom prst="rect">
-            <a:avLst/>
-          </a:prstGeom>
-          <a:noFill/>
-        </p:spPr>
-        <p:txBody>
-          <a:bodyPr wrap="none" rtlCol="0">
-            <a:spAutoFit/>
-          </a:bodyPr>
-          <a:lstStyle/>
-          <a:p>
-            <a:r>
-              <a:rPr kumimoji="1" lang="en-US" altLang="ja-JP" sz="3200" b="1" u="sng" dirty="0"/>
-              <a:t>Sin</a:t>
-            </a:r>
-            <a:r>
-              <a:rPr kumimoji="1" lang="ja-JP" altLang="en-US" sz="3200" b="1" u="sng" dirty="0"/>
-              <a:t>波</a:t>
-            </a:r>
-          </a:p>
-        </p:txBody>
-      </p:sp>
-      <p:sp>
-        <p:nvSpPr>
-          <p:cNvPr id="6" name="テキスト ボックス 5">
-            <a:extLst>
-              <a:ext uri="{FF2B5EF4-FFF2-40B4-BE49-F238E27FC236}">
-                <a16:creationId xmlns:a16="http://schemas.microsoft.com/office/drawing/2014/main" id="{55830AD6-028B-4C4E-80BF-B70DFC1C3A46}"/>
-              </a:ext>
-            </a:extLst>
-          </p:cNvPr>
-          <p:cNvSpPr txBox="1"/>
-          <p:nvPr/>
-        </p:nvSpPr>
-        <p:spPr>
-          <a:xfrm>
-            <a:off x="567542" y="1216429"/>
-            <a:ext cx="7572907" cy="461665"/>
-          </a:xfrm>
-          <a:prstGeom prst="rect">
-            <a:avLst/>
-          </a:prstGeom>
-          <a:noFill/>
-        </p:spPr>
-        <p:txBody>
-          <a:bodyPr wrap="none" rtlCol="0">
-            <a:spAutoFit/>
-          </a:bodyPr>
-          <a:lstStyle/>
-          <a:p>
-            <a:r>
-              <a:rPr kumimoji="1" lang="en-US" altLang="ja-JP" sz="2400" dirty="0"/>
-              <a:t>MoveBlock.cpp</a:t>
-            </a:r>
-            <a:r>
-              <a:rPr kumimoji="1" lang="ja-JP" altLang="en-US" sz="2400" dirty="0"/>
-              <a:t>を開いて以下の空白を埋めましょう。</a:t>
+              <a:t>MOVE_SPEED</a:t>
+            </a:r>
+            <a:r>
+              <a:rPr lang="ja-JP" altLang="en-US" sz="2400" dirty="0"/>
+              <a:t>を変更しましょう。</a:t>
             </a:r>
             <a:endParaRPr kumimoji="1" lang="en-US" altLang="ja-JP" sz="2400" dirty="0"/>
           </a:p>
@@ -10262,10 +6131,10 @@
       </p:sp>
       <p:pic>
         <p:nvPicPr>
-          <p:cNvPr id="5" name="図 4">
-            <a:extLst>
-              <a:ext uri="{FF2B5EF4-FFF2-40B4-BE49-F238E27FC236}">
-                <a16:creationId xmlns:a16="http://schemas.microsoft.com/office/drawing/2014/main" id="{D52C208D-B59E-42D5-8420-1654FD6B9983}"/>
+          <p:cNvPr id="9" name="図 8">
+            <a:extLst>
+              <a:ext uri="{FF2B5EF4-FFF2-40B4-BE49-F238E27FC236}">
+                <a16:creationId xmlns:a16="http://schemas.microsoft.com/office/drawing/2014/main" id="{FBC34D77-84A3-4A4B-8F48-CB050C9690D9}"/>
               </a:ext>
             </a:extLst>
           </p:cNvPr>
@@ -10283,17 +6152,61 @@
         <p:spPr>
           <a:xfrm>
             <a:off x="567542" y="1817794"/>
-            <a:ext cx="8406330" cy="4197524"/>
+            <a:ext cx="5544324" cy="1724266"/>
           </a:xfrm>
           <a:prstGeom prst="rect">
             <a:avLst/>
           </a:prstGeom>
         </p:spPr>
       </p:pic>
+      <p:sp>
+        <p:nvSpPr>
+          <p:cNvPr id="11" name="テキスト ボックス 10">
+            <a:extLst>
+              <a:ext uri="{FF2B5EF4-FFF2-40B4-BE49-F238E27FC236}">
+                <a16:creationId xmlns:a16="http://schemas.microsoft.com/office/drawing/2014/main" id="{92C5C710-12D8-4C03-871A-4BEDB5AEB452}"/>
+              </a:ext>
+            </a:extLst>
+          </p:cNvPr>
+          <p:cNvSpPr txBox="1"/>
+          <p:nvPr/>
+        </p:nvSpPr>
+        <p:spPr>
+          <a:xfrm>
+            <a:off x="567542" y="3681760"/>
+            <a:ext cx="10783721" cy="461665"/>
+          </a:xfrm>
+          <a:prstGeom prst="rect">
+            <a:avLst/>
+          </a:prstGeom>
+          <a:noFill/>
+        </p:spPr>
+        <p:txBody>
+          <a:bodyPr wrap="none" rtlCol="0">
+            <a:spAutoFit/>
+          </a:bodyPr>
+          <a:lstStyle/>
+          <a:p>
+            <a:r>
+              <a:rPr kumimoji="1" lang="en-US" altLang="ja-JP" sz="2400" b="1" dirty="0">
+                <a:solidFill>
+                  <a:srgbClr val="FF0000"/>
+                </a:solidFill>
+              </a:rPr>
+              <a:t>MoveBlock.cpp</a:t>
+            </a:r>
+            <a:r>
+              <a:rPr kumimoji="1" lang="ja-JP" altLang="en-US" sz="2400" dirty="0"/>
+              <a:t>をよく読んで、どのようなプログラムか把握しましょう。</a:t>
+            </a:r>
+            <a:endParaRPr kumimoji="1" lang="en-US" altLang="ja-JP" sz="2400" dirty="0"/>
+          </a:p>
+        </p:txBody>
+      </p:sp>
     </p:spTree>
     <p:extLst>
       <p:ext uri="{BB962C8B-B14F-4D97-AF65-F5344CB8AC3E}">
-        <p14:creationId xmlns:p14="http://schemas.microsoft.com/office/powerpoint/2010/main" val="3618054126"/>
+        <p14:creationId xmlns:p14="http://schemas.microsoft.com/office/powerpoint/2010/main" val="4294548183"/>
       </p:ext>
     </p:extLst>
   </p:cSld>
